--- a/opening/slides/opening_defense_20260720_v5.pptx
+++ b/opening/slides/opening_defense_20260720_v5.pptx
@@ -9,7 +9,7 @@
     <p:notesMasterId r:id="rId5"/>
   </p:notesMasterIdLst>
   <p:handoutMasterIdLst>
-    <p:handoutMasterId r:id="rId30"/>
+    <p:handoutMasterId r:id="rId33"/>
   </p:handoutMasterIdLst>
   <p:sldIdLst>
     <p:sldId id="256" r:id="rId4"/>
@@ -20,28 +20,31 @@
     <p:sldId id="262" r:id="rId10"/>
     <p:sldId id="263" r:id="rId11"/>
     <p:sldId id="264" r:id="rId12"/>
-    <p:sldId id="265" r:id="rId13"/>
-    <p:sldId id="266" r:id="rId14"/>
-    <p:sldId id="267" r:id="rId15"/>
-    <p:sldId id="277" r:id="rId16"/>
-    <p:sldId id="268" r:id="rId17"/>
-    <p:sldId id="278" r:id="rId18"/>
-    <p:sldId id="279" r:id="rId19"/>
-    <p:sldId id="280" r:id="rId20"/>
-    <p:sldId id="269" r:id="rId21"/>
-    <p:sldId id="270" r:id="rId22"/>
-    <p:sldId id="271" r:id="rId23"/>
-    <p:sldId id="272" r:id="rId24"/>
-    <p:sldId id="273" r:id="rId25"/>
-    <p:sldId id="281" r:id="rId26"/>
-    <p:sldId id="274" r:id="rId27"/>
-    <p:sldId id="275" r:id="rId28"/>
-    <p:sldId id="276" r:id="rId29"/>
+    <p:sldId id="282" r:id="rId13"/>
+    <p:sldId id="284" r:id="rId14"/>
+    <p:sldId id="265" r:id="rId15"/>
+    <p:sldId id="283" r:id="rId16"/>
+    <p:sldId id="266" r:id="rId17"/>
+    <p:sldId id="267" r:id="rId18"/>
+    <p:sldId id="277" r:id="rId19"/>
+    <p:sldId id="268" r:id="rId20"/>
+    <p:sldId id="278" r:id="rId21"/>
+    <p:sldId id="279" r:id="rId22"/>
+    <p:sldId id="280" r:id="rId23"/>
+    <p:sldId id="269" r:id="rId24"/>
+    <p:sldId id="270" r:id="rId25"/>
+    <p:sldId id="271" r:id="rId26"/>
+    <p:sldId id="272" r:id="rId27"/>
+    <p:sldId id="273" r:id="rId28"/>
+    <p:sldId id="281" r:id="rId29"/>
+    <p:sldId id="274" r:id="rId30"/>
+    <p:sldId id="275" r:id="rId31"/>
+    <p:sldId id="276" r:id="rId32"/>
   </p:sldIdLst>
   <p:sldSz cx="12192000" cy="6858000"/>
   <p:notesSz cx="7099300" cy="10234295"/>
   <p:custDataLst>
-    <p:tags r:id="rId34"/>
+    <p:tags r:id="rId37"/>
   </p:custDataLst>
   <p:defaultTextStyle>
     <a:defPPr>
@@ -236,7 +239,7 @@
             <a:srgbClr val="A4A3A4"/>
           </p15:clr>
         </p15:guide>
-        <p15:guide id="2" pos="3772" userDrawn="1">
+        <p15:guide id="2" pos="3787" userDrawn="1">
           <p15:clr>
             <a:srgbClr val="A4A3A4"/>
           </p15:clr>
@@ -1820,7 +1823,7 @@
               <a:defRPr sz="1000" b="0"/>
             </a:pPr>
             <a:r>
-              <a:t>第三部分介绍研究目标和两项策略设计。</a:t>
+              <a:t>7月18-19日完成vLLM baseline和Daft接入。三项发现构成论文正文可写证据。图中展示shared-vLLM下不同K_max对前台作业的冲击——无界提交导致2.3×恶化。Daft管线开销已验证&lt;0.1s，且Daft支持@daft.cls GPU UDF，后续多模态实验只需替换数据列类型（prompt→image），复用同一套策略代码。</a:t>
             </a:r>
           </a:p>
           <a:p>
@@ -1834,6 +1837,14 @@
             </a:pPr>
             <a:r>
               <a:t>答辩备注：</a:t>
+            </a:r>
+          </a:p>
+          <a:p>
+            <a:pPr>
+              <a:defRPr sz="1000" b="0"/>
+            </a:pPr>
+            <a:r>
+              <a:t>澄清：vLLM baseline是本地rehearsal。Queue-adaptive已实现但不如静态K_max——这是开题后需攻克的技术难点。开题阶段只展示动机成立，不声称已完成。</a:t>
             </a:r>
           </a:p>
         </p:txBody>
@@ -1915,7 +1926,7 @@
               <a:defRPr sz="1000" b="0"/>
             </a:pPr>
             <a:r>
-              <a:t>总体目标：基于Daft/Ray端到端实验链路，优化数据组织策略和提交控制策略。vLLM为部署平台不修改，Ray为架构设计空间。</a:t>
+              <a:t>7月18-19日完成vLLM baseline和Daft接入。三项发现构成论文正文可写证据。图中展示shared-vLLM下不同K_max对前台作业的冲击——无界提交导致2.3×恶化。Daft管线开销已验证&lt;0.1s，且Daft支持@daft.cls GPU UDF，后续多模态实验只需替换数据列类型（prompt→image），复用同一套策略代码。</a:t>
             </a:r>
           </a:p>
           <a:p>
@@ -1936,7 +1947,7 @@
               <a:defRPr sz="1000" b="0"/>
             </a:pPr>
             <a:r>
-              <a:t>不能把题目解释成'优化Ray'。真正问题是数据库AI workload的数据组织、服务感知调度和持久化协同。</a:t>
+              <a:t>澄清：vLLM baseline是本地rehearsal。Queue-adaptive已实现但不如静态K_max——这是开题后需攻克的技术难点。开题阶段只展示动机成立，不声称已完成。</a:t>
             </a:r>
           </a:p>
         </p:txBody>
@@ -2018,7 +2029,7 @@
               <a:defRPr sz="1000" b="0"/>
             </a:pPr>
             <a:r>
-              <a:t>研究内容一的核心问题是：固定行数不等于固定计算量。LLM每行token数差异巨大（实测13.9×跨度），所以按token量而不是按行数来组织batch是更合理的做法。三种策略从三个角度优化：token-budget控制每批总计算量，length-align减少批内straggler，prefix-aware让vLLM复用KV-cache。通过Ray actor异构化实现——不同策略对应不同actor类型。</a:t>
+              <a:t>7月18-19日完成vLLM baseline和Daft接入。三项发现构成论文正文可写证据。图中展示shared-vLLM下不同K_max对前台作业的冲击——无界提交导致2.3×恶化。Daft管线开销已验证&lt;0.1s，且Daft支持@daft.cls GPU UDF，后续多模态实验只需替换数据列类型（prompt→image），复用同一套策略代码。</a:t>
             </a:r>
           </a:p>
           <a:p>
@@ -2039,7 +2050,7 @@
               <a:defRPr sz="1000" b="0"/>
             </a:pPr>
             <a:r>
-              <a:t>引擎级参数（Daft into_batches、batch_size等）与策略级决策共同构成优化空间——不是简单的"选一个batch size"。</a:t>
+              <a:t>澄清：vLLM baseline是本地rehearsal。Queue-adaptive已实现但不如静态K_max——这是开题后需攻克的技术难点。开题阶段只展示动机成立，不声称已完成。</a:t>
             </a:r>
           </a:p>
         </p:txBody>
@@ -2121,7 +2132,7 @@
               <a:defRPr sz="1000" b="0"/>
             </a:pPr>
             <a:r>
-              <a:t>研究内容二关注提交控制——什么时候把攒好的请求发给vLLM。固定间隔的问题是：GPU空闲时你还在等，GPU忙时你又雪上加霜。Queue-adaptive让每个actor独立看vLLM队列状态决定发不发：队列空就发，队列堵就等。K_max不再预设固定值，由adaptive行为自然形成。Actor pool按请求特征分池路由。</a:t>
+              <a:t>第三部分介绍研究目标和两项策略设计。</a:t>
             </a:r>
           </a:p>
           <a:p>
@@ -2135,14 +2146,6 @@
             </a:pPr>
             <a:r>
               <a:t>答辩备注：</a:t>
-            </a:r>
-          </a:p>
-          <a:p>
-            <a:pPr>
-              <a:defRPr sz="1000" b="0"/>
-            </a:pPr>
-            <a:r>
-              <a:t>当前queue-adaptive已实现但不如静态K_max=8——开题后需改进。若3轮改进仍不超越则降级。但K_max必要性已通过shared-vLLM干扰实验证明（2.3×恶化）。</a:t>
             </a:r>
           </a:p>
         </p:txBody>
@@ -2224,7 +2227,7 @@
               <a:defRPr sz="1000" b="0"/>
             </a:pPr>
             <a:r>
-              <a:t>耦合验证是AGENTS.md写死的核心实验。方法：分别独立搜索RC1最优 → 独立搜索RC2最优 → 拼接 → 与联合grid search对比。如果联合显著优于拼接，说明两项策略有交互效应需要联合调优。如果接近，说明策略正交可以分层独立优化。无论哪种结果都不改变核心贡献。写回作为保护约束纳入端到端评价。</a:t>
+              <a:t>总体目标：基于Daft/Ray端到端实验链路，优化数据组织策略和提交控制策略。vLLM为部署平台不修改，Ray为架构设计空间。</a:t>
             </a:r>
           </a:p>
           <a:p>
@@ -2245,7 +2248,7 @@
               <a:defRPr sz="1000" b="0"/>
             </a:pPr>
             <a:r>
-              <a:t>耦合验证必须回答——不能只分别报告两项策略各自最优，而不说明它们之间是否需要联合调优。</a:t>
+              <a:t>不能把题目解释成'优化Ray'。真正问题是数据库AI workload的数据组织、服务感知调度和持久化协同。</a:t>
             </a:r>
           </a:p>
         </p:txBody>
@@ -2327,7 +2330,7 @@
               <a:defRPr sz="1000" b="0"/>
             </a:pPr>
             <a:r>
-              <a:t>实验分四阶段。前置已全部完成。后续按数据组织→提交控制→耦合验证→写回判定顺序推进，每阶段有明确对照和反证。</a:t>
+              <a:t>研究内容一的核心问题是：固定行数不等于固定计算量。LLM每行token数差异巨大（实测13.9×跨度），所以按token量而不是按行数来组织batch是更合理的做法。三种策略从三个角度优化：token-budget控制每批总计算量，length-align减少批内straggler，prefix-aware让vLLM复用KV-cache。通过Ray actor异构化实现——不同策略对应不同actor类型。</a:t>
             </a:r>
           </a:p>
           <a:p>
@@ -2348,7 +2351,7 @@
               <a:defRPr sz="1000" b="0"/>
             </a:pPr>
             <a:r>
-              <a:t>前置完成证明方案可执行。如被问'4个月能否完成'：前置已满足，每阶段实验规模可控，脚本已模板化。</a:t>
+              <a:t>引擎级参数（Daft into_batches、batch_size等）与策略级决策共同构成优化空间——不是简单的"选一个batch size"。</a:t>
             </a:r>
           </a:p>
         </p:txBody>
@@ -2430,7 +2433,7 @@
               <a:defRPr sz="1000" b="0"/>
             </a:pPr>
             <a:r>
-              <a:t>第四部分分析可行性和进度安排。</a:t>
+              <a:t>研究内容二关注提交控制——什么时候把攒好的请求发给vLLM。固定间隔的问题是：GPU空闲时你还在等，GPU忙时你又雪上加霜。Queue-adaptive让每个actor独立看vLLM队列状态决定发不发：队列空就发，队列堵就等。K_max不再预设固定值，由adaptive行为自然形成。Actor pool按请求特征分池路由。</a:t>
             </a:r>
           </a:p>
           <a:p>
@@ -2444,6 +2447,14 @@
             </a:pPr>
             <a:r>
               <a:t>答辩备注：</a:t>
+            </a:r>
+          </a:p>
+          <a:p>
+            <a:pPr>
+              <a:defRPr sz="1000" b="0"/>
+            </a:pPr>
+            <a:r>
+              <a:t>当前queue-adaptive已实现但不如静态K_max=8——开题后需改进。若3轮改进仍不超越则降级。但K_max必要性已通过shared-vLLM干扰实验证明（2.3×恶化）。</a:t>
             </a:r>
           </a:p>
         </p:txBody>
@@ -2525,7 +2536,7 @@
               <a:defRPr sz="1000" b="0"/>
             </a:pPr>
             <a:r>
-              <a:t>可行性基于链路已跑通、Daft已验证、vLLM baseline已建立。硬件单机单GPU不影响核心方法验证。预期创新点需要后续实验验证。</a:t>
+              <a:t>耦合验证是AGENTS.md写死的核心实验。方法：分别独立搜索RC1最优 → 独立搜索RC2最优 → 拼接 → 与联合grid search对比。如果联合显著优于拼接，说明两项策略有交互效应需要联合调优。如果接近，说明策略正交可以分层独立优化。无论哪种结果都不改变核心贡献。写回作为保护约束纳入端到端评价。</a:t>
             </a:r>
           </a:p>
           <a:p>
@@ -2546,7 +2557,7 @@
               <a:defRPr sz="1000" b="0"/>
             </a:pPr>
             <a:r>
-              <a:t>主动说明硬件边界：单机单GPU。核心方法（数据组织、in-flight控制、routing）不依赖分布式，单机可验证。</a:t>
+              <a:t>耦合验证必须回答——不能只分别报告两项策略各自最优，而不说明它们之间是否需要联合调优。</a:t>
             </a:r>
           </a:p>
         </p:txBody>
@@ -2614,14 +2625,42 @@
         <p:txBody>
           <a:bodyPr/>
           <a:lstStyle/>
-          <a:p>
-            <a:r>
-              <a:t>汇报讲稿：这里说明 Daft 接入不是单纯工程替换，而是后续多模态泛化验证的前提。图中 DB Read + Build/Organize 都低于 0.1 秒，主要时间仍在 Ray + 模型推理阶段，因此后续可以把 prompt 列替换为 image/frame 列，重点验证 token-budget、length-align、queue-adaptive flush 等策略抽象是否仍成立。</a:t>
-            </a:r>
-          </a:p>
-          <a:p>
-            <a:r>
-              <a:t>答辩备注：图中两个 workload 不同，推理时间不能直接比较；本页只用来说明 Daft 管线开销可控，不声称多模态实验已经完成。</a:t>
+          <a:p/>
+          <a:p>
+            <a:pPr>
+              <a:defRPr sz="1100" b="1"/>
+            </a:pPr>
+            <a:r>
+              <a:t>汇报讲稿：</a:t>
+            </a:r>
+          </a:p>
+          <a:p>
+            <a:pPr>
+              <a:defRPr sz="1000" b="0"/>
+            </a:pPr>
+            <a:r>
+              <a:t>实验分四阶段。前置已全部完成。后续按数据组织→提交控制→耦合验证→写回判定顺序推进，每阶段有明确对照和反证。</a:t>
+            </a:r>
+          </a:p>
+          <a:p>
+            <a:pPr>
+              <a:defRPr sz="1100" b="0"/>
+            </a:pPr>
+          </a:p>
+          <a:p>
+            <a:pPr>
+              <a:defRPr sz="1100" b="1"/>
+            </a:pPr>
+            <a:r>
+              <a:t>答辩备注：</a:t>
+            </a:r>
+          </a:p>
+          <a:p>
+            <a:pPr>
+              <a:defRPr sz="1000" b="0"/>
+            </a:pPr>
+            <a:r>
+              <a:t>前置完成证明方案可执行。如被问'4个月能否完成'：前置已满足，每阶段实验规模可控，脚本已模板化。</a:t>
             </a:r>
           </a:p>
         </p:txBody>
@@ -2703,7 +2742,7 @@
               <a:defRPr sz="1000" b="0"/>
             </a:pPr>
             <a:r>
-              <a:t>进度从7月到12月。7月前置已完成。8-9月是核心实验窗口。10月写回。最后两个月整理写论文。每阶段有可反证条件。</a:t>
+              <a:t>第四部分分析可行性和进度安排。</a:t>
             </a:r>
           </a:p>
           <a:p>
@@ -2717,14 +2756,6 @@
             </a:pPr>
             <a:r>
               <a:t>答辩备注：</a:t>
-            </a:r>
-          </a:p>
-          <a:p>
-            <a:pPr>
-              <a:defRPr sz="1000" b="0"/>
-            </a:pPr>
-            <a:r>
-              <a:t>关键路径是8-9月消融实验——论文主体证据来源。如学校进度节点不同可按学院模板调整。</a:t>
             </a:r>
           </a:p>
         </p:txBody>
@@ -2901,7 +2932,7 @@
               <a:defRPr sz="1000" b="0"/>
             </a:pPr>
             <a:r>
-              <a:t>三点总结。场景真实——工业趋势。证据初步成立——关键信号。后续聚焦——两项策略加耦合验证。</a:t>
+              <a:t>可行性基于链路已跑通、Daft已验证、vLLM baseline已建立。硬件单机单GPU不影响核心方法验证。预期创新点需要后续实验验证。</a:t>
             </a:r>
           </a:p>
           <a:p>
@@ -2922,7 +2953,7 @@
               <a:defRPr sz="1000" b="0"/>
             </a:pPr>
             <a:r>
-              <a:t>回答质疑优先回到阶段画像和不能声称的边界。最难的技术点是queue-adaptive控制器效果不如静态K_max——正在攻克。</a:t>
+              <a:t>主动说明硬件边界：单机单GPU。核心方法（数据组织、in-flight控制、routing）不依赖分布式，单机可验证。</a:t>
             </a:r>
           </a:p>
         </p:txBody>
@@ -2948,6 +2979,287 @@
 </file>
 
 <file path=ppt/notesSlides/notesSlide21.xml><?xml version="1.0" encoding="utf-8"?>
+<p:notes xmlns:a="http://schemas.openxmlformats.org/drawingml/2006/main" xmlns:r="http://schemas.openxmlformats.org/officeDocument/2006/relationships" xmlns:p="http://schemas.openxmlformats.org/presentationml/2006/main">
+  <p:cSld>
+    <p:spTree>
+      <p:nvGrpSpPr>
+        <p:cNvPr id="1" name=""/>
+        <p:cNvGrpSpPr/>
+        <p:nvPr/>
+      </p:nvGrpSpPr>
+      <p:grpSpPr>
+        <a:xfrm>
+          <a:off x="0" y="0"/>
+          <a:ext cx="0" cy="0"/>
+          <a:chOff x="0" y="0"/>
+          <a:chExt cx="0" cy="0"/>
+        </a:xfrm>
+      </p:grpSpPr>
+      <p:sp>
+        <p:nvSpPr>
+          <p:cNvPr id="2" name="Slide Image Placeholder 1"/>
+          <p:cNvSpPr>
+            <a:spLocks noGrp="1"/>
+          </p:cNvSpPr>
+          <p:nvPr>
+            <p:ph type="sldImg" idx="2"/>
+          </p:nvPr>
+        </p:nvSpPr>
+        <p:spPr/>
+      </p:sp>
+      <p:sp>
+        <p:nvSpPr>
+          <p:cNvPr id="3" name="Notes Placeholder 2"/>
+          <p:cNvSpPr>
+            <a:spLocks noGrp="1"/>
+          </p:cNvSpPr>
+          <p:nvPr>
+            <p:ph type="body" sz="quarter" idx="3"/>
+          </p:nvPr>
+        </p:nvSpPr>
+        <p:spPr/>
+        <p:txBody>
+          <a:bodyPr/>
+          <a:lstStyle/>
+          <a:p>
+            <a:r>
+              <a:t>汇报讲稿：这里说明 Daft 接入不是单纯工程替换，而是后续多模态泛化验证的前提。图中 DB Read + Build/Organize 都低于 0.1 秒，主要时间仍在 Ray + 模型推理阶段，因此后续可以把 prompt 列替换为 image/frame 列，重点验证 token-budget、length-align、queue-adaptive flush 等策略抽象是否仍成立。</a:t>
+            </a:r>
+          </a:p>
+          <a:p>
+            <a:r>
+              <a:t>答辩备注：图中两个 workload 不同，推理时间不能直接比较；本页只用来说明 Daft 管线开销可控，不声称多模态实验已经完成。</a:t>
+            </a:r>
+          </a:p>
+        </p:txBody>
+      </p:sp>
+      <p:sp>
+        <p:nvSpPr>
+          <p:cNvPr id="4" name="Slide Number Placeholder 3"/>
+          <p:cNvSpPr>
+            <a:spLocks noGrp="1"/>
+          </p:cNvSpPr>
+          <p:nvPr>
+            <p:ph type="sldNum" sz="quarter" idx="5"/>
+          </p:nvPr>
+        </p:nvSpPr>
+        <p:spPr/>
+      </p:sp>
+    </p:spTree>
+  </p:cSld>
+  <p:clrMapOvr>
+    <a:masterClrMapping/>
+  </p:clrMapOvr>
+</p:notes>
+</file>
+
+<file path=ppt/notesSlides/notesSlide22.xml><?xml version="1.0" encoding="utf-8"?>
+<p:notes xmlns:a="http://schemas.openxmlformats.org/drawingml/2006/main" xmlns:r="http://schemas.openxmlformats.org/officeDocument/2006/relationships" xmlns:p="http://schemas.openxmlformats.org/presentationml/2006/main">
+  <p:cSld>
+    <p:spTree>
+      <p:nvGrpSpPr>
+        <p:cNvPr id="1" name=""/>
+        <p:cNvGrpSpPr/>
+        <p:nvPr/>
+      </p:nvGrpSpPr>
+      <p:grpSpPr>
+        <a:xfrm>
+          <a:off x="0" y="0"/>
+          <a:ext cx="0" cy="0"/>
+          <a:chOff x="0" y="0"/>
+          <a:chExt cx="0" cy="0"/>
+        </a:xfrm>
+      </p:grpSpPr>
+      <p:sp>
+        <p:nvSpPr>
+          <p:cNvPr id="2" name="Slide Image Placeholder 1"/>
+          <p:cNvSpPr>
+            <a:spLocks noGrp="1"/>
+          </p:cNvSpPr>
+          <p:nvPr>
+            <p:ph type="sldImg" idx="2"/>
+          </p:nvPr>
+        </p:nvSpPr>
+        <p:spPr/>
+      </p:sp>
+      <p:sp>
+        <p:nvSpPr>
+          <p:cNvPr id="3" name="Notes Placeholder 2"/>
+          <p:cNvSpPr>
+            <a:spLocks noGrp="1"/>
+          </p:cNvSpPr>
+          <p:nvPr>
+            <p:ph type="body" sz="quarter" idx="3"/>
+          </p:nvPr>
+        </p:nvSpPr>
+        <p:spPr/>
+        <p:txBody>
+          <a:bodyPr/>
+          <a:lstStyle/>
+          <a:p/>
+          <a:p>
+            <a:pPr>
+              <a:defRPr sz="1100" b="1"/>
+            </a:pPr>
+            <a:r>
+              <a:t>汇报讲稿：</a:t>
+            </a:r>
+          </a:p>
+          <a:p>
+            <a:pPr>
+              <a:defRPr sz="1000" b="0"/>
+            </a:pPr>
+            <a:r>
+              <a:t>进度从7月到12月。7月前置已完成。8-9月是核心实验窗口。10月写回。最后两个月整理写论文。每阶段有可反证条件。</a:t>
+            </a:r>
+          </a:p>
+          <a:p>
+            <a:pPr>
+              <a:defRPr sz="1100" b="0"/>
+            </a:pPr>
+          </a:p>
+          <a:p>
+            <a:pPr>
+              <a:defRPr sz="1100" b="1"/>
+            </a:pPr>
+            <a:r>
+              <a:t>答辩备注：</a:t>
+            </a:r>
+          </a:p>
+          <a:p>
+            <a:pPr>
+              <a:defRPr sz="1000" b="0"/>
+            </a:pPr>
+            <a:r>
+              <a:t>关键路径是8-9月消融实验——论文主体证据来源。如学校进度节点不同可按学院模板调整。</a:t>
+            </a:r>
+          </a:p>
+        </p:txBody>
+      </p:sp>
+      <p:sp>
+        <p:nvSpPr>
+          <p:cNvPr id="4" name="Slide Number Placeholder 3"/>
+          <p:cNvSpPr>
+            <a:spLocks noGrp="1"/>
+          </p:cNvSpPr>
+          <p:nvPr>
+            <p:ph type="sldNum" sz="quarter" idx="5"/>
+          </p:nvPr>
+        </p:nvSpPr>
+        <p:spPr/>
+      </p:sp>
+    </p:spTree>
+  </p:cSld>
+  <p:clrMapOvr>
+    <a:masterClrMapping/>
+  </p:clrMapOvr>
+</p:notes>
+</file>
+
+<file path=ppt/notesSlides/notesSlide23.xml><?xml version="1.0" encoding="utf-8"?>
+<p:notes xmlns:a="http://schemas.openxmlformats.org/drawingml/2006/main" xmlns:r="http://schemas.openxmlformats.org/officeDocument/2006/relationships" xmlns:p="http://schemas.openxmlformats.org/presentationml/2006/main">
+  <p:cSld>
+    <p:spTree>
+      <p:nvGrpSpPr>
+        <p:cNvPr id="1" name=""/>
+        <p:cNvGrpSpPr/>
+        <p:nvPr/>
+      </p:nvGrpSpPr>
+      <p:grpSpPr>
+        <a:xfrm>
+          <a:off x="0" y="0"/>
+          <a:ext cx="0" cy="0"/>
+          <a:chOff x="0" y="0"/>
+          <a:chExt cx="0" cy="0"/>
+        </a:xfrm>
+      </p:grpSpPr>
+      <p:sp>
+        <p:nvSpPr>
+          <p:cNvPr id="2" name="Slide Image Placeholder 1"/>
+          <p:cNvSpPr>
+            <a:spLocks noGrp="1"/>
+          </p:cNvSpPr>
+          <p:nvPr>
+            <p:ph type="sldImg" idx="2"/>
+          </p:nvPr>
+        </p:nvSpPr>
+        <p:spPr/>
+      </p:sp>
+      <p:sp>
+        <p:nvSpPr>
+          <p:cNvPr id="3" name="Notes Placeholder 2"/>
+          <p:cNvSpPr>
+            <a:spLocks noGrp="1"/>
+          </p:cNvSpPr>
+          <p:nvPr>
+            <p:ph type="body" sz="quarter" idx="3"/>
+          </p:nvPr>
+        </p:nvSpPr>
+        <p:spPr/>
+        <p:txBody>
+          <a:bodyPr/>
+          <a:lstStyle/>
+          <a:p/>
+          <a:p>
+            <a:pPr>
+              <a:defRPr sz="1100" b="1"/>
+            </a:pPr>
+            <a:r>
+              <a:t>汇报讲稿：</a:t>
+            </a:r>
+          </a:p>
+          <a:p>
+            <a:pPr>
+              <a:defRPr sz="1000" b="0"/>
+            </a:pPr>
+            <a:r>
+              <a:t>三点总结。场景真实——工业趋势。证据初步成立——关键信号。后续聚焦——两项策略加耦合验证。</a:t>
+            </a:r>
+          </a:p>
+          <a:p>
+            <a:pPr>
+              <a:defRPr sz="1100" b="0"/>
+            </a:pPr>
+          </a:p>
+          <a:p>
+            <a:pPr>
+              <a:defRPr sz="1100" b="1"/>
+            </a:pPr>
+            <a:r>
+              <a:t>答辩备注：</a:t>
+            </a:r>
+          </a:p>
+          <a:p>
+            <a:pPr>
+              <a:defRPr sz="1000" b="0"/>
+            </a:pPr>
+            <a:r>
+              <a:t>回答质疑优先回到阶段画像和不能声称的边界。最难的技术点是queue-adaptive控制器效果不如静态K_max——正在攻克。</a:t>
+            </a:r>
+          </a:p>
+        </p:txBody>
+      </p:sp>
+      <p:sp>
+        <p:nvSpPr>
+          <p:cNvPr id="4" name="Slide Number Placeholder 3"/>
+          <p:cNvSpPr>
+            <a:spLocks noGrp="1"/>
+          </p:cNvSpPr>
+          <p:nvPr>
+            <p:ph type="sldNum" sz="quarter" idx="5"/>
+          </p:nvPr>
+        </p:nvSpPr>
+        <p:spPr/>
+      </p:sp>
+    </p:spTree>
+  </p:cSld>
+  <p:clrMapOvr>
+    <a:masterClrMapping/>
+  </p:clrMapOvr>
+</p:notes>
+</file>
+
+<file path=ppt/notesSlides/notesSlide24.xml><?xml version="1.0" encoding="utf-8"?>
 <p:notes xmlns:a="http://schemas.openxmlformats.org/drawingml/2006/main" xmlns:r="http://schemas.openxmlformats.org/officeDocument/2006/relationships" xmlns:p="http://schemas.openxmlformats.org/presentationml/2006/main">
   <p:cSld>
     <p:spTree>
@@ -9405,16 +9717,30 @@
           <a:p>
             <a:pPr algn="ctr"/>
             <a:r>
-              <a:rPr sz="3000" b="1">
-                <a:solidFill>
-                  <a:srgbClr val="172033"/>
-                </a:solidFill>
-                <a:latin typeface="微软雅黑" panose="020B0503020204020204" charset="-122"/>
+              <a:rPr lang="zh-CN" altLang="en-US" sz="2800" b="1">
+                <a:solidFill>
+                  <a:srgbClr val="000000"/>
+                </a:solidFill>
               </a:rPr>
-              <a:t>面向数据库驱动AI工作负载的
-分布式数据执行与存储协同优化研究</a:t>
-            </a:r>
-            <a:endParaRPr sz="2800" b="1">
+              <a:t>数据库 </a:t>
+            </a:r>
+            <a:r>
+              <a:rPr lang="en-US" altLang="zh-CN" sz="2800" b="1">
+                <a:solidFill>
+                  <a:srgbClr val="000000"/>
+                </a:solidFill>
+              </a:rPr>
+              <a:t>AI </a:t>
+            </a:r>
+            <a:r>
+              <a:rPr lang="zh-CN" altLang="en-US" sz="2800" b="1">
+                <a:solidFill>
+                  <a:srgbClr val="000000"/>
+                </a:solidFill>
+              </a:rPr>
+              <a:t>负载的执行优化与调度研究</a:t>
+            </a:r>
+            <a:endParaRPr lang="zh-CN" altLang="en-US" sz="2800" b="1">
               <a:solidFill>
                 <a:srgbClr val="000000"/>
               </a:solidFill>
@@ -9488,219 +9814,14 @@
       <p:grpSpPr/>
       <p:sp>
         <p:nvSpPr>
-          <p:cNvPr id="2" name="TextBox 1"/>
-          <p:cNvSpPr txBox="1"/>
-          <p:nvPr/>
-        </p:nvSpPr>
-        <p:spPr>
-          <a:xfrm>
-            <a:off x="609600" y="1124712"/>
-            <a:ext cx="10972800" cy="502920"/>
-          </a:xfrm>
-          <a:prstGeom prst="rect">
-            <a:avLst/>
-          </a:prstGeom>
-          <a:noFill/>
-        </p:spPr>
-        <p:txBody>
-          <a:bodyPr wrap="none" lIns="0" tIns="0" rIns="0" bIns="0">
-            <a:spAutoFit/>
-          </a:bodyPr>
-          <a:lstStyle/>
-          <a:p>
-            <a:pPr algn="ctr"/>
-            <a:r>
-              <a:rPr sz="2700" b="1">
-                <a:solidFill>
-                  <a:srgbClr val="172033"/>
-                </a:solidFill>
-                <a:latin typeface="微软雅黑" panose="020B0503020204020204" charset="-122"/>
-              </a:rPr>
-              <a:t>目录</a:t>
-            </a:r>
-            <a:endParaRPr sz="2700" b="1">
-              <a:solidFill>
-                <a:srgbClr val="172033"/>
-              </a:solidFill>
-              <a:latin typeface="微软雅黑" panose="020B0503020204020204" charset="-122"/>
-            </a:endParaRPr>
-          </a:p>
-        </p:txBody>
-      </p:sp>
-      <p:sp>
-        <p:nvSpPr>
-          <p:cNvPr id="4" name="TextBox 3"/>
-          <p:cNvSpPr txBox="1"/>
-          <p:nvPr/>
-        </p:nvSpPr>
-        <p:spPr>
-          <a:xfrm>
-            <a:off x="1078992" y="1965960"/>
-            <a:ext cx="512064" cy="384048"/>
-          </a:xfrm>
-          <a:prstGeom prst="rect">
-            <a:avLst/>
-          </a:prstGeom>
-          <a:noFill/>
-        </p:spPr>
-        <p:txBody>
-          <a:bodyPr wrap="none" lIns="0" tIns="0" rIns="0" bIns="0">
-            <a:spAutoFit/>
-          </a:bodyPr>
-          <a:lstStyle/>
-          <a:p>
-            <a:pPr algn="r"/>
-            <a:r>
-              <a:rPr sz="1900" b="1">
-                <a:solidFill>
-                  <a:srgbClr val="526078"/>
-                </a:solidFill>
-                <a:latin typeface="Arial" panose="020B0604020202020204"/>
-              </a:rPr>
-              <a:t>01</a:t>
-            </a:r>
-            <a:endParaRPr sz="1900" b="1">
-              <a:solidFill>
-                <a:srgbClr val="526078"/>
-              </a:solidFill>
-              <a:latin typeface="Arial" panose="020B0604020202020204"/>
-            </a:endParaRPr>
-          </a:p>
-        </p:txBody>
-      </p:sp>
-      <p:sp>
-        <p:nvSpPr>
-          <p:cNvPr id="5" name="TextBox 4"/>
-          <p:cNvSpPr txBox="1"/>
-          <p:nvPr/>
-        </p:nvSpPr>
-        <p:spPr>
-          <a:xfrm>
-            <a:off x="1783080" y="1965960"/>
-            <a:ext cx="5303520" cy="384048"/>
-          </a:xfrm>
-          <a:prstGeom prst="rect">
-            <a:avLst/>
-          </a:prstGeom>
-          <a:noFill/>
-        </p:spPr>
-        <p:txBody>
-          <a:bodyPr wrap="none" lIns="0" tIns="0" rIns="0" bIns="0">
-            <a:spAutoFit/>
-          </a:bodyPr>
-          <a:lstStyle/>
-          <a:p>
-            <a:pPr algn="l"/>
-            <a:r>
-              <a:rPr sz="1900" b="0">
-                <a:solidFill>
-                  <a:srgbClr val="2C3443"/>
-                </a:solidFill>
-                <a:latin typeface="微软雅黑" panose="020B0503020204020204" charset="-122"/>
-              </a:rPr>
-              <a:t>研究背景与问题</a:t>
-            </a:r>
-            <a:endParaRPr sz="1900" b="0">
-              <a:solidFill>
-                <a:srgbClr val="2C3443"/>
-              </a:solidFill>
-              <a:latin typeface="微软雅黑" panose="020B0503020204020204" charset="-122"/>
-            </a:endParaRPr>
-          </a:p>
-        </p:txBody>
-      </p:sp>
-      <p:sp>
-        <p:nvSpPr>
-          <p:cNvPr id="6" name="TextBox 5"/>
-          <p:cNvSpPr txBox="1"/>
-          <p:nvPr/>
-        </p:nvSpPr>
-        <p:spPr>
-          <a:xfrm>
-            <a:off x="1078992" y="2624328"/>
-            <a:ext cx="512064" cy="384048"/>
-          </a:xfrm>
-          <a:prstGeom prst="rect">
-            <a:avLst/>
-          </a:prstGeom>
-          <a:noFill/>
-        </p:spPr>
-        <p:txBody>
-          <a:bodyPr wrap="none" lIns="0" tIns="0" rIns="0" bIns="0">
-            <a:spAutoFit/>
-          </a:bodyPr>
-          <a:lstStyle/>
-          <a:p>
-            <a:pPr algn="r"/>
-            <a:r>
-              <a:rPr sz="1900" b="1">
-                <a:solidFill>
-                  <a:srgbClr val="526078"/>
-                </a:solidFill>
-                <a:latin typeface="Arial" panose="020B0604020202020204"/>
-              </a:rPr>
-              <a:t>02</a:t>
-            </a:r>
-            <a:endParaRPr sz="1900" b="1">
-              <a:solidFill>
-                <a:srgbClr val="526078"/>
-              </a:solidFill>
-              <a:latin typeface="Arial" panose="020B0604020202020204"/>
-            </a:endParaRPr>
-          </a:p>
-        </p:txBody>
-      </p:sp>
-      <p:sp>
-        <p:nvSpPr>
-          <p:cNvPr id="7" name="TextBox 6"/>
-          <p:cNvSpPr txBox="1"/>
-          <p:nvPr/>
-        </p:nvSpPr>
-        <p:spPr>
-          <a:xfrm>
-            <a:off x="1783080" y="2624328"/>
-            <a:ext cx="5303520" cy="384048"/>
-          </a:xfrm>
-          <a:prstGeom prst="rect">
-            <a:avLst/>
-          </a:prstGeom>
-          <a:noFill/>
-        </p:spPr>
-        <p:txBody>
-          <a:bodyPr wrap="none" lIns="0" tIns="0" rIns="0" bIns="0">
-            <a:spAutoFit/>
-          </a:bodyPr>
-          <a:lstStyle/>
-          <a:p>
-            <a:pPr algn="l"/>
-            <a:r>
-              <a:rPr sz="1900" b="0">
-                <a:solidFill>
-                  <a:srgbClr val="2C3443"/>
-                </a:solidFill>
-                <a:latin typeface="微软雅黑" panose="020B0503020204020204" charset="-122"/>
-              </a:rPr>
-              <a:t>预研基础与动机证据</a:t>
-            </a:r>
-            <a:endParaRPr sz="1900" b="0">
-              <a:solidFill>
-                <a:srgbClr val="2C3443"/>
-              </a:solidFill>
-              <a:latin typeface="微软雅黑" panose="020B0503020204020204" charset="-122"/>
-            </a:endParaRPr>
-          </a:p>
-        </p:txBody>
-      </p:sp>
-      <p:sp>
-        <p:nvSpPr>
-          <p:cNvPr id="8" name="Rectangle 7"/>
+          <p:cNvPr id="2" name="Rectangle 1"/>
           <p:cNvSpPr/>
           <p:nvPr/>
         </p:nvSpPr>
         <p:spPr>
           <a:xfrm>
-            <a:off x="658368" y="3321100"/>
-            <a:ext cx="50292" cy="307238"/>
+            <a:off x="548640" y="978408"/>
+            <a:ext cx="731520" cy="649224"/>
           </a:xfrm>
           <a:prstGeom prst="rect">
             <a:avLst/>
@@ -9727,23 +9848,33 @@
           </a:fontRef>
         </p:style>
         <p:txBody>
-          <a:bodyPr rtlCol="0" anchor="ctr"/>
-          <a:lstStyle/>
-          <a:p>
-            <a:pPr algn="ctr"/>
-          </a:p>
-        </p:txBody>
-      </p:sp>
-      <p:sp>
-        <p:nvSpPr>
-          <p:cNvPr id="9" name="TextBox 8"/>
+          <a:bodyPr wrap="none" rtlCol="0" anchor="ctr"/>
+          <a:lstStyle/>
+          <a:p>
+            <a:pPr algn="ctr">
+              <a:defRPr sz="3200" b="1">
+                <a:solidFill>
+                  <a:srgbClr val="FFFFFF"/>
+                </a:solidFill>
+                <a:latin typeface="微软雅黑" panose="020B0503020204020204" charset="-122"/>
+              </a:defRPr>
+            </a:pPr>
+            <a:r>
+              <a:t>02</a:t>
+            </a:r>
+          </a:p>
+        </p:txBody>
+      </p:sp>
+      <p:sp>
+        <p:nvSpPr>
+          <p:cNvPr id="3" name="TextBox 2"/>
           <p:cNvSpPr txBox="1"/>
           <p:nvPr/>
         </p:nvSpPr>
         <p:spPr>
           <a:xfrm>
-            <a:off x="1078992" y="3282696"/>
-            <a:ext cx="512064" cy="384048"/>
+            <a:off x="1508760" y="1024128"/>
+            <a:ext cx="9144000" cy="502920"/>
           </a:xfrm>
           <a:prstGeom prst="rect">
             <a:avLst/>
@@ -9751,40 +9882,202 @@
           <a:noFill/>
         </p:spPr>
         <p:txBody>
-          <a:bodyPr wrap="none" lIns="0" tIns="0" rIns="0" bIns="0">
+          <a:bodyPr wrap="square"/>
+          <a:lstStyle/>
+          <a:p>
+            <a:pPr algn="l">
+              <a:defRPr sz="2800" b="1">
+                <a:solidFill>
+                  <a:srgbClr val="000000"/>
+                </a:solidFill>
+                <a:latin typeface="微软雅黑" panose="020B0503020204020204" charset="-122"/>
+              </a:defRPr>
+            </a:pPr>
+            <a:r>
+              <a:t>vLLM + AI_COMPLETE Baseline</a:t>
+            </a:r>
+          </a:p>
+        </p:txBody>
+      </p:sp>
+      <p:sp>
+        <p:nvSpPr>
+          <p:cNvPr id="5" name="TextBox 4"/>
+          <p:cNvSpPr txBox="1"/>
+          <p:nvPr/>
+        </p:nvSpPr>
+        <p:spPr>
+          <a:xfrm>
+            <a:off x="621665" y="4869180"/>
+            <a:ext cx="11175365" cy="1245235"/>
+          </a:xfrm>
+          <a:prstGeom prst="rect">
+            <a:avLst/>
+          </a:prstGeom>
+          <a:noFill/>
+        </p:spPr>
+        <p:txBody>
+          <a:bodyPr wrap="square">
             <a:spAutoFit/>
           </a:bodyPr>
           <a:lstStyle/>
           <a:p>
-            <a:pPr algn="r"/>
-            <a:r>
-              <a:rPr sz="1900" b="1">
-                <a:solidFill>
-                  <a:srgbClr val="1588C7"/>
-                </a:solidFill>
-                <a:latin typeface="Arial" panose="020B0604020202020204"/>
+            <a:pPr lvl="0" algn="l">
+              <a:spcAft>
+                <a:spcPts val="600"/>
+              </a:spcAft>
+              <a:buClrTx/>
+              <a:buSzTx/>
+              <a:buFontTx/>
+              <a:defRPr sz="1500">
+                <a:solidFill>
+                  <a:srgbClr val="244C89"/>
+                </a:solidFill>
+                <a:latin typeface="微软雅黑" panose="020B0503020204020204" charset="-122"/>
+              </a:defRPr>
+            </a:pPr>
+            <a:r>
+              <a:rPr>
+                <a:sym typeface="+mn-ea"/>
               </a:rPr>
-              <a:t>03</a:t>
-            </a:r>
-            <a:endParaRPr sz="1900" b="1">
-              <a:solidFill>
-                <a:srgbClr val="1588C7"/>
-              </a:solidFill>
-              <a:latin typeface="Arial" panose="020B0604020202020204"/>
+              <a:t>■ Daft管线已验证：开销&lt;0.1s，Rust内核+Arrow零拷贝——后续多模态实验可复用同一套pipeline代码</a:t>
+            </a:r>
+            <a:endParaRPr>
+              <a:sym typeface="+mn-ea"/>
             </a:endParaRPr>
           </a:p>
-        </p:txBody>
-      </p:sp>
-      <p:sp>
-        <p:nvSpPr>
-          <p:cNvPr id="10" name="TextBox 9"/>
+          <a:p>
+            <a:pPr lvl="0" algn="l">
+              <a:spcAft>
+                <a:spcPts val="600"/>
+              </a:spcAft>
+              <a:buClrTx/>
+              <a:buSzTx/>
+              <a:buFontTx/>
+              <a:defRPr sz="1500">
+                <a:solidFill>
+                  <a:srgbClr val="244C89"/>
+                </a:solidFill>
+                <a:latin typeface="微软雅黑" panose="020B0503020204020204" charset="-122"/>
+              </a:defRPr>
+            </a:pPr>
+            <a:r>
+              <a:rPr>
+                <a:solidFill>
+                  <a:srgbClr val="FF0000"/>
+                </a:solidFill>
+                <a:sym typeface="+mn-ea"/>
+              </a:rPr>
+              <a:t>■ 发现①：固定行数≠固定计算量——batch=8时token跨度13.9×，batch=128时token P95=26,678，行数是计算量的弱代理</a:t>
+            </a:r>
+            <a:endParaRPr>
+              <a:sym typeface="+mn-ea"/>
+            </a:endParaRPr>
+          </a:p>
+          <a:p>
+            <a:pPr lvl="0" algn="l">
+              <a:spcAft>
+                <a:spcPts val="600"/>
+              </a:spcAft>
+              <a:buClrTx/>
+              <a:buSzTx/>
+              <a:buFontTx/>
+              <a:defRPr sz="1500">
+                <a:solidFill>
+                  <a:srgbClr val="244C89"/>
+                </a:solidFill>
+                <a:latin typeface="微软雅黑" panose="020B0503020204020204" charset="-122"/>
+              </a:defRPr>
+            </a:pPr>
+            <a:r>
+              <a:rPr>
+                <a:sym typeface="+mn-ea"/>
+              </a:rPr>
+              <a:t>■ 发现②：改为按token量攒批（token-budget），约束P95至~6,141，同时吞吐接近固定行方案——按计算量组织数据可行</a:t>
+            </a:r>
+            <a:endParaRPr>
+              <a:sym typeface="+mn-ea"/>
+            </a:endParaRPr>
+          </a:p>
+          <a:p>
+            <a:pPr lvl="0" algn="l">
+              <a:spcAft>
+                <a:spcPts val="600"/>
+              </a:spcAft>
+              <a:buClrTx/>
+              <a:buSzTx/>
+              <a:buFontTx/>
+              <a:defRPr sz="1500">
+                <a:solidFill>
+                  <a:srgbClr val="244C89"/>
+                </a:solidFill>
+                <a:latin typeface="微软雅黑" panose="020B0503020204020204" charset="-122"/>
+              </a:defRPr>
+            </a:pPr>
+            <a:r>
+              <a:rPr>
+                <a:sym typeface="+mn-ea"/>
+              </a:rPr>
+              <a:t>■ 发现③：共享vLLM下无界提交伤害并发——前台作业端到端从4.9s恶化到11.4s（2.3×），证明需要in-flight控制</a:t>
+            </a:r>
+            <a:endParaRPr>
+              <a:sym typeface="+mn-ea"/>
+            </a:endParaRPr>
+          </a:p>
+        </p:txBody>
+      </p:sp>
+      <p:sp>
+        <p:nvSpPr>
+          <p:cNvPr id="7" name="Rectangle 6"/>
+          <p:cNvSpPr/>
+          <p:nvPr/>
+        </p:nvSpPr>
+        <p:spPr>
+          <a:xfrm>
+            <a:off x="201168" y="6318504"/>
+            <a:ext cx="41148" cy="329184"/>
+          </a:xfrm>
+          <a:prstGeom prst="rect">
+            <a:avLst/>
+          </a:prstGeom>
+          <a:solidFill>
+            <a:srgbClr val="2F6FEB"/>
+          </a:solidFill>
+          <a:ln>
+            <a:noFill/>
+          </a:ln>
+        </p:spPr>
+        <p:style>
+          <a:lnRef idx="1">
+            <a:schemeClr val="accent1"/>
+          </a:lnRef>
+          <a:fillRef idx="3">
+            <a:schemeClr val="accent1"/>
+          </a:fillRef>
+          <a:effectRef idx="2">
+            <a:schemeClr val="accent1"/>
+          </a:effectRef>
+          <a:fontRef idx="minor">
+            <a:schemeClr val="lt1"/>
+          </a:fontRef>
+        </p:style>
+        <p:txBody>
+          <a:bodyPr rtlCol="0" anchor="ctr"/>
+          <a:lstStyle/>
+          <a:p>
+            <a:pPr algn="ctr"/>
+          </a:p>
+        </p:txBody>
+      </p:sp>
+      <p:sp>
+        <p:nvSpPr>
+          <p:cNvPr id="8" name="TextBox 7"/>
           <p:cNvSpPr txBox="1"/>
           <p:nvPr/>
         </p:nvSpPr>
         <p:spPr>
           <a:xfrm>
-            <a:off x="1783080" y="3282696"/>
-            <a:ext cx="5303520" cy="384048"/>
+            <a:off x="411480" y="6318504"/>
+            <a:ext cx="11201400" cy="329184"/>
           </a:xfrm>
           <a:prstGeom prst="rect">
             <a:avLst/>
@@ -9792,112 +10085,58 @@
           <a:noFill/>
         </p:spPr>
         <p:txBody>
-          <a:bodyPr wrap="none" lIns="0" tIns="0" rIns="0" bIns="0">
-            <a:spAutoFit/>
-          </a:bodyPr>
-          <a:lstStyle/>
-          <a:p>
-            <a:pPr algn="l"/>
-            <a:r>
-              <a:rPr sz="1900" b="1">
-                <a:solidFill>
-                  <a:srgbClr val="172033"/>
+          <a:bodyPr wrap="square" lIns="0" tIns="0" rIns="0" bIns="0" anchor="ctr"/>
+          <a:lstStyle/>
+          <a:p>
+            <a:pPr algn="l">
+              <a:lnSpc>
+                <a:spcPct val="100000"/>
+              </a:lnSpc>
+              <a:spcBef>
+                <a:spcPts val="0"/>
+              </a:spcBef>
+              <a:spcAft>
+                <a:spcPts val="0"/>
+              </a:spcAft>
+              <a:defRPr sz="1200" b="1">
+                <a:solidFill>
+                  <a:srgbClr val="F97316"/>
                 </a:solidFill>
                 <a:latin typeface="微软雅黑" panose="020B0503020204020204" charset="-122"/>
-              </a:rPr>
-              <a:t>研究目标与内容</a:t>
-            </a:r>
-            <a:endParaRPr sz="1900" b="1">
-              <a:solidFill>
-                <a:srgbClr val="172033"/>
-              </a:solidFill>
-              <a:latin typeface="微软雅黑" panose="020B0503020204020204" charset="-122"/>
-            </a:endParaRPr>
-          </a:p>
-        </p:txBody>
-      </p:sp>
-      <p:sp>
-        <p:nvSpPr>
-          <p:cNvPr id="11" name="TextBox 10"/>
-          <p:cNvSpPr txBox="1"/>
+              </a:defRPr>
+            </a:pPr>
+            <a:r>
+              <a:rPr sz="1250"/>
+              <a:t>三项核心发现构成论文可写证据。Daft接入为多模态泛化验证铺路——同一套策略代码，只需替换数据列类型。</a:t>
+            </a:r>
+            <a:endParaRPr sz="1250"/>
+          </a:p>
+        </p:txBody>
+      </p:sp>
+      <p:pic>
+        <p:nvPicPr>
+          <p:cNvPr id="6" name="图片 5"/>
+          <p:cNvPicPr>
+            <a:picLocks noChangeAspect="1"/>
+          </p:cNvPicPr>
           <p:nvPr/>
-        </p:nvSpPr>
-        <p:spPr>
-          <a:xfrm>
-            <a:off x="1078992" y="3941064"/>
-            <a:ext cx="512064" cy="384048"/>
-          </a:xfrm>
-          <a:prstGeom prst="rect">
-            <a:avLst/>
-          </a:prstGeom>
-          <a:noFill/>
-        </p:spPr>
-        <p:txBody>
-          <a:bodyPr wrap="none" lIns="0" tIns="0" rIns="0" bIns="0">
-            <a:spAutoFit/>
-          </a:bodyPr>
-          <a:lstStyle/>
-          <a:p>
-            <a:pPr algn="r"/>
-            <a:r>
-              <a:rPr sz="1900" b="1">
-                <a:solidFill>
-                  <a:srgbClr val="526078"/>
-                </a:solidFill>
-                <a:latin typeface="Arial" panose="020B0604020202020204"/>
-              </a:rPr>
-              <a:t>04</a:t>
-            </a:r>
-            <a:endParaRPr sz="1900" b="1">
-              <a:solidFill>
-                <a:srgbClr val="526078"/>
-              </a:solidFill>
-              <a:latin typeface="Arial" panose="020B0604020202020204"/>
-            </a:endParaRPr>
-          </a:p>
-        </p:txBody>
-      </p:sp>
-      <p:sp>
-        <p:nvSpPr>
-          <p:cNvPr id="12" name="TextBox 11"/>
-          <p:cNvSpPr txBox="1"/>
-          <p:nvPr/>
-        </p:nvSpPr>
-        <p:spPr>
-          <a:xfrm>
-            <a:off x="1783080" y="3941064"/>
-            <a:ext cx="5303520" cy="384048"/>
-          </a:xfrm>
-          <a:prstGeom prst="rect">
-            <a:avLst/>
-          </a:prstGeom>
-          <a:noFill/>
-        </p:spPr>
-        <p:txBody>
-          <a:bodyPr wrap="none" lIns="0" tIns="0" rIns="0" bIns="0">
-            <a:spAutoFit/>
-          </a:bodyPr>
-          <a:lstStyle/>
-          <a:p>
-            <a:pPr algn="l"/>
-            <a:r>
-              <a:rPr sz="1900" b="0">
-                <a:solidFill>
-                  <a:srgbClr val="2C3443"/>
-                </a:solidFill>
-                <a:latin typeface="微软雅黑" panose="020B0503020204020204" charset="-122"/>
-              </a:rPr>
-              <a:t>可行性与计划</a:t>
-            </a:r>
-            <a:endParaRPr sz="1900" b="0">
-              <a:solidFill>
-                <a:srgbClr val="2C3443"/>
-              </a:solidFill>
-              <a:latin typeface="微软雅黑" panose="020B0503020204020204" charset="-122"/>
-            </a:endParaRPr>
-          </a:p>
-        </p:txBody>
-      </p:sp>
+        </p:nvPicPr>
+        <p:blipFill>
+          <a:blip r:embed="rId1"/>
+          <a:stretch>
+            <a:fillRect/>
+          </a:stretch>
+        </p:blipFill>
+        <p:spPr>
+          <a:xfrm>
+            <a:off x="1343660" y="1967865"/>
+            <a:ext cx="9525000" cy="2659380"/>
+          </a:xfrm>
+          <a:prstGeom prst="rect">
+            <a:avLst/>
+          </a:prstGeom>
+        </p:spPr>
+      </p:pic>
     </p:spTree>
   </p:cSld>
   <p:clrMapOvr>
@@ -9964,7 +10203,7 @@
               </a:defRPr>
             </a:pPr>
             <a:r>
-              <a:t>03</a:t>
+              <a:t>02</a:t>
             </a:r>
           </a:p>
         </p:txBody>
@@ -9998,7 +10237,7 @@
               </a:defRPr>
             </a:pPr>
             <a:r>
-              <a:t>研究目标与总体框架</a:t>
+              <a:t>vLLM + AI_COMPLETE Baseline</a:t>
             </a:r>
           </a:p>
         </p:txBody>
@@ -10011,8 +10250,8 @@
         </p:nvSpPr>
         <p:spPr>
           <a:xfrm>
-            <a:off x="119380" y="1743710"/>
-            <a:ext cx="3655695" cy="4512945"/>
+            <a:off x="263525" y="4549140"/>
+            <a:ext cx="5400675" cy="783590"/>
           </a:xfrm>
           <a:prstGeom prst="rect">
             <a:avLst/>
@@ -10021,17 +10260,17 @@
         </p:spPr>
         <p:txBody>
           <a:bodyPr wrap="square">
-            <a:noAutofit/>
+            <a:spAutoFit/>
           </a:bodyPr>
           <a:lstStyle/>
           <a:p>
-            <a:pPr eaLnBrk="1" hangingPunct="1">
+            <a:pPr>
               <a:spcAft>
-                <a:spcPts val="400"/>
+                <a:spcPts val="600"/>
               </a:spcAft>
-              <a:defRPr sz="1300">
-                <a:solidFill>
-                  <a:srgbClr val="244C89"/>
+              <a:defRPr sz="1500">
+                <a:solidFill>
+                  <a:srgbClr val="000000"/>
                 </a:solidFill>
                 <a:latin typeface="微软雅黑" panose="020B0503020204020204" charset="-122"/>
               </a:defRPr>
@@ -10039,188 +10278,10 @@
             <a:r>
               <a:rPr>
                 <a:solidFill>
-                  <a:srgbClr val="244C89"/>
+                  <a:srgbClr val="FF0000"/>
                 </a:solidFill>
               </a:rPr>
-              <a:t>■ 总体目标：以AI_COMPLETE（生成式LLM推理）为主场景，构建Daft/Ray端到端实验链路，优化上游数据组织与提交控制两项策略</a:t>
-            </a:r>
-            <a:endParaRPr>
-              <a:solidFill>
-                <a:srgbClr val="244C89"/>
-              </a:solidFill>
-            </a:endParaRPr>
-          </a:p>
-          <a:p>
-            <a:pPr eaLnBrk="1" hangingPunct="1">
-              <a:spcAft>
-                <a:spcPts val="400"/>
-              </a:spcAft>
-              <a:defRPr sz="1300">
-                <a:solidFill>
-                  <a:srgbClr val="244C89"/>
-                </a:solidFill>
-                <a:latin typeface="微软雅黑" panose="020B0503020204020204" charset="-122"/>
-              </a:defRPr>
-            </a:pPr>
-            <a:endParaRPr>
-              <a:solidFill>
-                <a:srgbClr val="244C89"/>
-              </a:solidFill>
-            </a:endParaRPr>
-          </a:p>
-          <a:p>
-            <a:pPr eaLnBrk="1" hangingPunct="1">
-              <a:spcAft>
-                <a:spcPts val="400"/>
-              </a:spcAft>
-              <a:defRPr sz="1300">
-                <a:solidFill>
-                  <a:srgbClr val="244C89"/>
-                </a:solidFill>
-                <a:latin typeface="微软雅黑" panose="020B0503020204020204" charset="-122"/>
-              </a:defRPr>
-            </a:pPr>
-            <a:endParaRPr>
-              <a:solidFill>
-                <a:srgbClr val="244C89"/>
-              </a:solidFill>
-            </a:endParaRPr>
-          </a:p>
-          <a:p>
-            <a:pPr eaLnBrk="1" hangingPunct="1">
-              <a:spcAft>
-                <a:spcPts val="400"/>
-              </a:spcAft>
-              <a:defRPr sz="1300">
-                <a:solidFill>
-                  <a:srgbClr val="000000"/>
-                </a:solidFill>
-                <a:latin typeface="微软雅黑" panose="020B0503020204020204" charset="-122"/>
-              </a:defRPr>
-            </a:pPr>
-            <a:r>
-              <a:rPr>
-                <a:solidFill>
-                  <a:srgbClr val="244C89"/>
-                </a:solidFill>
-              </a:rPr>
-              <a:t>■ 主链路：PostgreSQL → Daft（数据引擎，Rust核心+Arrow零拷贝）→ Ray actor（异构池+去中心化协调）→ vLLM（continuous batching，不修改内部）→ 写回</a:t>
-            </a:r>
-            <a:endParaRPr>
-              <a:solidFill>
-                <a:srgbClr val="244C89"/>
-              </a:solidFill>
-            </a:endParaRPr>
-          </a:p>
-          <a:p>
-            <a:pPr eaLnBrk="1" hangingPunct="1">
-              <a:spcAft>
-                <a:spcPts val="400"/>
-              </a:spcAft>
-              <a:defRPr sz="1300">
-                <a:solidFill>
-                  <a:srgbClr val="000000"/>
-                </a:solidFill>
-                <a:latin typeface="微软雅黑" panose="020B0503020204020204" charset="-122"/>
-              </a:defRPr>
-            </a:pPr>
-            <a:endParaRPr>
-              <a:solidFill>
-                <a:srgbClr val="244C89"/>
-              </a:solidFill>
-            </a:endParaRPr>
-          </a:p>
-          <a:p>
-            <a:pPr eaLnBrk="1" hangingPunct="1">
-              <a:spcAft>
-                <a:spcPts val="400"/>
-              </a:spcAft>
-              <a:defRPr sz="1300">
-                <a:solidFill>
-                  <a:srgbClr val="000000"/>
-                </a:solidFill>
-                <a:latin typeface="微软雅黑" panose="020B0503020204020204" charset="-122"/>
-              </a:defRPr>
-            </a:pPr>
-            <a:endParaRPr>
-              <a:solidFill>
-                <a:srgbClr val="244C89"/>
-              </a:solidFill>
-            </a:endParaRPr>
-          </a:p>
-          <a:p>
-            <a:pPr eaLnBrk="1" hangingPunct="1">
-              <a:spcAft>
-                <a:spcPts val="400"/>
-              </a:spcAft>
-              <a:defRPr sz="1300">
-                <a:solidFill>
-                  <a:srgbClr val="000000"/>
-                </a:solidFill>
-                <a:latin typeface="微软雅黑" panose="020B0503020204020204" charset="-122"/>
-              </a:defRPr>
-            </a:pPr>
-            <a:endParaRPr>
-              <a:solidFill>
-                <a:srgbClr val="244C89"/>
-              </a:solidFill>
-            </a:endParaRPr>
-          </a:p>
-          <a:p>
-            <a:pPr eaLnBrk="1" hangingPunct="1">
-              <a:spcAft>
-                <a:spcPts val="400"/>
-              </a:spcAft>
-              <a:defRPr sz="1300">
-                <a:solidFill>
-                  <a:srgbClr val="000000"/>
-                </a:solidFill>
-                <a:latin typeface="微软雅黑" panose="020B0503020204020204" charset="-122"/>
-              </a:defRPr>
-            </a:pPr>
-            <a:endParaRPr>
-              <a:solidFill>
-                <a:srgbClr val="244C89"/>
-              </a:solidFill>
-            </a:endParaRPr>
-          </a:p>
-          <a:p>
-            <a:pPr eaLnBrk="1" hangingPunct="1">
-              <a:spcAft>
-                <a:spcPts val="400"/>
-              </a:spcAft>
-              <a:defRPr sz="1300">
-                <a:solidFill>
-                  <a:srgbClr val="000000"/>
-                </a:solidFill>
-                <a:latin typeface="微软雅黑" panose="020B0503020204020204" charset="-122"/>
-              </a:defRPr>
-            </a:pPr>
-            <a:endParaRPr>
-              <a:solidFill>
-                <a:srgbClr val="244C89"/>
-              </a:solidFill>
-            </a:endParaRPr>
-          </a:p>
-          <a:p>
-            <a:pPr eaLnBrk="1" hangingPunct="1">
-              <a:spcAft>
-                <a:spcPts val="400"/>
-              </a:spcAft>
-              <a:defRPr sz="1300">
-                <a:solidFill>
-                  <a:srgbClr val="000000"/>
-                </a:solidFill>
-                <a:latin typeface="微软雅黑" panose="020B0503020204020204" charset="-122"/>
-              </a:defRPr>
-            </a:pPr>
-            <a:r>
-              <a:rPr>
-                <a:solidFill>
-                  <a:srgbClr val="244C89"/>
-                </a:solidFill>
-              </a:rPr>
-              <a:t>■ 两项策略 + 多模态泛化验证 + 算子代价估计（补充）：研究内容一（数据组织）、研究内容二（提交控制）、耦合验证（独立拼接 vs 联合grid search）</a:t>
+              <a:t>■ 发现②：改为按token量攒批（token-budget），约束P95至~6,141，同时吞吐接近固定行方案——按计算量组织数据可行</a:t>
             </a:r>
             <a:endParaRPr>
               <a:solidFill>
@@ -10305,14 +10366,14 @@
               </a:spcAft>
               <a:defRPr sz="1200" b="1">
                 <a:solidFill>
-                  <a:srgbClr val="16A34A"/>
+                  <a:srgbClr val="F97316"/>
                 </a:solidFill>
                 <a:latin typeface="微软雅黑" panose="020B0503020204020204" charset="-122"/>
               </a:defRPr>
             </a:pPr>
             <a:r>
               <a:rPr sz="1250"/>
-              <a:t>核心思路：数据如何组织、以什么节奏发送、如何响应模型服务状态——三项决策共同影响端到端效率。</a:t>
+              <a:t>三项核心发现构成论文可写证据。Daft接入为多模态泛化验证铺路——同一套策略代码，只需替换数据列类型。</a:t>
             </a:r>
             <a:endParaRPr sz="1250"/>
           </a:p>
@@ -10320,7 +10381,7 @@
       </p:sp>
       <p:pic>
         <p:nvPicPr>
-          <p:cNvPr id="6" name="图片 5"/>
+          <p:cNvPr id="4" name="图片 3"/>
           <p:cNvPicPr>
             <a:picLocks noChangeAspect="1"/>
           </p:cNvPicPr>
@@ -10334,8 +10395,32 @@
         </p:blipFill>
         <p:spPr>
           <a:xfrm>
-            <a:off x="3935730" y="1743710"/>
-            <a:ext cx="8226425" cy="4517390"/>
+            <a:off x="119380" y="1701165"/>
+            <a:ext cx="5544820" cy="2673985"/>
+          </a:xfrm>
+          <a:prstGeom prst="rect">
+            <a:avLst/>
+          </a:prstGeom>
+        </p:spPr>
+      </p:pic>
+      <p:pic>
+        <p:nvPicPr>
+          <p:cNvPr id="6" name="图片 5"/>
+          <p:cNvPicPr>
+            <a:picLocks noChangeAspect="1"/>
+          </p:cNvPicPr>
+          <p:nvPr/>
+        </p:nvPicPr>
+        <p:blipFill>
+          <a:blip r:embed="rId2"/>
+          <a:stretch>
+            <a:fillRect/>
+          </a:stretch>
+        </p:blipFill>
+        <p:spPr>
+          <a:xfrm>
+            <a:off x="5664200" y="1701165"/>
+            <a:ext cx="6506210" cy="4605020"/>
           </a:xfrm>
           <a:prstGeom prst="rect">
             <a:avLst/>
@@ -10362,31 +10447,7 @@
       <p:grpSpPr/>
       <p:sp>
         <p:nvSpPr>
-          <p:cNvPr id="2" name="灯片编号占位符 1"/>
-          <p:cNvSpPr>
-            <a:spLocks noGrp="1"/>
-          </p:cNvSpPr>
-          <p:nvPr>
-            <p:ph type="sldNum" sz="quarter" idx="12"/>
-          </p:nvPr>
-        </p:nvSpPr>
-        <p:spPr/>
-        <p:txBody>
-          <a:bodyPr/>
-          <a:p>
-            <a:pPr>
-              <a:defRPr/>
-            </a:pPr>
-            <a:fld id="{6A90D09A-ED5D-47CC-A45F-D492BA9A6C1B}" type="slidenum">
-              <a:rPr lang="en-US" altLang="zh-CN" smtClean="0"/>
-            </a:fld>
-            <a:endParaRPr lang="en-US" altLang="zh-CN"/>
-          </a:p>
-        </p:txBody>
-      </p:sp>
-      <p:sp>
-        <p:nvSpPr>
-          <p:cNvPr id="3" name="Rectangle 1"/>
+          <p:cNvPr id="2" name="Rectangle 1"/>
           <p:cNvSpPr/>
           <p:nvPr/>
         </p:nvSpPr>
@@ -10432,14 +10493,14 @@
               </a:defRPr>
             </a:pPr>
             <a:r>
-              <a:t>03</a:t>
-            </a:r>
-          </a:p>
-        </p:txBody>
-      </p:sp>
-      <p:sp>
-        <p:nvSpPr>
-          <p:cNvPr id="4" name="TextBox 2"/>
+              <a:t>02</a:t>
+            </a:r>
+          </a:p>
+        </p:txBody>
+      </p:sp>
+      <p:sp>
+        <p:nvSpPr>
+          <p:cNvPr id="3" name="TextBox 2"/>
           <p:cNvSpPr txBox="1"/>
           <p:nvPr/>
         </p:nvSpPr>
@@ -10466,19 +10527,227 @@
               </a:defRPr>
             </a:pPr>
             <a:r>
-              <a:t>研究</a:t>
-            </a:r>
-            <a:r>
-              <a:rPr lang="zh-CN"/>
-              <a:t>内容</a:t>
-            </a:r>
-            <a:endParaRPr lang="zh-CN"/>
+              <a:t>vLLM + AI_COMPLETE Baseline</a:t>
+            </a:r>
+          </a:p>
+        </p:txBody>
+      </p:sp>
+      <p:sp>
+        <p:nvSpPr>
+          <p:cNvPr id="5" name="TextBox 4"/>
+          <p:cNvSpPr txBox="1"/>
+          <p:nvPr/>
+        </p:nvSpPr>
+        <p:spPr>
+          <a:xfrm>
+            <a:off x="621665" y="5068570"/>
+            <a:ext cx="11175365" cy="1245235"/>
+          </a:xfrm>
+          <a:prstGeom prst="rect">
+            <a:avLst/>
+          </a:prstGeom>
+          <a:noFill/>
+        </p:spPr>
+        <p:txBody>
+          <a:bodyPr wrap="square">
+            <a:spAutoFit/>
+          </a:bodyPr>
+          <a:lstStyle/>
+          <a:p>
+            <a:pPr>
+              <a:spcAft>
+                <a:spcPts val="600"/>
+              </a:spcAft>
+              <a:defRPr sz="1500">
+                <a:solidFill>
+                  <a:srgbClr val="244C89"/>
+                </a:solidFill>
+                <a:latin typeface="微软雅黑" panose="020B0503020204020204" charset="-122"/>
+              </a:defRPr>
+            </a:pPr>
+            <a:r>
+              <a:rPr>
+                <a:sym typeface="+mn-ea"/>
+              </a:rPr>
+              <a:t>■ Daft管线已验证：开销&lt;0.1s，Rust内核+Arrow零拷贝——后续多模态实验可复用同一套pipeline代码</a:t>
+            </a:r>
+            <a:endParaRPr>
+              <a:solidFill>
+                <a:srgbClr val="244C89"/>
+              </a:solidFill>
+            </a:endParaRPr>
+          </a:p>
+          <a:p>
+            <a:pPr>
+              <a:spcAft>
+                <a:spcPts val="600"/>
+              </a:spcAft>
+              <a:defRPr sz="1500">
+                <a:solidFill>
+                  <a:srgbClr val="244C89"/>
+                </a:solidFill>
+                <a:latin typeface="微软雅黑" panose="020B0503020204020204" charset="-122"/>
+              </a:defRPr>
+            </a:pPr>
+            <a:r>
+              <a:rPr>
+                <a:solidFill>
+                  <a:srgbClr val="244C89"/>
+                </a:solidFill>
+              </a:rPr>
+              <a:t>■ 发现①：固定行数≠固定计算量——batch=8时token跨度13.9×，batch=128时token P95=26,678，行数是计算量的弱代理</a:t>
+            </a:r>
+            <a:endParaRPr>
+              <a:solidFill>
+                <a:srgbClr val="244C89"/>
+              </a:solidFill>
+            </a:endParaRPr>
+          </a:p>
+          <a:p>
+            <a:pPr>
+              <a:spcAft>
+                <a:spcPts val="600"/>
+              </a:spcAft>
+              <a:defRPr sz="1500">
+                <a:solidFill>
+                  <a:srgbClr val="000000"/>
+                </a:solidFill>
+                <a:latin typeface="微软雅黑" panose="020B0503020204020204" charset="-122"/>
+              </a:defRPr>
+            </a:pPr>
+            <a:r>
+              <a:rPr>
+                <a:solidFill>
+                  <a:srgbClr val="244C89"/>
+                </a:solidFill>
+              </a:rPr>
+              <a:t>■ 发现②：改为按token量攒批（token-budget），约束P95至~6,141，同时吞吐接近固定行方案——按计算量组织数据可行</a:t>
+            </a:r>
+            <a:endParaRPr>
+              <a:solidFill>
+                <a:srgbClr val="244C89"/>
+              </a:solidFill>
+            </a:endParaRPr>
+          </a:p>
+          <a:p>
+            <a:pPr>
+              <a:spcAft>
+                <a:spcPts val="600"/>
+              </a:spcAft>
+              <a:defRPr sz="1500">
+                <a:solidFill>
+                  <a:srgbClr val="000000"/>
+                </a:solidFill>
+                <a:latin typeface="微软雅黑" panose="020B0503020204020204" charset="-122"/>
+              </a:defRPr>
+            </a:pPr>
+            <a:r>
+              <a:rPr>
+                <a:solidFill>
+                  <a:srgbClr val="FF0000"/>
+                </a:solidFill>
+              </a:rPr>
+              <a:t>■ 发现③：共享vLLM下无界提交伤害并发——前台作业端到端从4.9s恶化到11.4s（2.3×），证明需要in-flight控制</a:t>
+            </a:r>
+            <a:endParaRPr>
+              <a:solidFill>
+                <a:srgbClr val="244C89"/>
+              </a:solidFill>
+            </a:endParaRPr>
+          </a:p>
+        </p:txBody>
+      </p:sp>
+      <p:sp>
+        <p:nvSpPr>
+          <p:cNvPr id="7" name="Rectangle 6"/>
+          <p:cNvSpPr/>
+          <p:nvPr/>
+        </p:nvSpPr>
+        <p:spPr>
+          <a:xfrm>
+            <a:off x="201168" y="6318504"/>
+            <a:ext cx="41148" cy="329184"/>
+          </a:xfrm>
+          <a:prstGeom prst="rect">
+            <a:avLst/>
+          </a:prstGeom>
+          <a:solidFill>
+            <a:srgbClr val="2F6FEB"/>
+          </a:solidFill>
+          <a:ln>
+            <a:noFill/>
+          </a:ln>
+        </p:spPr>
+        <p:style>
+          <a:lnRef idx="1">
+            <a:schemeClr val="accent1"/>
+          </a:lnRef>
+          <a:fillRef idx="3">
+            <a:schemeClr val="accent1"/>
+          </a:fillRef>
+          <a:effectRef idx="2">
+            <a:schemeClr val="accent1"/>
+          </a:effectRef>
+          <a:fontRef idx="minor">
+            <a:schemeClr val="lt1"/>
+          </a:fontRef>
+        </p:style>
+        <p:txBody>
+          <a:bodyPr rtlCol="0" anchor="ctr"/>
+          <a:lstStyle/>
+          <a:p>
+            <a:pPr algn="ctr"/>
+          </a:p>
+        </p:txBody>
+      </p:sp>
+      <p:sp>
+        <p:nvSpPr>
+          <p:cNvPr id="8" name="TextBox 7"/>
+          <p:cNvSpPr txBox="1"/>
+          <p:nvPr/>
+        </p:nvSpPr>
+        <p:spPr>
+          <a:xfrm>
+            <a:off x="411480" y="6318504"/>
+            <a:ext cx="11201400" cy="329184"/>
+          </a:xfrm>
+          <a:prstGeom prst="rect">
+            <a:avLst/>
+          </a:prstGeom>
+          <a:noFill/>
+        </p:spPr>
+        <p:txBody>
+          <a:bodyPr wrap="square" lIns="0" tIns="0" rIns="0" bIns="0" anchor="ctr"/>
+          <a:lstStyle/>
+          <a:p>
+            <a:pPr algn="l">
+              <a:lnSpc>
+                <a:spcPct val="100000"/>
+              </a:lnSpc>
+              <a:spcBef>
+                <a:spcPts val="0"/>
+              </a:spcBef>
+              <a:spcAft>
+                <a:spcPts val="0"/>
+              </a:spcAft>
+              <a:defRPr sz="1200" b="1">
+                <a:solidFill>
+                  <a:srgbClr val="F97316"/>
+                </a:solidFill>
+                <a:latin typeface="微软雅黑" panose="020B0503020204020204" charset="-122"/>
+              </a:defRPr>
+            </a:pPr>
+            <a:r>
+              <a:rPr sz="1250"/>
+              <a:t>三项核心发现构成论文可写证据。Daft接入为多模态泛化验证铺路——同一套策略代码，只需替换数据列类型。</a:t>
+            </a:r>
+            <a:endParaRPr sz="1250"/>
           </a:p>
         </p:txBody>
       </p:sp>
       <p:pic>
         <p:nvPicPr>
-          <p:cNvPr id="6" name="图片 5"/>
+          <p:cNvPr id="4" name="图片 3"/>
           <p:cNvPicPr>
             <a:picLocks noChangeAspect="1"/>
           </p:cNvPicPr>
@@ -10486,15 +10755,14 @@
         </p:nvPicPr>
         <p:blipFill>
           <a:blip r:embed="rId1"/>
-          <a:srcRect l="557"/>
           <a:stretch>
             <a:fillRect/>
           </a:stretch>
         </p:blipFill>
         <p:spPr>
           <a:xfrm>
-            <a:off x="1343660" y="1723390"/>
-            <a:ext cx="8849995" cy="5008245"/>
+            <a:off x="983615" y="1735455"/>
+            <a:ext cx="10319385" cy="3328670"/>
           </a:xfrm>
           <a:prstGeom prst="rect">
             <a:avLst/>
@@ -10521,14 +10789,219 @@
       <p:grpSpPr/>
       <p:sp>
         <p:nvSpPr>
-          <p:cNvPr id="2" name="Rectangle 1"/>
+          <p:cNvPr id="2" name="TextBox 1"/>
+          <p:cNvSpPr txBox="1"/>
+          <p:nvPr/>
+        </p:nvSpPr>
+        <p:spPr>
+          <a:xfrm>
+            <a:off x="609600" y="1124712"/>
+            <a:ext cx="10972800" cy="502920"/>
+          </a:xfrm>
+          <a:prstGeom prst="rect">
+            <a:avLst/>
+          </a:prstGeom>
+          <a:noFill/>
+        </p:spPr>
+        <p:txBody>
+          <a:bodyPr wrap="none" lIns="0" tIns="0" rIns="0" bIns="0">
+            <a:spAutoFit/>
+          </a:bodyPr>
+          <a:lstStyle/>
+          <a:p>
+            <a:pPr algn="ctr"/>
+            <a:r>
+              <a:rPr sz="2700" b="1">
+                <a:solidFill>
+                  <a:srgbClr val="172033"/>
+                </a:solidFill>
+                <a:latin typeface="微软雅黑" panose="020B0503020204020204" charset="-122"/>
+              </a:rPr>
+              <a:t>目录</a:t>
+            </a:r>
+            <a:endParaRPr sz="2700" b="1">
+              <a:solidFill>
+                <a:srgbClr val="172033"/>
+              </a:solidFill>
+              <a:latin typeface="微软雅黑" panose="020B0503020204020204" charset="-122"/>
+            </a:endParaRPr>
+          </a:p>
+        </p:txBody>
+      </p:sp>
+      <p:sp>
+        <p:nvSpPr>
+          <p:cNvPr id="4" name="TextBox 3"/>
+          <p:cNvSpPr txBox="1"/>
+          <p:nvPr/>
+        </p:nvSpPr>
+        <p:spPr>
+          <a:xfrm>
+            <a:off x="1078992" y="1965960"/>
+            <a:ext cx="512064" cy="384048"/>
+          </a:xfrm>
+          <a:prstGeom prst="rect">
+            <a:avLst/>
+          </a:prstGeom>
+          <a:noFill/>
+        </p:spPr>
+        <p:txBody>
+          <a:bodyPr wrap="none" lIns="0" tIns="0" rIns="0" bIns="0">
+            <a:spAutoFit/>
+          </a:bodyPr>
+          <a:lstStyle/>
+          <a:p>
+            <a:pPr algn="r"/>
+            <a:r>
+              <a:rPr sz="1900" b="1">
+                <a:solidFill>
+                  <a:srgbClr val="526078"/>
+                </a:solidFill>
+                <a:latin typeface="Arial" panose="020B0604020202020204"/>
+              </a:rPr>
+              <a:t>01</a:t>
+            </a:r>
+            <a:endParaRPr sz="1900" b="1">
+              <a:solidFill>
+                <a:srgbClr val="526078"/>
+              </a:solidFill>
+              <a:latin typeface="Arial" panose="020B0604020202020204"/>
+            </a:endParaRPr>
+          </a:p>
+        </p:txBody>
+      </p:sp>
+      <p:sp>
+        <p:nvSpPr>
+          <p:cNvPr id="5" name="TextBox 4"/>
+          <p:cNvSpPr txBox="1"/>
+          <p:nvPr/>
+        </p:nvSpPr>
+        <p:spPr>
+          <a:xfrm>
+            <a:off x="1783080" y="1965960"/>
+            <a:ext cx="5303520" cy="384048"/>
+          </a:xfrm>
+          <a:prstGeom prst="rect">
+            <a:avLst/>
+          </a:prstGeom>
+          <a:noFill/>
+        </p:spPr>
+        <p:txBody>
+          <a:bodyPr wrap="none" lIns="0" tIns="0" rIns="0" bIns="0">
+            <a:spAutoFit/>
+          </a:bodyPr>
+          <a:lstStyle/>
+          <a:p>
+            <a:pPr algn="l"/>
+            <a:r>
+              <a:rPr sz="1900" b="0">
+                <a:solidFill>
+                  <a:srgbClr val="2C3443"/>
+                </a:solidFill>
+                <a:latin typeface="微软雅黑" panose="020B0503020204020204" charset="-122"/>
+              </a:rPr>
+              <a:t>研究背景与问题</a:t>
+            </a:r>
+            <a:endParaRPr sz="1900" b="0">
+              <a:solidFill>
+                <a:srgbClr val="2C3443"/>
+              </a:solidFill>
+              <a:latin typeface="微软雅黑" panose="020B0503020204020204" charset="-122"/>
+            </a:endParaRPr>
+          </a:p>
+        </p:txBody>
+      </p:sp>
+      <p:sp>
+        <p:nvSpPr>
+          <p:cNvPr id="6" name="TextBox 5"/>
+          <p:cNvSpPr txBox="1"/>
+          <p:nvPr/>
+        </p:nvSpPr>
+        <p:spPr>
+          <a:xfrm>
+            <a:off x="1078992" y="2624328"/>
+            <a:ext cx="512064" cy="384048"/>
+          </a:xfrm>
+          <a:prstGeom prst="rect">
+            <a:avLst/>
+          </a:prstGeom>
+          <a:noFill/>
+        </p:spPr>
+        <p:txBody>
+          <a:bodyPr wrap="none" lIns="0" tIns="0" rIns="0" bIns="0">
+            <a:spAutoFit/>
+          </a:bodyPr>
+          <a:lstStyle/>
+          <a:p>
+            <a:pPr algn="r"/>
+            <a:r>
+              <a:rPr sz="1900" b="1">
+                <a:solidFill>
+                  <a:srgbClr val="526078"/>
+                </a:solidFill>
+                <a:latin typeface="Arial" panose="020B0604020202020204"/>
+              </a:rPr>
+              <a:t>02</a:t>
+            </a:r>
+            <a:endParaRPr sz="1900" b="1">
+              <a:solidFill>
+                <a:srgbClr val="526078"/>
+              </a:solidFill>
+              <a:latin typeface="Arial" panose="020B0604020202020204"/>
+            </a:endParaRPr>
+          </a:p>
+        </p:txBody>
+      </p:sp>
+      <p:sp>
+        <p:nvSpPr>
+          <p:cNvPr id="7" name="TextBox 6"/>
+          <p:cNvSpPr txBox="1"/>
+          <p:nvPr/>
+        </p:nvSpPr>
+        <p:spPr>
+          <a:xfrm>
+            <a:off x="1783080" y="2624328"/>
+            <a:ext cx="5303520" cy="384048"/>
+          </a:xfrm>
+          <a:prstGeom prst="rect">
+            <a:avLst/>
+          </a:prstGeom>
+          <a:noFill/>
+        </p:spPr>
+        <p:txBody>
+          <a:bodyPr wrap="none" lIns="0" tIns="0" rIns="0" bIns="0">
+            <a:spAutoFit/>
+          </a:bodyPr>
+          <a:lstStyle/>
+          <a:p>
+            <a:pPr algn="l"/>
+            <a:r>
+              <a:rPr sz="1900" b="0">
+                <a:solidFill>
+                  <a:srgbClr val="2C3443"/>
+                </a:solidFill>
+                <a:latin typeface="微软雅黑" panose="020B0503020204020204" charset="-122"/>
+              </a:rPr>
+              <a:t>预研基础与动机证据</a:t>
+            </a:r>
+            <a:endParaRPr sz="1900" b="0">
+              <a:solidFill>
+                <a:srgbClr val="2C3443"/>
+              </a:solidFill>
+              <a:latin typeface="微软雅黑" panose="020B0503020204020204" charset="-122"/>
+            </a:endParaRPr>
+          </a:p>
+        </p:txBody>
+      </p:sp>
+      <p:sp>
+        <p:nvSpPr>
+          <p:cNvPr id="8" name="Rectangle 7"/>
           <p:cNvSpPr/>
           <p:nvPr/>
         </p:nvSpPr>
         <p:spPr>
           <a:xfrm>
-            <a:off x="548640" y="978408"/>
-            <a:ext cx="731520" cy="649224"/>
+            <a:off x="658368" y="3321100"/>
+            <a:ext cx="50292" cy="307238"/>
           </a:xfrm>
           <a:prstGeom prst="rect">
             <a:avLst/>
@@ -10555,33 +11028,23 @@
           </a:fontRef>
         </p:style>
         <p:txBody>
-          <a:bodyPr wrap="none" rtlCol="0" anchor="ctr"/>
-          <a:lstStyle/>
-          <a:p>
-            <a:pPr algn="ctr">
-              <a:defRPr sz="3200" b="1">
-                <a:solidFill>
-                  <a:srgbClr val="FFFFFF"/>
-                </a:solidFill>
-                <a:latin typeface="微软雅黑" panose="020B0503020204020204" charset="-122"/>
-              </a:defRPr>
-            </a:pPr>
-            <a:r>
-              <a:t>03</a:t>
-            </a:r>
-          </a:p>
-        </p:txBody>
-      </p:sp>
-      <p:sp>
-        <p:nvSpPr>
-          <p:cNvPr id="3" name="TextBox 2"/>
+          <a:bodyPr rtlCol="0" anchor="ctr"/>
+          <a:lstStyle/>
+          <a:p>
+            <a:pPr algn="ctr"/>
+          </a:p>
+        </p:txBody>
+      </p:sp>
+      <p:sp>
+        <p:nvSpPr>
+          <p:cNvPr id="9" name="TextBox 8"/>
           <p:cNvSpPr txBox="1"/>
           <p:nvPr/>
         </p:nvSpPr>
         <p:spPr>
           <a:xfrm>
-            <a:off x="1508760" y="1024128"/>
-            <a:ext cx="9144000" cy="502920"/>
+            <a:off x="1078992" y="3282696"/>
+            <a:ext cx="512064" cy="384048"/>
           </a:xfrm>
           <a:prstGeom prst="rect">
             <a:avLst/>
@@ -10589,35 +11052,81 @@
           <a:noFill/>
         </p:spPr>
         <p:txBody>
-          <a:bodyPr wrap="square"/>
-          <a:lstStyle/>
-          <a:p>
-            <a:r>
-              <a:rPr sz="2400" b="1">
+          <a:bodyPr wrap="none" lIns="0" tIns="0" rIns="0" bIns="0">
+            <a:spAutoFit/>
+          </a:bodyPr>
+          <a:lstStyle/>
+          <a:p>
+            <a:pPr algn="r"/>
+            <a:r>
+              <a:rPr sz="1900" b="1">
+                <a:solidFill>
+                  <a:srgbClr val="1588C7"/>
+                </a:solidFill>
+                <a:latin typeface="Arial" panose="020B0604020202020204"/>
+              </a:rPr>
+              <a:t>03</a:t>
+            </a:r>
+            <a:endParaRPr sz="1900" b="1">
+              <a:solidFill>
+                <a:srgbClr val="1588C7"/>
+              </a:solidFill>
+              <a:latin typeface="Arial" panose="020B0604020202020204"/>
+            </a:endParaRPr>
+          </a:p>
+        </p:txBody>
+      </p:sp>
+      <p:sp>
+        <p:nvSpPr>
+          <p:cNvPr id="10" name="TextBox 9"/>
+          <p:cNvSpPr txBox="1"/>
+          <p:nvPr/>
+        </p:nvSpPr>
+        <p:spPr>
+          <a:xfrm>
+            <a:off x="1783080" y="3282696"/>
+            <a:ext cx="5303520" cy="384048"/>
+          </a:xfrm>
+          <a:prstGeom prst="rect">
+            <a:avLst/>
+          </a:prstGeom>
+          <a:noFill/>
+        </p:spPr>
+        <p:txBody>
+          <a:bodyPr wrap="none" lIns="0" tIns="0" rIns="0" bIns="0">
+            <a:spAutoFit/>
+          </a:bodyPr>
+          <a:lstStyle/>
+          <a:p>
+            <a:pPr algn="l"/>
+            <a:r>
+              <a:rPr sz="1900" b="1">
                 <a:solidFill>
                   <a:srgbClr val="172033"/>
                 </a:solidFill>
+                <a:latin typeface="微软雅黑" panose="020B0503020204020204" charset="-122"/>
               </a:rPr>
-              <a:t>研究内容一：面向计算量的数据组织策略</a:t>
-            </a:r>
-            <a:endParaRPr sz="2400" b="1">
+              <a:t>研究目标与内容</a:t>
+            </a:r>
+            <a:endParaRPr sz="1900" b="1">
               <a:solidFill>
                 <a:srgbClr val="172033"/>
               </a:solidFill>
+              <a:latin typeface="微软雅黑" panose="020B0503020204020204" charset="-122"/>
             </a:endParaRPr>
           </a:p>
         </p:txBody>
       </p:sp>
       <p:sp>
         <p:nvSpPr>
-          <p:cNvPr id="5" name="TextBox 4"/>
+          <p:cNvPr id="11" name="TextBox 10"/>
           <p:cNvSpPr txBox="1"/>
           <p:nvPr/>
         </p:nvSpPr>
         <p:spPr>
           <a:xfrm>
-            <a:off x="191770" y="5085080"/>
-            <a:ext cx="11881485" cy="1245235"/>
+            <a:off x="1078992" y="3941064"/>
+            <a:ext cx="512064" cy="384048"/>
           </a:xfrm>
           <a:prstGeom prst="rect">
             <a:avLst/>
@@ -10625,125 +11134,40 @@
           <a:noFill/>
         </p:spPr>
         <p:txBody>
-          <a:bodyPr wrap="square">
+          <a:bodyPr wrap="none" lIns="0" tIns="0" rIns="0" bIns="0">
             <a:spAutoFit/>
           </a:bodyPr>
           <a:lstStyle/>
           <a:p>
-            <a:r>
-              <a:rPr sz="1300">
-                <a:solidFill>
-                  <a:srgbClr val="1F4E79"/>
-                </a:solidFill>
+            <a:pPr algn="r"/>
+            <a:r>
+              <a:rPr sz="1900" b="1">
+                <a:solidFill>
+                  <a:srgbClr val="526078"/>
+                </a:solidFill>
+                <a:latin typeface="Arial" panose="020B0604020202020204"/>
               </a:rPr>
-              <a:t>■ 问题：固定行数 batch_size 难以表征 LLM 请求计算量；同一批内 token 长度差异会放大尾部等待。</a:t>
-            </a:r>
-            <a:endParaRPr sz="1300">
+              <a:t>04</a:t>
+            </a:r>
+            <a:endParaRPr sz="1900" b="1">
               <a:solidFill>
-                <a:srgbClr val="1F4E79"/>
+                <a:srgbClr val="526078"/>
               </a:solidFill>
+              <a:latin typeface="Arial" panose="020B0604020202020204"/>
             </a:endParaRPr>
           </a:p>
-          <a:p>
-            <a:r>
-              <a:rPr sz="1300">
-                <a:solidFill>
-                  <a:srgbClr val="1F4E79"/>
-                </a:solidFill>
-              </a:rPr>
-              <a:t>■ 做法① Token-budget：以估计 token 数作为批次边界，约束单次提交的计算量上限。</a:t>
-            </a:r>
-            <a:endParaRPr sz="1300">
-              <a:solidFill>
-                <a:srgbClr val="1F4E79"/>
-              </a:solidFill>
-            </a:endParaRPr>
-          </a:p>
-          <a:p>
-            <a:r>
-              <a:rPr sz="1300">
-                <a:solidFill>
-                  <a:srgbClr val="1F4E79"/>
-                </a:solidFill>
-              </a:rPr>
-              <a:t>■ 做法② Length-align：按 token 长度排序与分组，降低同一提交内的计算量方差。</a:t>
-            </a:r>
-            <a:endParaRPr sz="1300">
-              <a:solidFill>
-                <a:srgbClr val="1F4E79"/>
-              </a:solidFill>
-            </a:endParaRPr>
-          </a:p>
-          <a:p>
-            <a:r>
-              <a:rPr sz="1300">
-                <a:solidFill>
-                  <a:srgbClr val="1F4E79"/>
-                </a:solidFill>
-              </a:rPr>
-              <a:t>■ 做法③ Prefix-aware：按共享 system prompt 聚合请求，为 prefix caching 创造命中条件。</a:t>
-            </a:r>
-            <a:endParaRPr sz="1300">
-              <a:solidFill>
-                <a:srgbClr val="1F4E79"/>
-              </a:solidFill>
-            </a:endParaRPr>
-          </a:p>
-        </p:txBody>
-      </p:sp>
-      <p:sp>
-        <p:nvSpPr>
-          <p:cNvPr id="7" name="Rectangle 6"/>
-          <p:cNvSpPr/>
-          <p:nvPr/>
-        </p:nvSpPr>
-        <p:spPr>
-          <a:xfrm>
-            <a:off x="201168" y="6318504"/>
-            <a:ext cx="41148" cy="329184"/>
-          </a:xfrm>
-          <a:prstGeom prst="rect">
-            <a:avLst/>
-          </a:prstGeom>
-          <a:solidFill>
-            <a:srgbClr val="2F6FEB"/>
-          </a:solidFill>
-          <a:ln>
-            <a:noFill/>
-          </a:ln>
-        </p:spPr>
-        <p:style>
-          <a:lnRef idx="1">
-            <a:schemeClr val="accent1"/>
-          </a:lnRef>
-          <a:fillRef idx="3">
-            <a:schemeClr val="accent1"/>
-          </a:fillRef>
-          <a:effectRef idx="2">
-            <a:schemeClr val="accent1"/>
-          </a:effectRef>
-          <a:fontRef idx="minor">
-            <a:schemeClr val="lt1"/>
-          </a:fontRef>
-        </p:style>
-        <p:txBody>
-          <a:bodyPr rtlCol="0" anchor="ctr"/>
-          <a:lstStyle/>
-          <a:p>
-            <a:pPr algn="ctr"/>
-          </a:p>
-        </p:txBody>
-      </p:sp>
-      <p:sp>
-        <p:nvSpPr>
-          <p:cNvPr id="8" name="TextBox 7"/>
+        </p:txBody>
+      </p:sp>
+      <p:sp>
+        <p:nvSpPr>
+          <p:cNvPr id="12" name="TextBox 11"/>
           <p:cNvSpPr txBox="1"/>
           <p:nvPr/>
         </p:nvSpPr>
         <p:spPr>
           <a:xfrm>
-            <a:off x="411480" y="6318504"/>
-            <a:ext cx="11201400" cy="329184"/>
+            <a:off x="1783080" y="3941064"/>
+            <a:ext cx="5303520" cy="384048"/>
           </a:xfrm>
           <a:prstGeom prst="rect">
             <a:avLst/>
@@ -10751,60 +11175,30 @@
           <a:noFill/>
         </p:spPr>
         <p:txBody>
-          <a:bodyPr wrap="square" lIns="0" tIns="0" rIns="0" bIns="0" anchor="ctr"/>
-          <a:lstStyle/>
-          <a:p>
-            <a:pPr>
-              <a:lnSpc>
-                <a:spcPct val="100000"/>
-              </a:lnSpc>
-              <a:spcBef>
-                <a:spcPts val="0"/>
-              </a:spcBef>
-              <a:spcAft>
-                <a:spcPts val="0"/>
-              </a:spcAft>
-            </a:pPr>
-            <a:r>
-              <a:rPr sz="1250" b="1">
-                <a:solidFill>
-                  <a:srgbClr val="009650"/>
-                </a:solidFill>
+          <a:bodyPr wrap="none" lIns="0" tIns="0" rIns="0" bIns="0">
+            <a:spAutoFit/>
+          </a:bodyPr>
+          <a:lstStyle/>
+          <a:p>
+            <a:pPr algn="l"/>
+            <a:r>
+              <a:rPr sz="1900" b="0">
+                <a:solidFill>
+                  <a:srgbClr val="2C3443"/>
+                </a:solidFill>
+                <a:latin typeface="微软雅黑" panose="020B0503020204020204" charset="-122"/>
               </a:rPr>
-              <a:t>核心思路：把 token 预算、长度相似性与 prefix locality 作为上游请求成形变量；收益通过 tail latency、tokens/s 与端到端消融验证。</a:t>
-            </a:r>
-            <a:endParaRPr sz="1400" b="1">
+              <a:t>可行性与计划</a:t>
+            </a:r>
+            <a:endParaRPr sz="1900" b="0">
               <a:solidFill>
-                <a:srgbClr val="009650"/>
+                <a:srgbClr val="2C3443"/>
               </a:solidFill>
+              <a:latin typeface="微软雅黑" panose="020B0503020204020204" charset="-122"/>
             </a:endParaRPr>
           </a:p>
         </p:txBody>
       </p:sp>
-      <p:pic>
-        <p:nvPicPr>
-          <p:cNvPr id="10" name="图片 9"/>
-          <p:cNvPicPr>
-            <a:picLocks noChangeAspect="1"/>
-          </p:cNvPicPr>
-          <p:nvPr/>
-        </p:nvPicPr>
-        <p:blipFill>
-          <a:blip r:embed="rId1"/>
-          <a:stretch>
-            <a:fillRect/>
-          </a:stretch>
-        </p:blipFill>
-        <p:spPr>
-          <a:xfrm>
-            <a:off x="2110105" y="1737360"/>
-            <a:ext cx="7393305" cy="3390265"/>
-          </a:xfrm>
-          <a:prstGeom prst="rect">
-            <a:avLst/>
-          </a:prstGeom>
-        </p:spPr>
-      </p:pic>
     </p:spTree>
   </p:cSld>
   <p:clrMapOvr>
@@ -10893,31 +11287,181 @@
           <a:noFill/>
         </p:spPr>
         <p:txBody>
-          <a:bodyPr wrap="none" lIns="0" tIns="0" rIns="0" bIns="0">
-            <a:spAutoFit/>
+          <a:bodyPr wrap="square"/>
+          <a:lstStyle/>
+          <a:p>
+            <a:pPr algn="l">
+              <a:defRPr sz="2800" b="1">
+                <a:solidFill>
+                  <a:srgbClr val="000000"/>
+                </a:solidFill>
+                <a:latin typeface="微软雅黑" panose="020B0503020204020204" charset="-122"/>
+              </a:defRPr>
+            </a:pPr>
+            <a:r>
+              <a:t>研究目标与总体框架</a:t>
+            </a:r>
+          </a:p>
+        </p:txBody>
+      </p:sp>
+      <p:sp>
+        <p:nvSpPr>
+          <p:cNvPr id="5" name="TextBox 4"/>
+          <p:cNvSpPr txBox="1"/>
+          <p:nvPr/>
+        </p:nvSpPr>
+        <p:spPr>
+          <a:xfrm>
+            <a:off x="839470" y="1743710"/>
+            <a:ext cx="2569845" cy="4512945"/>
+          </a:xfrm>
+          <a:prstGeom prst="rect">
+            <a:avLst/>
+          </a:prstGeom>
+          <a:noFill/>
+        </p:spPr>
+        <p:txBody>
+          <a:bodyPr wrap="square">
+            <a:noAutofit/>
           </a:bodyPr>
           <a:lstStyle/>
           <a:p>
-            <a:r>
-              <a:rPr sz="2400" b="1">
-                <a:solidFill>
-                  <a:srgbClr val="1E293B"/>
+            <a:pPr eaLnBrk="1" hangingPunct="1">
+              <a:spcAft>
+                <a:spcPts val="400"/>
+              </a:spcAft>
+              <a:defRPr sz="1300">
+                <a:solidFill>
+                  <a:srgbClr val="244C89"/>
+                </a:solidFill>
+                <a:latin typeface="微软雅黑" panose="020B0503020204020204" charset="-122"/>
+              </a:defRPr>
+            </a:pPr>
+            <a:r>
+              <a:rPr>
+                <a:solidFill>
+                  <a:srgbClr val="244C89"/>
                 </a:solidFill>
               </a:rPr>
-              <a:t>数据组织机制一：token-budget 让请求按计算量成形</a:t>
-            </a:r>
-            <a:endParaRPr sz="2400" b="1">
+              <a:t>■ 总体目标：以AI_COMPLETE（生成式LLM推理）为主场景，构建Daft/Ray端到端实验链路，优化上游数据组织与提交控制两项策略</a:t>
+            </a:r>
+            <a:endParaRPr>
               <a:solidFill>
-                <a:srgbClr val="1E293B"/>
+                <a:srgbClr val="244C89"/>
               </a:solidFill>
-              <a:latin typeface="微软雅黑" panose="020B0503020204020204" charset="-122"/>
             </a:endParaRPr>
           </a:p>
-        </p:txBody>
-      </p:sp>
-      <p:sp>
-        <p:nvSpPr>
-          <p:cNvPr id="6" name="Rectangle 5"/>
+          <a:p>
+            <a:pPr eaLnBrk="1" hangingPunct="1">
+              <a:spcAft>
+                <a:spcPts val="400"/>
+              </a:spcAft>
+              <a:defRPr sz="1300">
+                <a:solidFill>
+                  <a:srgbClr val="244C89"/>
+                </a:solidFill>
+                <a:latin typeface="微软雅黑" panose="020B0503020204020204" charset="-122"/>
+              </a:defRPr>
+            </a:pPr>
+            <a:endParaRPr>
+              <a:solidFill>
+                <a:srgbClr val="244C89"/>
+              </a:solidFill>
+            </a:endParaRPr>
+          </a:p>
+          <a:p>
+            <a:pPr eaLnBrk="1" hangingPunct="1">
+              <a:spcAft>
+                <a:spcPts val="400"/>
+              </a:spcAft>
+              <a:defRPr sz="1300">
+                <a:solidFill>
+                  <a:srgbClr val="000000"/>
+                </a:solidFill>
+                <a:latin typeface="微软雅黑" panose="020B0503020204020204" charset="-122"/>
+              </a:defRPr>
+            </a:pPr>
+            <a:r>
+              <a:rPr>
+                <a:solidFill>
+                  <a:srgbClr val="244C89"/>
+                </a:solidFill>
+              </a:rPr>
+              <a:t>■ 主链路：PostgreSQL → Daft（数据引擎，Rust核心+Arrow零拷贝）→ Ray actor（异构池+去中心化协调）→ vLLM（continuous batching，不修改内部）→ 写回</a:t>
+            </a:r>
+            <a:endParaRPr>
+              <a:solidFill>
+                <a:srgbClr val="244C89"/>
+              </a:solidFill>
+            </a:endParaRPr>
+          </a:p>
+          <a:p>
+            <a:pPr eaLnBrk="1" hangingPunct="1">
+              <a:spcAft>
+                <a:spcPts val="400"/>
+              </a:spcAft>
+              <a:defRPr sz="1300">
+                <a:solidFill>
+                  <a:srgbClr val="000000"/>
+                </a:solidFill>
+                <a:latin typeface="微软雅黑" panose="020B0503020204020204" charset="-122"/>
+              </a:defRPr>
+            </a:pPr>
+            <a:endParaRPr>
+              <a:solidFill>
+                <a:srgbClr val="244C89"/>
+              </a:solidFill>
+            </a:endParaRPr>
+          </a:p>
+          <a:p>
+            <a:pPr eaLnBrk="1" hangingPunct="1">
+              <a:spcAft>
+                <a:spcPts val="400"/>
+              </a:spcAft>
+              <a:defRPr sz="1300">
+                <a:solidFill>
+                  <a:srgbClr val="000000"/>
+                </a:solidFill>
+                <a:latin typeface="微软雅黑" panose="020B0503020204020204" charset="-122"/>
+              </a:defRPr>
+            </a:pPr>
+            <a:endParaRPr>
+              <a:solidFill>
+                <a:srgbClr val="244C89"/>
+              </a:solidFill>
+            </a:endParaRPr>
+          </a:p>
+          <a:p>
+            <a:pPr eaLnBrk="1" hangingPunct="1">
+              <a:spcAft>
+                <a:spcPts val="400"/>
+              </a:spcAft>
+              <a:defRPr sz="1300">
+                <a:solidFill>
+                  <a:srgbClr val="000000"/>
+                </a:solidFill>
+                <a:latin typeface="微软雅黑" panose="020B0503020204020204" charset="-122"/>
+              </a:defRPr>
+            </a:pPr>
+            <a:r>
+              <a:rPr>
+                <a:solidFill>
+                  <a:srgbClr val="244C89"/>
+                </a:solidFill>
+              </a:rPr>
+              <a:t>■ 两项策略 + 多模态泛化验证 + 算子代价估计（补充）：研究内容一（数据组织）、研究内容二（提交控制）、耦合验证（独立拼接 vs 联合grid search）</a:t>
+            </a:r>
+            <a:endParaRPr>
+              <a:solidFill>
+                <a:srgbClr val="244C89"/>
+              </a:solidFill>
+            </a:endParaRPr>
+          </a:p>
+        </p:txBody>
+      </p:sp>
+      <p:sp>
+        <p:nvSpPr>
+          <p:cNvPr id="7" name="Rectangle 6"/>
           <p:cNvSpPr/>
           <p:nvPr/>
         </p:nvSpPr>
@@ -10960,7 +11504,7 @@
       </p:sp>
       <p:sp>
         <p:nvSpPr>
-          <p:cNvPr id="7" name="TextBox 6"/>
+          <p:cNvPr id="8" name="TextBox 7"/>
           <p:cNvSpPr txBox="1"/>
           <p:nvPr/>
         </p:nvSpPr>
@@ -10975,12 +11519,10 @@
           <a:noFill/>
         </p:spPr>
         <p:txBody>
-          <a:bodyPr wrap="none" lIns="0" tIns="0" rIns="0" bIns="0" anchor="ctr">
-            <a:spAutoFit/>
-          </a:bodyPr>
-          <a:lstStyle/>
-          <a:p>
-            <a:pPr>
+          <a:bodyPr wrap="square" lIns="0" tIns="0" rIns="0" bIns="0" anchor="ctr"/>
+          <a:lstStyle/>
+          <a:p>
+            <a:pPr algn="l">
               <a:lnSpc>
                 <a:spcPct val="100000"/>
               </a:lnSpc>
@@ -10990,27 +11532,24 @@
               <a:spcAft>
                 <a:spcPts val="0"/>
               </a:spcAft>
-            </a:pPr>
-            <a:r>
-              <a:rPr sz="1300" b="0">
-                <a:solidFill>
-                  <a:srgbClr val="1E293B"/>
-                </a:solidFill>
-              </a:rPr>
-              <a:t>固定行数先转成 token 成本，再按预算形成提交；该策略用于约束请求计算量，收益由后续消融实验验证。</a:t>
-            </a:r>
-            <a:endParaRPr sz="1300" b="0">
-              <a:solidFill>
-                <a:srgbClr val="1E293B"/>
-              </a:solidFill>
-              <a:latin typeface="微软雅黑" panose="020B0503020204020204" charset="-122"/>
-            </a:endParaRPr>
+              <a:defRPr sz="1200" b="1">
+                <a:solidFill>
+                  <a:srgbClr val="16A34A"/>
+                </a:solidFill>
+                <a:latin typeface="微软雅黑" panose="020B0503020204020204" charset="-122"/>
+              </a:defRPr>
+            </a:pPr>
+            <a:r>
+              <a:rPr sz="1250"/>
+              <a:t>核心思路：数据如何组织、以什么节奏发送、如何响应模型服务状态——三项决策共同影响端到端效率。</a:t>
+            </a:r>
+            <a:endParaRPr sz="1250"/>
           </a:p>
         </p:txBody>
       </p:sp>
       <p:pic>
         <p:nvPicPr>
-          <p:cNvPr id="8" name="Picture 7" descr="image.png"/>
+          <p:cNvPr id="6" name="图片 5"/>
           <p:cNvPicPr>
             <a:picLocks noChangeAspect="1"/>
           </p:cNvPicPr>
@@ -11024,8 +11563,8 @@
         </p:blipFill>
         <p:spPr>
           <a:xfrm>
-            <a:off x="1177739" y="1840000"/>
-            <a:ext cx="9836521" cy="4040000"/>
+            <a:off x="3503930" y="1739265"/>
+            <a:ext cx="8226425" cy="4517390"/>
           </a:xfrm>
           <a:prstGeom prst="rect">
             <a:avLst/>
@@ -11052,7 +11591,31 @@
       <p:grpSpPr/>
       <p:sp>
         <p:nvSpPr>
-          <p:cNvPr id="2" name="Rectangle 1"/>
+          <p:cNvPr id="2" name="灯片编号占位符 1"/>
+          <p:cNvSpPr>
+            <a:spLocks noGrp="1"/>
+          </p:cNvSpPr>
+          <p:nvPr>
+            <p:ph type="sldNum" sz="quarter" idx="12"/>
+          </p:nvPr>
+        </p:nvSpPr>
+        <p:spPr/>
+        <p:txBody>
+          <a:bodyPr/>
+          <a:p>
+            <a:pPr>
+              <a:defRPr/>
+            </a:pPr>
+            <a:fld id="{6A90D09A-ED5D-47CC-A45F-D492BA9A6C1B}" type="slidenum">
+              <a:rPr lang="en-US" altLang="zh-CN" smtClean="0"/>
+            </a:fld>
+            <a:endParaRPr lang="en-US" altLang="zh-CN"/>
+          </a:p>
+        </p:txBody>
+      </p:sp>
+      <p:sp>
+        <p:nvSpPr>
+          <p:cNvPr id="3" name="Rectangle 1"/>
           <p:cNvSpPr/>
           <p:nvPr/>
         </p:nvSpPr>
@@ -11105,7 +11668,7 @@
       </p:sp>
       <p:sp>
         <p:nvSpPr>
-          <p:cNvPr id="3" name="TextBox 2"/>
+          <p:cNvPr id="4" name="TextBox 2"/>
           <p:cNvSpPr txBox="1"/>
           <p:nvPr/>
         </p:nvSpPr>
@@ -11120,124 +11683,31 @@
           <a:noFill/>
         </p:spPr>
         <p:txBody>
-          <a:bodyPr wrap="none" lIns="0" tIns="0" rIns="0" bIns="0">
-            <a:spAutoFit/>
-          </a:bodyPr>
-          <a:lstStyle/>
-          <a:p>
-            <a:r>
-              <a:rPr sz="2400" b="1">
-                <a:solidFill>
-                  <a:srgbClr val="1E293B"/>
-                </a:solidFill>
-              </a:rPr>
-              <a:t>数据组织机制二：length-align 降低 batch 内计算量方差</a:t>
-            </a:r>
-            <a:endParaRPr sz="2400" b="1">
-              <a:solidFill>
-                <a:srgbClr val="1E293B"/>
-              </a:solidFill>
-              <a:latin typeface="微软雅黑" panose="020B0503020204020204" charset="-122"/>
-            </a:endParaRPr>
-          </a:p>
-        </p:txBody>
-      </p:sp>
-      <p:sp>
-        <p:nvSpPr>
-          <p:cNvPr id="6" name="Rectangle 5"/>
-          <p:cNvSpPr/>
-          <p:nvPr/>
-        </p:nvSpPr>
-        <p:spPr>
-          <a:xfrm>
-            <a:off x="201168" y="6318504"/>
-            <a:ext cx="41148" cy="329184"/>
-          </a:xfrm>
-          <a:prstGeom prst="rect">
-            <a:avLst/>
-          </a:prstGeom>
-          <a:solidFill>
-            <a:srgbClr val="2F6FEB"/>
-          </a:solidFill>
-          <a:ln>
-            <a:noFill/>
-          </a:ln>
-        </p:spPr>
-        <p:style>
-          <a:lnRef idx="1">
-            <a:schemeClr val="accent1"/>
-          </a:lnRef>
-          <a:fillRef idx="3">
-            <a:schemeClr val="accent1"/>
-          </a:fillRef>
-          <a:effectRef idx="2">
-            <a:schemeClr val="accent1"/>
-          </a:effectRef>
-          <a:fontRef idx="minor">
-            <a:schemeClr val="lt1"/>
-          </a:fontRef>
-        </p:style>
-        <p:txBody>
-          <a:bodyPr rtlCol="0" anchor="ctr"/>
-          <a:lstStyle/>
-          <a:p>
-            <a:pPr algn="ctr"/>
-          </a:p>
-        </p:txBody>
-      </p:sp>
-      <p:sp>
-        <p:nvSpPr>
-          <p:cNvPr id="7" name="TextBox 6"/>
-          <p:cNvSpPr txBox="1"/>
-          <p:nvPr/>
-        </p:nvSpPr>
-        <p:spPr>
-          <a:xfrm>
-            <a:off x="411480" y="6318504"/>
-            <a:ext cx="11201400" cy="329184"/>
-          </a:xfrm>
-          <a:prstGeom prst="rect">
-            <a:avLst/>
-          </a:prstGeom>
-          <a:noFill/>
-        </p:spPr>
-        <p:txBody>
-          <a:bodyPr wrap="none" lIns="0" tIns="0" rIns="0" bIns="0" anchor="ctr">
-            <a:spAutoFit/>
-          </a:bodyPr>
-          <a:lstStyle/>
-          <a:p>
-            <a:pPr>
-              <a:lnSpc>
-                <a:spcPct val="100000"/>
-              </a:lnSpc>
-              <a:spcBef>
-                <a:spcPts val="0"/>
-              </a:spcBef>
-              <a:spcAft>
-                <a:spcPts val="0"/>
-              </a:spcAft>
-            </a:pPr>
-            <a:r>
-              <a:rPr sz="1300" b="0">
-                <a:solidFill>
-                  <a:srgbClr val="1E293B"/>
-                </a:solidFill>
-              </a:rPr>
-              <a:t>排序分组用于减少同一提交内长短混杂，使 batch 内计算量更接近；是否降低尾延迟，需要服务端 P95/P99 与 tokens/s 共同验证。</a:t>
-            </a:r>
-            <a:endParaRPr sz="1300" b="0">
-              <a:solidFill>
-                <a:srgbClr val="1E293B"/>
-              </a:solidFill>
-              <a:latin typeface="微软雅黑" panose="020B0503020204020204" charset="-122"/>
-            </a:endParaRPr>
+          <a:bodyPr wrap="square"/>
+          <a:lstStyle/>
+          <a:p>
+            <a:pPr algn="l">
+              <a:defRPr sz="2800" b="1">
+                <a:solidFill>
+                  <a:srgbClr val="000000"/>
+                </a:solidFill>
+                <a:latin typeface="微软雅黑" panose="020B0503020204020204" charset="-122"/>
+              </a:defRPr>
+            </a:pPr>
+            <a:r>
+              <a:t>研究</a:t>
+            </a:r>
+            <a:r>
+              <a:rPr lang="zh-CN"/>
+              <a:t>内容</a:t>
+            </a:r>
+            <a:endParaRPr lang="zh-CN"/>
           </a:p>
         </p:txBody>
       </p:sp>
       <p:pic>
         <p:nvPicPr>
-          <p:cNvPr id="8" name="Picture 7" descr="image.png"/>
+          <p:cNvPr id="5" name="图片 4"/>
           <p:cNvPicPr>
             <a:picLocks noChangeAspect="1"/>
           </p:cNvPicPr>
@@ -11251,8 +11721,8 @@
         </p:blipFill>
         <p:spPr>
           <a:xfrm>
-            <a:off x="886526" y="1840000"/>
-            <a:ext cx="10418947" cy="4040000"/>
+            <a:off x="767715" y="1772920"/>
+            <a:ext cx="10184765" cy="4447540"/>
           </a:xfrm>
           <a:prstGeom prst="rect">
             <a:avLst/>
@@ -11347,31 +11817,111 @@
           <a:noFill/>
         </p:spPr>
         <p:txBody>
-          <a:bodyPr wrap="none" lIns="0" tIns="0" rIns="0" bIns="0">
-            <a:spAutoFit/>
-          </a:bodyPr>
+          <a:bodyPr wrap="square"/>
           <a:lstStyle/>
           <a:p>
             <a:r>
               <a:rPr sz="2400" b="1">
                 <a:solidFill>
-                  <a:srgbClr val="1E293B"/>
+                  <a:srgbClr val="172033"/>
                 </a:solidFill>
               </a:rPr>
-              <a:t>数据组织机制三：prefix-aware 为缓存命中创造条件</a:t>
+              <a:t>研究内容一：面向计算量的数据组织策略</a:t>
             </a:r>
             <a:endParaRPr sz="2400" b="1">
               <a:solidFill>
-                <a:srgbClr val="1E293B"/>
+                <a:srgbClr val="172033"/>
               </a:solidFill>
-              <a:latin typeface="微软雅黑" panose="020B0503020204020204" charset="-122"/>
             </a:endParaRPr>
           </a:p>
         </p:txBody>
       </p:sp>
       <p:sp>
         <p:nvSpPr>
-          <p:cNvPr id="6" name="Rectangle 5"/>
+          <p:cNvPr id="5" name="TextBox 4"/>
+          <p:cNvSpPr txBox="1"/>
+          <p:nvPr/>
+        </p:nvSpPr>
+        <p:spPr>
+          <a:xfrm>
+            <a:off x="323850" y="5156835"/>
+            <a:ext cx="11881485" cy="930275"/>
+          </a:xfrm>
+          <a:prstGeom prst="rect">
+            <a:avLst/>
+          </a:prstGeom>
+          <a:noFill/>
+        </p:spPr>
+        <p:txBody>
+          <a:bodyPr wrap="square">
+            <a:noAutofit/>
+          </a:bodyPr>
+          <a:lstStyle/>
+          <a:p>
+            <a:r>
+              <a:rPr sz="1400">
+                <a:solidFill>
+                  <a:srgbClr val="1F4E79"/>
+                </a:solidFill>
+              </a:rPr>
+              <a:t>■ 问题：固定行数 batch_size 难以表征 LLM 请求计算量；同一批内 token 长度差异会放大尾部等待。</a:t>
+            </a:r>
+            <a:endParaRPr sz="1400">
+              <a:solidFill>
+                <a:srgbClr val="1F4E79"/>
+              </a:solidFill>
+            </a:endParaRPr>
+          </a:p>
+          <a:p>
+            <a:r>
+              <a:rPr sz="1400">
+                <a:solidFill>
+                  <a:srgbClr val="1F4E79"/>
+                </a:solidFill>
+              </a:rPr>
+              <a:t>■ 做法① Token-budget：以估计 token 数作为批次边界，约束单次提交的计算量上限。</a:t>
+            </a:r>
+            <a:endParaRPr sz="1400">
+              <a:solidFill>
+                <a:srgbClr val="1F4E79"/>
+              </a:solidFill>
+            </a:endParaRPr>
+          </a:p>
+          <a:p>
+            <a:r>
+              <a:rPr sz="1400">
+                <a:solidFill>
+                  <a:srgbClr val="1F4E79"/>
+                </a:solidFill>
+              </a:rPr>
+              <a:t>■ 做法② Length-align：按 token 长度排序与分组，降低同一提交内的计算量方差。</a:t>
+            </a:r>
+            <a:endParaRPr sz="1400">
+              <a:solidFill>
+                <a:srgbClr val="1F4E79"/>
+              </a:solidFill>
+            </a:endParaRPr>
+          </a:p>
+          <a:p>
+            <a:r>
+              <a:rPr sz="1400">
+                <a:solidFill>
+                  <a:srgbClr val="1F4E79"/>
+                </a:solidFill>
+              </a:rPr>
+              <a:t>■ 做法③ Prefix-aware：按共享 system prompt 聚合请求，为 prefix caching 创造命中条件。</a:t>
+            </a:r>
+            <a:endParaRPr sz="1400">
+              <a:solidFill>
+                <a:srgbClr val="1F4E79"/>
+              </a:solidFill>
+            </a:endParaRPr>
+          </a:p>
+        </p:txBody>
+      </p:sp>
+      <p:sp>
+        <p:nvSpPr>
+          <p:cNvPr id="7" name="Rectangle 6"/>
           <p:cNvSpPr/>
           <p:nvPr/>
         </p:nvSpPr>
@@ -11414,7 +11964,7 @@
       </p:sp>
       <p:sp>
         <p:nvSpPr>
-          <p:cNvPr id="7" name="TextBox 6"/>
+          <p:cNvPr id="8" name="TextBox 7"/>
           <p:cNvSpPr txBox="1"/>
           <p:nvPr/>
         </p:nvSpPr>
@@ -11429,9 +11979,7 @@
           <a:noFill/>
         </p:spPr>
         <p:txBody>
-          <a:bodyPr wrap="none" lIns="0" tIns="0" rIns="0" bIns="0" anchor="ctr">
-            <a:spAutoFit/>
-          </a:bodyPr>
+          <a:bodyPr wrap="square" lIns="0" tIns="0" rIns="0" bIns="0" anchor="ctr"/>
           <a:lstStyle/>
           <a:p>
             <a:pPr>
@@ -11446,25 +11994,24 @@
               </a:spcAft>
             </a:pPr>
             <a:r>
-              <a:rPr sz="1300" b="0">
-                <a:solidFill>
-                  <a:srgbClr val="1E293B"/>
+              <a:rPr sz="1250" b="1">
+                <a:solidFill>
+                  <a:srgbClr val="009650"/>
                 </a:solidFill>
               </a:rPr>
-              <a:t>prefix 分组用于把共享 system prompt 的请求集中提交，创造 prefix locality；最终收益需看 vLLM prefix-cache 指标和端到端效果。</a:t>
-            </a:r>
-            <a:endParaRPr sz="1300" b="0">
+              <a:t>核心思路：把 token 预算、长度相似性与 prefix locality 作为上游请求成形变量；收益通过 tail latency、tokens/s 与端到端消融验证。</a:t>
+            </a:r>
+            <a:endParaRPr sz="1400" b="1">
               <a:solidFill>
-                <a:srgbClr val="1E293B"/>
+                <a:srgbClr val="009650"/>
               </a:solidFill>
-              <a:latin typeface="微软雅黑" panose="020B0503020204020204" charset="-122"/>
             </a:endParaRPr>
           </a:p>
         </p:txBody>
       </p:sp>
       <p:pic>
         <p:nvPicPr>
-          <p:cNvPr id="8" name="Picture 7" descr="image.png"/>
+          <p:cNvPr id="4" name="图片 3"/>
           <p:cNvPicPr>
             <a:picLocks noChangeAspect="1"/>
           </p:cNvPicPr>
@@ -11478,8 +12025,8 @@
         </p:blipFill>
         <p:spPr>
           <a:xfrm>
-            <a:off x="1116465" y="1840000"/>
-            <a:ext cx="9959069" cy="4040000"/>
+            <a:off x="323850" y="1899920"/>
+            <a:ext cx="11544300" cy="3057525"/>
           </a:xfrm>
           <a:prstGeom prst="rect">
             <a:avLst/>
@@ -11574,111 +12121,31 @@
           <a:noFill/>
         </p:spPr>
         <p:txBody>
-          <a:bodyPr wrap="square"/>
+          <a:bodyPr wrap="none" lIns="0" tIns="0" rIns="0" bIns="0">
+            <a:spAutoFit/>
+          </a:bodyPr>
           <a:lstStyle/>
           <a:p>
             <a:r>
               <a:rPr sz="2400" b="1">
                 <a:solidFill>
-                  <a:srgbClr val="172033"/>
+                  <a:srgbClr val="1E293B"/>
                 </a:solidFill>
               </a:rPr>
-              <a:t>研究内容二：面向服务状态的调度与提交控制策略</a:t>
+              <a:t>数据组织机制一：token-budget 让请求按计算量成形</a:t>
             </a:r>
             <a:endParaRPr sz="2400" b="1">
               <a:solidFill>
-                <a:srgbClr val="172033"/>
+                <a:srgbClr val="1E293B"/>
               </a:solidFill>
+              <a:latin typeface="微软雅黑" panose="020B0503020204020204" charset="-122"/>
             </a:endParaRPr>
           </a:p>
         </p:txBody>
       </p:sp>
       <p:sp>
         <p:nvSpPr>
-          <p:cNvPr id="5" name="TextBox 4"/>
-          <p:cNvSpPr txBox="1"/>
-          <p:nvPr/>
-        </p:nvSpPr>
-        <p:spPr>
-          <a:xfrm>
-            <a:off x="118745" y="4725035"/>
-            <a:ext cx="11925935" cy="1762125"/>
-          </a:xfrm>
-          <a:prstGeom prst="rect">
-            <a:avLst/>
-          </a:prstGeom>
-          <a:noFill/>
-        </p:spPr>
-        <p:txBody>
-          <a:bodyPr wrap="square">
-            <a:noAutofit/>
-          </a:bodyPr>
-          <a:lstStyle/>
-          <a:p>
-            <a:r>
-              <a:rPr sz="1300">
-                <a:solidFill>
-                  <a:srgbClr val="1F4E79"/>
-                </a:solidFill>
-              </a:rPr>
-              <a:t>■ 问题：固定提交间隔或固定并发难以适配 vLLM 队列波动，容易在排队积压与 GPU 空闲之间摆动。</a:t>
-            </a:r>
-            <a:endParaRPr sz="1300">
-              <a:solidFill>
-                <a:srgbClr val="1F4E79"/>
-              </a:solidFill>
-            </a:endParaRPr>
-          </a:p>
-          <a:p>
-            <a:r>
-              <a:rPr sz="1300">
-                <a:solidFill>
-                  <a:srgbClr val="1F4E79"/>
-                </a:solidFill>
-              </a:rPr>
-              <a:t>■ 做法① Queue-adaptive flush：Ray actor 根据队列与在途请求信号决定何时提交。</a:t>
-            </a:r>
-            <a:endParaRPr sz="1300">
-              <a:solidFill>
-                <a:srgbClr val="1F4E79"/>
-              </a:solidFill>
-            </a:endParaRPr>
-          </a:p>
-          <a:p>
-            <a:r>
-              <a:rPr sz="1300">
-                <a:solidFill>
-                  <a:srgbClr val="1F4E79"/>
-                </a:solidFill>
-              </a:rPr>
-              <a:t>■ 做法② K_max 动态控制：根据排队压力和尾延迟信号调整在途请求上限。</a:t>
-            </a:r>
-            <a:endParaRPr sz="1300">
-              <a:solidFill>
-                <a:srgbClr val="1F4E79"/>
-              </a:solidFill>
-            </a:endParaRPr>
-          </a:p>
-          <a:p>
-            <a:r>
-              <a:rPr sz="1300">
-                <a:solidFill>
-                  <a:srgbClr val="1F4E79"/>
-                </a:solidFill>
-              </a:rPr>
-              <a:t>■ 做法③ Actor-pool routing：按请求长度、prefix 与服务端压力分配到不同 actor 池。</a:t>
-            </a:r>
-            <a:endParaRPr sz="1300">
-              <a:solidFill>
-                <a:srgbClr val="1F4E79"/>
-              </a:solidFill>
-            </a:endParaRPr>
-          </a:p>
-        </p:txBody>
-      </p:sp>
-      <p:sp>
-        <p:nvSpPr>
-          <p:cNvPr id="7" name="Rectangle 6"/>
+          <p:cNvPr id="6" name="Rectangle 5"/>
           <p:cNvSpPr/>
           <p:nvPr/>
         </p:nvSpPr>
@@ -11721,7 +12188,7 @@
       </p:sp>
       <p:sp>
         <p:nvSpPr>
-          <p:cNvPr id="8" name="TextBox 7"/>
+          <p:cNvPr id="7" name="TextBox 6"/>
           <p:cNvSpPr txBox="1"/>
           <p:nvPr/>
         </p:nvSpPr>
@@ -11736,7 +12203,9 @@
           <a:noFill/>
         </p:spPr>
         <p:txBody>
-          <a:bodyPr wrap="square" lIns="0" tIns="0" rIns="0" bIns="0" anchor="ctr"/>
+          <a:bodyPr wrap="none" lIns="0" tIns="0" rIns="0" bIns="0" anchor="ctr">
+            <a:spAutoFit/>
+          </a:bodyPr>
           <a:lstStyle/>
           <a:p>
             <a:pPr>
@@ -11751,24 +12220,25 @@
               </a:spcAft>
             </a:pPr>
             <a:r>
-              <a:rPr sz="1250" b="1">
-                <a:solidFill>
-                  <a:srgbClr val="009650"/>
+              <a:rPr sz="1300" b="0">
+                <a:solidFill>
+                  <a:srgbClr val="1E293B"/>
                 </a:solidFill>
               </a:rPr>
-              <a:t>核心思路：利用 Ray actor 的状态记忆与异步执行能力，在不引入全局调度器的前提下实现自适应提交控制。</a:t>
-            </a:r>
-            <a:endParaRPr sz="1400" b="1">
+              <a:t>固定行数先转成 token 成本，再按预算形成提交；该策略用于约束请求计算量，收益由后续消融实验验证。</a:t>
+            </a:r>
+            <a:endParaRPr sz="1300" b="0">
               <a:solidFill>
-                <a:srgbClr val="009650"/>
+                <a:srgbClr val="1E293B"/>
               </a:solidFill>
+              <a:latin typeface="微软雅黑" panose="020B0503020204020204" charset="-122"/>
             </a:endParaRPr>
           </a:p>
         </p:txBody>
       </p:sp>
       <p:pic>
         <p:nvPicPr>
-          <p:cNvPr id="6" name="图片 5"/>
+          <p:cNvPr id="8" name="Picture 7" descr="image.png"/>
           <p:cNvPicPr>
             <a:picLocks noChangeAspect="1"/>
           </p:cNvPicPr>
@@ -11782,8 +12252,8 @@
         </p:blipFill>
         <p:spPr>
           <a:xfrm>
-            <a:off x="119380" y="1737360"/>
-            <a:ext cx="11925300" cy="2871470"/>
+            <a:off x="1177739" y="1840000"/>
+            <a:ext cx="9836521" cy="4040000"/>
           </a:xfrm>
           <a:prstGeom prst="rect">
             <a:avLst/>
@@ -11878,146 +12348,24 @@
           <a:noFill/>
         </p:spPr>
         <p:txBody>
-          <a:bodyPr wrap="square"/>
-          <a:lstStyle/>
-          <a:p>
-            <a:pPr algn="l">
-              <a:defRPr sz="2800" b="1">
-                <a:solidFill>
-                  <a:srgbClr val="000000"/>
-                </a:solidFill>
-                <a:latin typeface="微软雅黑" panose="020B0503020204020204" charset="-122"/>
-              </a:defRPr>
-            </a:pPr>
-            <a:r>
-              <a:t>耦合验证与实验设计</a:t>
-            </a:r>
-          </a:p>
-        </p:txBody>
-      </p:sp>
-      <p:sp>
-        <p:nvSpPr>
-          <p:cNvPr id="5" name="TextBox 4"/>
-          <p:cNvSpPr txBox="1"/>
-          <p:nvPr/>
-        </p:nvSpPr>
-        <p:spPr>
-          <a:xfrm>
-            <a:off x="548640" y="1920240"/>
-            <a:ext cx="10972800" cy="3200400"/>
-          </a:xfrm>
-          <a:prstGeom prst="rect">
-            <a:avLst/>
-          </a:prstGeom>
-          <a:noFill/>
-        </p:spPr>
-        <p:txBody>
-          <a:bodyPr wrap="square">
+          <a:bodyPr wrap="none" lIns="0" tIns="0" rIns="0" bIns="0">
             <a:spAutoFit/>
           </a:bodyPr>
           <a:lstStyle/>
           <a:p>
-            <a:pPr>
-              <a:spcAft>
-                <a:spcPts val="800"/>
-              </a:spcAft>
-              <a:defRPr sz="1500">
-                <a:solidFill>
-                  <a:srgbClr val="244C89"/>
-                </a:solidFill>
-                <a:latin typeface="微软雅黑" panose="020B0503020204020204" charset="-122"/>
-              </a:defRPr>
-            </a:pPr>
-            <a:r>
-              <a:rPr>
-                <a:solidFill>
-                  <a:srgbClr val="244C89"/>
+            <a:r>
+              <a:rPr sz="2400" b="1">
+                <a:solidFill>
+                  <a:srgbClr val="1E293B"/>
                 </a:solidFill>
               </a:rPr>
-              <a:t>■ 验证问题：两项策略分别调优后拼接，是否等于联合调优？还是需要联合搜索才能找到最优组合？</a:t>
-            </a:r>
-            <a:endParaRPr>
+              <a:t>数据组织机制二：length-align 降低 batch 内计算量方差</a:t>
+            </a:r>
+            <a:endParaRPr sz="2400" b="1">
               <a:solidFill>
-                <a:srgbClr val="244C89"/>
+                <a:srgbClr val="1E293B"/>
               </a:solidFill>
-            </a:endParaRPr>
-          </a:p>
-          <a:p>
-            <a:pPr>
-              <a:spcAft>
-                <a:spcPts val="800"/>
-              </a:spcAft>
-              <a:defRPr sz="1500">
-                <a:solidFill>
-                  <a:srgbClr val="000000"/>
-                </a:solidFill>
-                <a:latin typeface="微软雅黑" panose="020B0503020204020204" charset="-122"/>
-              </a:defRPr>
-            </a:pPr>
-            <a:r>
-              <a:rPr>
-                <a:solidFill>
-                  <a:srgbClr val="244C89"/>
-                </a:solidFill>
-              </a:rPr>
-              <a:t>■ 方法：独立搜索最优batching配置 → 独立搜索最优submission配置 → 拼接独立最优 → 联合grid search（batching × submission）→ 比较差距</a:t>
-            </a:r>
-            <a:endParaRPr>
-              <a:solidFill>
-                <a:srgbClr val="244C89"/>
-              </a:solidFill>
-            </a:endParaRPr>
-          </a:p>
-          <a:p>
-            <a:pPr>
-              <a:spcAft>
-                <a:spcPts val="800"/>
-              </a:spcAft>
-              <a:defRPr sz="1500">
-                <a:solidFill>
-                  <a:srgbClr val="000000"/>
-                </a:solidFill>
-                <a:latin typeface="微软雅黑" panose="020B0503020204020204" charset="-122"/>
-              </a:defRPr>
-            </a:pPr>
-            <a:r>
-              <a:rPr>
-                <a:solidFill>
-                  <a:srgbClr val="244C89"/>
-                </a:solidFill>
-              </a:rPr>
-              <a:t>■ 判定：联合显著优于拼接 → 需要联合调优（交互效应强）；两者接近 → 分层独立优化即可（策略正交）</a:t>
-            </a:r>
-            <a:endParaRPr>
-              <a:solidFill>
-                <a:srgbClr val="244C89"/>
-              </a:solidFill>
-            </a:endParaRPr>
-          </a:p>
-          <a:p>
-            <a:pPr>
-              <a:spcAft>
-                <a:spcPts val="800"/>
-              </a:spcAft>
-              <a:defRPr sz="1500">
-                <a:solidFill>
-                  <a:srgbClr val="000000"/>
-                </a:solidFill>
-                <a:latin typeface="微软雅黑" panose="020B0503020204020204" charset="-122"/>
-              </a:defRPr>
-            </a:pPr>
-            <a:r>
-              <a:rPr>
-                <a:solidFill>
-                  <a:srgbClr val="244C89"/>
-                </a:solidFill>
-              </a:rPr>
-              <a:t>■ 无论哪种结果，都不改变课题的核心贡献——上游数据组织+提交控制两项策略的设计空间表征与实验验证。</a:t>
-            </a:r>
-            <a:endParaRPr>
-              <a:solidFill>
-                <a:srgbClr val="244C89"/>
-              </a:solidFill>
+              <a:latin typeface="微软雅黑" panose="020B0503020204020204" charset="-122"/>
             </a:endParaRPr>
           </a:p>
         </p:txBody>
@@ -12082,10 +12430,12 @@
           <a:noFill/>
         </p:spPr>
         <p:txBody>
-          <a:bodyPr wrap="square" lIns="0" tIns="0" rIns="0" bIns="0" anchor="ctr"/>
-          <a:lstStyle/>
-          <a:p>
-            <a:pPr algn="l">
+          <a:bodyPr wrap="none" lIns="0" tIns="0" rIns="0" bIns="0" anchor="ctr">
+            <a:spAutoFit/>
+          </a:bodyPr>
+          <a:lstStyle/>
+          <a:p>
+            <a:pPr>
               <a:lnSpc>
                 <a:spcPct val="100000"/>
               </a:lnSpc>
@@ -12095,21 +12445,48 @@
               <a:spcAft>
                 <a:spcPts val="0"/>
               </a:spcAft>
-              <a:defRPr sz="1200" b="1">
-                <a:solidFill>
-                  <a:srgbClr val="16A34A"/>
-                </a:solidFill>
-                <a:latin typeface="微软雅黑" panose="020B0503020204020204" charset="-122"/>
-              </a:defRPr>
-            </a:pPr>
-            <a:r>
-              <a:rPr sz="1250"/>
-              <a:t>写回使用PostgreSQL+pgvector（COPY+deferred index）作为工程baseline，不作为独立方法贡献——仅在端到端评价中检查写回是否吞噬上游收益。</a:t>
-            </a:r>
-            <a:endParaRPr sz="1250"/>
-          </a:p>
-        </p:txBody>
-      </p:sp>
+            </a:pPr>
+            <a:r>
+              <a:rPr sz="1300" b="0">
+                <a:solidFill>
+                  <a:srgbClr val="1E293B"/>
+                </a:solidFill>
+              </a:rPr>
+              <a:t>排序分组用于减少同一提交内长短混杂，使 batch 内计算量更接近；是否降低尾延迟，需要服务端 P95/P99 与 tokens/s 共同验证。</a:t>
+            </a:r>
+            <a:endParaRPr sz="1300" b="0">
+              <a:solidFill>
+                <a:srgbClr val="1E293B"/>
+              </a:solidFill>
+              <a:latin typeface="微软雅黑" panose="020B0503020204020204" charset="-122"/>
+            </a:endParaRPr>
+          </a:p>
+        </p:txBody>
+      </p:sp>
+      <p:pic>
+        <p:nvPicPr>
+          <p:cNvPr id="8" name="Picture 7" descr="image.png"/>
+          <p:cNvPicPr>
+            <a:picLocks noChangeAspect="1"/>
+          </p:cNvPicPr>
+          <p:nvPr/>
+        </p:nvPicPr>
+        <p:blipFill>
+          <a:blip r:embed="rId1"/>
+          <a:stretch>
+            <a:fillRect/>
+          </a:stretch>
+        </p:blipFill>
+        <p:spPr>
+          <a:xfrm>
+            <a:off x="886526" y="1840000"/>
+            <a:ext cx="10418947" cy="4040000"/>
+          </a:xfrm>
+          <a:prstGeom prst="rect">
+            <a:avLst/>
+          </a:prstGeom>
+        </p:spPr>
+      </p:pic>
     </p:spTree>
   </p:cSld>
   <p:clrMapOvr>
@@ -12198,26 +12575,31 @@
           <a:noFill/>
         </p:spPr>
         <p:txBody>
-          <a:bodyPr wrap="square"/>
-          <a:lstStyle/>
-          <a:p>
-            <a:pPr algn="l">
-              <a:defRPr sz="2800" b="1">
-                <a:solidFill>
-                  <a:srgbClr val="000000"/>
-                </a:solidFill>
-                <a:latin typeface="微软雅黑" panose="020B0503020204020204" charset="-122"/>
-              </a:defRPr>
-            </a:pPr>
-            <a:r>
-              <a:t>实验阶段路线图</a:t>
-            </a:r>
-          </a:p>
-        </p:txBody>
-      </p:sp>
-      <p:sp>
-        <p:nvSpPr>
-          <p:cNvPr id="19" name="Rectangle 18"/>
+          <a:bodyPr wrap="none" lIns="0" tIns="0" rIns="0" bIns="0">
+            <a:spAutoFit/>
+          </a:bodyPr>
+          <a:lstStyle/>
+          <a:p>
+            <a:r>
+              <a:rPr sz="2400" b="1">
+                <a:solidFill>
+                  <a:srgbClr val="1E293B"/>
+                </a:solidFill>
+              </a:rPr>
+              <a:t>数据组织机制三：prefix-aware 为缓存命中创造条件</a:t>
+            </a:r>
+            <a:endParaRPr sz="2400" b="1">
+              <a:solidFill>
+                <a:srgbClr val="1E293B"/>
+              </a:solidFill>
+              <a:latin typeface="微软雅黑" panose="020B0503020204020204" charset="-122"/>
+            </a:endParaRPr>
+          </a:p>
+        </p:txBody>
+      </p:sp>
+      <p:sp>
+        <p:nvSpPr>
+          <p:cNvPr id="6" name="Rectangle 5"/>
           <p:cNvSpPr/>
           <p:nvPr/>
         </p:nvSpPr>
@@ -12260,7 +12642,7 @@
       </p:sp>
       <p:sp>
         <p:nvSpPr>
-          <p:cNvPr id="20" name="TextBox 19"/>
+          <p:cNvPr id="7" name="TextBox 6"/>
           <p:cNvSpPr txBox="1"/>
           <p:nvPr/>
         </p:nvSpPr>
@@ -12275,10 +12657,12 @@
           <a:noFill/>
         </p:spPr>
         <p:txBody>
-          <a:bodyPr wrap="square" lIns="0" tIns="0" rIns="0" bIns="0" anchor="ctr"/>
-          <a:lstStyle/>
-          <a:p>
-            <a:pPr algn="l">
+          <a:bodyPr wrap="none" lIns="0" tIns="0" rIns="0" bIns="0" anchor="ctr">
+            <a:spAutoFit/>
+          </a:bodyPr>
+          <a:lstStyle/>
+          <a:p>
+            <a:pPr>
               <a:lnSpc>
                 <a:spcPct val="100000"/>
               </a:lnSpc>
@@ -12288,926 +12672,48 @@
               <a:spcAft>
                 <a:spcPts val="0"/>
               </a:spcAft>
-              <a:defRPr sz="1100" b="1">
-                <a:solidFill>
-                  <a:srgbClr val="16A34A"/>
-                </a:solidFill>
-                <a:latin typeface="微软雅黑" panose="020B0503020204020204" charset="-122"/>
-              </a:defRPr>
-            </a:pPr>
-            <a:r>
-              <a:rPr sz="1250"/>
-              <a:t>前置条件已完成，后续四阶段每阶段有明确验证目标和反证条件。</a:t>
-            </a:r>
-            <a:endParaRPr sz="1250"/>
-          </a:p>
-        </p:txBody>
-      </p:sp>
-      <p:sp>
-        <p:nvSpPr>
-          <p:cNvPr id="21" name="Rectangle 20"/>
-          <p:cNvSpPr/>
+            </a:pPr>
+            <a:r>
+              <a:rPr sz="1300" b="0">
+                <a:solidFill>
+                  <a:srgbClr val="1E293B"/>
+                </a:solidFill>
+              </a:rPr>
+              <a:t>prefix 分组用于把共享 system prompt 的请求集中提交，创造 prefix locality；最终收益需看 vLLM prefix-cache 指标和端到端效果。</a:t>
+            </a:r>
+            <a:endParaRPr sz="1300" b="0">
+              <a:solidFill>
+                <a:srgbClr val="1E293B"/>
+              </a:solidFill>
+              <a:latin typeface="微软雅黑" panose="020B0503020204020204" charset="-122"/>
+            </a:endParaRPr>
+          </a:p>
+        </p:txBody>
+      </p:sp>
+      <p:pic>
+        <p:nvPicPr>
+          <p:cNvPr id="8" name="Picture 7" descr="image.png"/>
+          <p:cNvPicPr>
+            <a:picLocks noChangeAspect="1"/>
+          </p:cNvPicPr>
           <p:nvPr/>
-        </p:nvSpPr>
-        <p:spPr>
-          <a:xfrm>
-            <a:off x="731520" y="2500884"/>
-            <a:ext cx="10241280" cy="27432"/>
-          </a:xfrm>
-          <a:prstGeom prst="rect">
-            <a:avLst/>
-          </a:prstGeom>
-          <a:solidFill>
-            <a:srgbClr val="16A34A"/>
-          </a:solidFill>
-          <a:ln>
-            <a:noFill/>
-          </a:ln>
-        </p:spPr>
-        <p:style>
-          <a:lnRef idx="1">
-            <a:schemeClr val="accent1"/>
-          </a:lnRef>
-          <a:fillRef idx="3">
-            <a:schemeClr val="accent1"/>
-          </a:fillRef>
-          <a:effectRef idx="2">
-            <a:schemeClr val="accent1"/>
-          </a:effectRef>
-          <a:fontRef idx="minor">
-            <a:schemeClr val="lt1"/>
-          </a:fontRef>
-        </p:style>
-        <p:txBody>
-          <a:bodyPr rtlCol="0" anchor="ctr"/>
-          <a:lstStyle/>
-          <a:p>
-            <a:pPr algn="ctr"/>
-          </a:p>
-        </p:txBody>
-      </p:sp>
-      <p:sp>
-        <p:nvSpPr>
-          <p:cNvPr id="22" name="Oval 21"/>
-          <p:cNvSpPr/>
-          <p:nvPr/>
-        </p:nvSpPr>
-        <p:spPr>
-          <a:xfrm>
-            <a:off x="585216" y="2368296"/>
-            <a:ext cx="292608" cy="292608"/>
-          </a:xfrm>
-          <a:prstGeom prst="ellipse">
-            <a:avLst/>
-          </a:prstGeom>
-          <a:solidFill>
-            <a:srgbClr val="16A34A"/>
-          </a:solidFill>
-          <a:ln>
-            <a:noFill/>
-          </a:ln>
-        </p:spPr>
-        <p:style>
-          <a:lnRef idx="1">
-            <a:schemeClr val="accent1"/>
-          </a:lnRef>
-          <a:fillRef idx="3">
-            <a:schemeClr val="accent1"/>
-          </a:fillRef>
-          <a:effectRef idx="2">
-            <a:schemeClr val="accent1"/>
-          </a:effectRef>
-          <a:fontRef idx="minor">
-            <a:schemeClr val="lt1"/>
-          </a:fontRef>
-        </p:style>
-        <p:txBody>
-          <a:bodyPr rtlCol="0" anchor="ctr"/>
-          <a:lstStyle/>
-          <a:p>
-            <a:pPr algn="ctr"/>
-          </a:p>
-        </p:txBody>
-      </p:sp>
-      <p:sp>
-        <p:nvSpPr>
-          <p:cNvPr id="23" name="TextBox 22"/>
-          <p:cNvSpPr txBox="1"/>
-          <p:nvPr/>
-        </p:nvSpPr>
-        <p:spPr>
-          <a:xfrm>
-            <a:off x="91440" y="1828800"/>
-            <a:ext cx="1280160" cy="365760"/>
-          </a:xfrm>
-          <a:prstGeom prst="rect">
-            <a:avLst/>
-          </a:prstGeom>
-          <a:noFill/>
-        </p:spPr>
-        <p:txBody>
-          <a:bodyPr wrap="none">
-            <a:spAutoFit/>
-          </a:bodyPr>
-          <a:lstStyle/>
-          <a:p>
-            <a:pPr algn="ctr">
-              <a:defRPr sz="1200" b="1">
-                <a:solidFill>
-                  <a:srgbClr val="16A34A"/>
-                </a:solidFill>
-                <a:latin typeface="微软雅黑" panose="020B0503020204020204" charset="-122"/>
-              </a:defRPr>
-            </a:pPr>
-            <a:r>
-              <a:t>前置阶段</a:t>
-            </a:r>
-          </a:p>
-        </p:txBody>
-      </p:sp>
-      <p:sp>
-        <p:nvSpPr>
-          <p:cNvPr id="24" name="TextBox 23"/>
-          <p:cNvSpPr txBox="1"/>
-          <p:nvPr/>
-        </p:nvSpPr>
-        <p:spPr>
-          <a:xfrm>
-            <a:off x="137160" y="2834640"/>
-            <a:ext cx="1188720" cy="2560320"/>
-          </a:xfrm>
-          <a:prstGeom prst="rect">
-            <a:avLst/>
-          </a:prstGeom>
-          <a:noFill/>
-        </p:spPr>
-        <p:txBody>
-          <a:bodyPr wrap="square">
-            <a:spAutoFit/>
-          </a:bodyPr>
-          <a:lstStyle/>
-          <a:p>
-            <a:pPr algn="ctr">
-              <a:defRPr sz="1000" b="1">
-                <a:solidFill>
-                  <a:srgbClr val="16A34A"/>
-                </a:solidFill>
-                <a:latin typeface="微软雅黑" panose="020B0503020204020204" charset="-122"/>
-              </a:defRPr>
-            </a:pPr>
-            <a:r>
-              <a:t>vLLM baseline</a:t>
-            </a:r>
-          </a:p>
-          <a:p>
-            <a:pPr algn="ctr">
-              <a:defRPr sz="1000">
-                <a:solidFill>
-                  <a:srgbClr val="000000"/>
-                </a:solidFill>
-                <a:latin typeface="微软雅黑" panose="020B0503020204020204" charset="-122"/>
-              </a:defRPr>
-            </a:pPr>
-            <a:r>
-              <a:t>Daft接入 ✅</a:t>
-            </a:r>
-          </a:p>
-        </p:txBody>
-      </p:sp>
-      <p:sp>
-        <p:nvSpPr>
-          <p:cNvPr id="25" name="Oval 24"/>
-          <p:cNvSpPr/>
-          <p:nvPr/>
-        </p:nvSpPr>
-        <p:spPr>
-          <a:xfrm>
-            <a:off x="3145535" y="2368296"/>
-            <a:ext cx="292608" cy="292608"/>
-          </a:xfrm>
-          <a:prstGeom prst="ellipse">
-            <a:avLst/>
-          </a:prstGeom>
-          <a:solidFill>
-            <a:srgbClr val="16A34A"/>
-          </a:solidFill>
-          <a:ln>
-            <a:noFill/>
-          </a:ln>
-        </p:spPr>
-        <p:style>
-          <a:lnRef idx="1">
-            <a:schemeClr val="accent1"/>
-          </a:lnRef>
-          <a:fillRef idx="3">
-            <a:schemeClr val="accent1"/>
-          </a:fillRef>
-          <a:effectRef idx="2">
-            <a:schemeClr val="accent1"/>
-          </a:effectRef>
-          <a:fontRef idx="minor">
-            <a:schemeClr val="lt1"/>
-          </a:fontRef>
-        </p:style>
-        <p:txBody>
-          <a:bodyPr rtlCol="0" anchor="ctr"/>
-          <a:lstStyle/>
-          <a:p>
-            <a:pPr algn="ctr"/>
-          </a:p>
-        </p:txBody>
-      </p:sp>
-      <p:sp>
-        <p:nvSpPr>
-          <p:cNvPr id="26" name="TextBox 25"/>
-          <p:cNvSpPr txBox="1"/>
-          <p:nvPr/>
-        </p:nvSpPr>
-        <p:spPr>
-          <a:xfrm>
-            <a:off x="2651759" y="1828800"/>
-            <a:ext cx="1280160" cy="365760"/>
-          </a:xfrm>
-          <a:prstGeom prst="rect">
-            <a:avLst/>
-          </a:prstGeom>
-          <a:noFill/>
-        </p:spPr>
-        <p:txBody>
-          <a:bodyPr wrap="none">
-            <a:spAutoFit/>
-          </a:bodyPr>
-          <a:lstStyle/>
-          <a:p>
-            <a:pPr algn="ctr">
-              <a:defRPr sz="1200" b="1">
-                <a:solidFill>
-                  <a:srgbClr val="16A34A"/>
-                </a:solidFill>
-                <a:latin typeface="微软雅黑" panose="020B0503020204020204" charset="-122"/>
-              </a:defRPr>
-            </a:pPr>
-            <a:r>
-              <a:t>第一阶段</a:t>
-            </a:r>
-          </a:p>
-        </p:txBody>
-      </p:sp>
-      <p:sp>
-        <p:nvSpPr>
-          <p:cNvPr id="27" name="TextBox 26"/>
-          <p:cNvSpPr txBox="1"/>
-          <p:nvPr/>
-        </p:nvSpPr>
-        <p:spPr>
-          <a:xfrm>
-            <a:off x="2651759" y="2103120"/>
-            <a:ext cx="1280160" cy="228600"/>
-          </a:xfrm>
-          <a:prstGeom prst="rect">
-            <a:avLst/>
-          </a:prstGeom>
-          <a:noFill/>
-        </p:spPr>
-        <p:txBody>
-          <a:bodyPr wrap="none">
-            <a:spAutoFit/>
-          </a:bodyPr>
-          <a:lstStyle/>
-          <a:p>
-            <a:pPr algn="ctr">
-              <a:defRPr sz="1000">
-                <a:solidFill>
-                  <a:srgbClr val="6B7280"/>
-                </a:solidFill>
-                <a:latin typeface="微软雅黑" panose="020B0503020204020204" charset="-122"/>
-              </a:defRPr>
-            </a:pPr>
-            <a:r>
-              <a:t>8月</a:t>
-            </a:r>
-          </a:p>
-        </p:txBody>
-      </p:sp>
-      <p:sp>
-        <p:nvSpPr>
-          <p:cNvPr id="28" name="TextBox 27"/>
-          <p:cNvSpPr txBox="1"/>
-          <p:nvPr/>
-        </p:nvSpPr>
-        <p:spPr>
-          <a:xfrm>
-            <a:off x="2697479" y="2834640"/>
-            <a:ext cx="1188720" cy="2560320"/>
-          </a:xfrm>
-          <a:prstGeom prst="rect">
-            <a:avLst/>
-          </a:prstGeom>
-          <a:noFill/>
-        </p:spPr>
-        <p:txBody>
-          <a:bodyPr wrap="square">
-            <a:spAutoFit/>
-          </a:bodyPr>
-          <a:lstStyle/>
-          <a:p>
-            <a:pPr algn="ctr">
-              <a:defRPr sz="1000" b="1">
-                <a:solidFill>
-                  <a:srgbClr val="16A34A"/>
-                </a:solidFill>
-                <a:latin typeface="微软雅黑" panose="020B0503020204020204" charset="-122"/>
-              </a:defRPr>
-            </a:pPr>
-            <a:r>
-              <a:t>数据组织消融</a:t>
-            </a:r>
-          </a:p>
-          <a:p>
-            <a:pPr algn="ctr">
-              <a:defRPr sz="1000">
-                <a:solidFill>
-                  <a:srgbClr val="000000"/>
-                </a:solidFill>
-                <a:latin typeface="微软雅黑" panose="020B0503020204020204" charset="-122"/>
-              </a:defRPr>
-            </a:pPr>
-            <a:r>
-              <a:t>Token-budget</a:t>
-            </a:r>
-          </a:p>
-          <a:p>
-            <a:pPr algn="ctr">
-              <a:defRPr sz="1000">
-                <a:solidFill>
-                  <a:srgbClr val="000000"/>
-                </a:solidFill>
-                <a:latin typeface="微软雅黑" panose="020B0503020204020204" charset="-122"/>
-              </a:defRPr>
-            </a:pPr>
-            <a:r>
-              <a:t>Length-align</a:t>
-            </a:r>
-          </a:p>
-          <a:p>
-            <a:pPr algn="ctr">
-              <a:defRPr sz="1000">
-                <a:solidFill>
-                  <a:srgbClr val="000000"/>
-                </a:solidFill>
-                <a:latin typeface="微软雅黑" panose="020B0503020204020204" charset="-122"/>
-              </a:defRPr>
-            </a:pPr>
-            <a:r>
-              <a:t>Prefix-aware</a:t>
-            </a:r>
-          </a:p>
-        </p:txBody>
-      </p:sp>
-      <p:sp>
-        <p:nvSpPr>
-          <p:cNvPr id="29" name="Oval 28"/>
-          <p:cNvSpPr/>
-          <p:nvPr/>
-        </p:nvSpPr>
-        <p:spPr>
-          <a:xfrm>
-            <a:off x="5705855" y="2368296"/>
-            <a:ext cx="292608" cy="292608"/>
-          </a:xfrm>
-          <a:prstGeom prst="ellipse">
-            <a:avLst/>
-          </a:prstGeom>
-          <a:solidFill>
-            <a:srgbClr val="16A34A"/>
-          </a:solidFill>
-          <a:ln>
-            <a:noFill/>
-          </a:ln>
-        </p:spPr>
-        <p:style>
-          <a:lnRef idx="1">
-            <a:schemeClr val="accent1"/>
-          </a:lnRef>
-          <a:fillRef idx="3">
-            <a:schemeClr val="accent1"/>
-          </a:fillRef>
-          <a:effectRef idx="2">
-            <a:schemeClr val="accent1"/>
-          </a:effectRef>
-          <a:fontRef idx="minor">
-            <a:schemeClr val="lt1"/>
-          </a:fontRef>
-        </p:style>
-        <p:txBody>
-          <a:bodyPr rtlCol="0" anchor="ctr"/>
-          <a:lstStyle/>
-          <a:p>
-            <a:pPr algn="ctr"/>
-          </a:p>
-        </p:txBody>
-      </p:sp>
-      <p:sp>
-        <p:nvSpPr>
-          <p:cNvPr id="30" name="TextBox 29"/>
-          <p:cNvSpPr txBox="1"/>
-          <p:nvPr/>
-        </p:nvSpPr>
-        <p:spPr>
-          <a:xfrm>
-            <a:off x="5212079" y="1828800"/>
-            <a:ext cx="1280160" cy="365760"/>
-          </a:xfrm>
-          <a:prstGeom prst="rect">
-            <a:avLst/>
-          </a:prstGeom>
-          <a:noFill/>
-        </p:spPr>
-        <p:txBody>
-          <a:bodyPr wrap="none">
-            <a:spAutoFit/>
-          </a:bodyPr>
-          <a:lstStyle/>
-          <a:p>
-            <a:pPr algn="ctr">
-              <a:defRPr sz="1200" b="1">
-                <a:solidFill>
-                  <a:srgbClr val="16A34A"/>
-                </a:solidFill>
-                <a:latin typeface="微软雅黑" panose="020B0503020204020204" charset="-122"/>
-              </a:defRPr>
-            </a:pPr>
-            <a:r>
-              <a:t>第二阶段</a:t>
-            </a:r>
-          </a:p>
-        </p:txBody>
-      </p:sp>
-      <p:sp>
-        <p:nvSpPr>
-          <p:cNvPr id="31" name="TextBox 30"/>
-          <p:cNvSpPr txBox="1"/>
-          <p:nvPr/>
-        </p:nvSpPr>
-        <p:spPr>
-          <a:xfrm>
-            <a:off x="5212079" y="2103120"/>
-            <a:ext cx="1280160" cy="228600"/>
-          </a:xfrm>
-          <a:prstGeom prst="rect">
-            <a:avLst/>
-          </a:prstGeom>
-          <a:noFill/>
-        </p:spPr>
-        <p:txBody>
-          <a:bodyPr wrap="none">
-            <a:spAutoFit/>
-          </a:bodyPr>
-          <a:lstStyle/>
-          <a:p>
-            <a:pPr algn="ctr">
-              <a:defRPr sz="1000">
-                <a:solidFill>
-                  <a:srgbClr val="6B7280"/>
-                </a:solidFill>
-                <a:latin typeface="微软雅黑" panose="020B0503020204020204" charset="-122"/>
-              </a:defRPr>
-            </a:pPr>
-            <a:r>
-              <a:t>9月</a:t>
-            </a:r>
-          </a:p>
-        </p:txBody>
-      </p:sp>
-      <p:sp>
-        <p:nvSpPr>
-          <p:cNvPr id="32" name="TextBox 31"/>
-          <p:cNvSpPr txBox="1"/>
-          <p:nvPr/>
-        </p:nvSpPr>
-        <p:spPr>
-          <a:xfrm>
-            <a:off x="5257799" y="2834640"/>
-            <a:ext cx="1188720" cy="2560320"/>
-          </a:xfrm>
-          <a:prstGeom prst="rect">
-            <a:avLst/>
-          </a:prstGeom>
-          <a:noFill/>
-        </p:spPr>
-        <p:txBody>
-          <a:bodyPr wrap="square">
-            <a:spAutoFit/>
-          </a:bodyPr>
-          <a:lstStyle/>
-          <a:p>
-            <a:pPr algn="ctr">
-              <a:defRPr sz="1000" b="1">
-                <a:solidFill>
-                  <a:srgbClr val="16A34A"/>
-                </a:solidFill>
-                <a:latin typeface="微软雅黑" panose="020B0503020204020204" charset="-122"/>
-              </a:defRPr>
-            </a:pPr>
-            <a:r>
-              <a:t>提交控制消融</a:t>
-            </a:r>
-          </a:p>
-          <a:p>
-            <a:pPr algn="ctr">
-              <a:defRPr sz="1000">
-                <a:solidFill>
-                  <a:srgbClr val="000000"/>
-                </a:solidFill>
-                <a:latin typeface="微软雅黑" panose="020B0503020204020204" charset="-122"/>
-              </a:defRPr>
-            </a:pPr>
-            <a:r>
-              <a:t>Queue-adaptive</a:t>
-            </a:r>
-          </a:p>
-          <a:p>
-            <a:pPr algn="ctr">
-              <a:defRPr sz="1000">
-                <a:solidFill>
-                  <a:srgbClr val="000000"/>
-                </a:solidFill>
-                <a:latin typeface="微软雅黑" panose="020B0503020204020204" charset="-122"/>
-              </a:defRPr>
-            </a:pPr>
-            <a:r>
-              <a:t>K_max动态</a:t>
-            </a:r>
-          </a:p>
-          <a:p>
-            <a:pPr algn="ctr">
-              <a:defRPr sz="1000">
-                <a:solidFill>
-                  <a:srgbClr val="000000"/>
-                </a:solidFill>
-                <a:latin typeface="微软雅黑" panose="020B0503020204020204" charset="-122"/>
-              </a:defRPr>
-            </a:pPr>
-            <a:r>
-              <a:t>Pool路由</a:t>
-            </a:r>
-          </a:p>
-        </p:txBody>
-      </p:sp>
-      <p:sp>
-        <p:nvSpPr>
-          <p:cNvPr id="33" name="Oval 32"/>
-          <p:cNvSpPr/>
-          <p:nvPr/>
-        </p:nvSpPr>
-        <p:spPr>
-          <a:xfrm>
-            <a:off x="8266175" y="2368296"/>
-            <a:ext cx="292608" cy="292608"/>
-          </a:xfrm>
-          <a:prstGeom prst="ellipse">
-            <a:avLst/>
-          </a:prstGeom>
-          <a:solidFill>
-            <a:srgbClr val="16A34A"/>
-          </a:solidFill>
-          <a:ln>
-            <a:noFill/>
-          </a:ln>
-        </p:spPr>
-        <p:style>
-          <a:lnRef idx="1">
-            <a:schemeClr val="accent1"/>
-          </a:lnRef>
-          <a:fillRef idx="3">
-            <a:schemeClr val="accent1"/>
-          </a:fillRef>
-          <a:effectRef idx="2">
-            <a:schemeClr val="accent1"/>
-          </a:effectRef>
-          <a:fontRef idx="minor">
-            <a:schemeClr val="lt1"/>
-          </a:fontRef>
-        </p:style>
-        <p:txBody>
-          <a:bodyPr rtlCol="0" anchor="ctr"/>
-          <a:lstStyle/>
-          <a:p>
-            <a:pPr algn="ctr"/>
-          </a:p>
-        </p:txBody>
-      </p:sp>
-      <p:sp>
-        <p:nvSpPr>
-          <p:cNvPr id="34" name="TextBox 33"/>
-          <p:cNvSpPr txBox="1"/>
-          <p:nvPr/>
-        </p:nvSpPr>
-        <p:spPr>
-          <a:xfrm>
-            <a:off x="7772400" y="1828800"/>
-            <a:ext cx="1280160" cy="365760"/>
-          </a:xfrm>
-          <a:prstGeom prst="rect">
-            <a:avLst/>
-          </a:prstGeom>
-          <a:noFill/>
-        </p:spPr>
-        <p:txBody>
-          <a:bodyPr wrap="none">
-            <a:spAutoFit/>
-          </a:bodyPr>
-          <a:lstStyle/>
-          <a:p>
-            <a:pPr algn="ctr">
-              <a:defRPr sz="1200" b="1">
-                <a:solidFill>
-                  <a:srgbClr val="16A34A"/>
-                </a:solidFill>
-                <a:latin typeface="微软雅黑" panose="020B0503020204020204" charset="-122"/>
-              </a:defRPr>
-            </a:pPr>
-            <a:r>
-              <a:t>第三阶段</a:t>
-            </a:r>
-          </a:p>
-        </p:txBody>
-      </p:sp>
-      <p:sp>
-        <p:nvSpPr>
-          <p:cNvPr id="35" name="TextBox 34"/>
-          <p:cNvSpPr txBox="1"/>
-          <p:nvPr/>
-        </p:nvSpPr>
-        <p:spPr>
-          <a:xfrm>
-            <a:off x="7772400" y="2103120"/>
-            <a:ext cx="1280160" cy="228600"/>
-          </a:xfrm>
-          <a:prstGeom prst="rect">
-            <a:avLst/>
-          </a:prstGeom>
-          <a:noFill/>
-        </p:spPr>
-        <p:txBody>
-          <a:bodyPr wrap="none">
-            <a:spAutoFit/>
-          </a:bodyPr>
-          <a:lstStyle/>
-          <a:p>
-            <a:pPr algn="ctr">
-              <a:defRPr sz="1000">
-                <a:solidFill>
-                  <a:srgbClr val="6B7280"/>
-                </a:solidFill>
-                <a:latin typeface="微软雅黑" panose="020B0503020204020204" charset="-122"/>
-              </a:defRPr>
-            </a:pPr>
-            <a:r>
-              <a:t>9-10月</a:t>
-            </a:r>
-          </a:p>
-        </p:txBody>
-      </p:sp>
-      <p:sp>
-        <p:nvSpPr>
-          <p:cNvPr id="36" name="TextBox 35"/>
-          <p:cNvSpPr txBox="1"/>
-          <p:nvPr/>
-        </p:nvSpPr>
-        <p:spPr>
-          <a:xfrm>
-            <a:off x="7818119" y="2834640"/>
-            <a:ext cx="1188720" cy="2560320"/>
-          </a:xfrm>
-          <a:prstGeom prst="rect">
-            <a:avLst/>
-          </a:prstGeom>
-          <a:noFill/>
-        </p:spPr>
-        <p:txBody>
-          <a:bodyPr wrap="square">
-            <a:spAutoFit/>
-          </a:bodyPr>
-          <a:lstStyle/>
-          <a:p>
-            <a:pPr algn="ctr">
-              <a:defRPr sz="1000" b="1">
-                <a:solidFill>
-                  <a:srgbClr val="16A34A"/>
-                </a:solidFill>
-                <a:latin typeface="微软雅黑" panose="020B0503020204020204" charset="-122"/>
-              </a:defRPr>
-            </a:pPr>
-            <a:r>
-              <a:t>耦合验证</a:t>
-            </a:r>
-          </a:p>
-          <a:p>
-            <a:pPr algn="ctr">
-              <a:defRPr sz="1000">
-                <a:solidFill>
-                  <a:srgbClr val="000000"/>
-                </a:solidFill>
-                <a:latin typeface="微软雅黑" panose="020B0503020204020204" charset="-122"/>
-              </a:defRPr>
-            </a:pPr>
-            <a:r>
-              <a:t>独立拼接 vs</a:t>
-            </a:r>
-          </a:p>
-          <a:p>
-            <a:pPr algn="ctr">
-              <a:defRPr sz="1000">
-                <a:solidFill>
-                  <a:srgbClr val="000000"/>
-                </a:solidFill>
-                <a:latin typeface="微软雅黑" panose="020B0503020204020204" charset="-122"/>
-              </a:defRPr>
-            </a:pPr>
-            <a:r>
-              <a:t>联合grid search</a:t>
-            </a:r>
-          </a:p>
-        </p:txBody>
-      </p:sp>
-      <p:sp>
-        <p:nvSpPr>
-          <p:cNvPr id="37" name="Oval 36"/>
-          <p:cNvSpPr/>
-          <p:nvPr/>
-        </p:nvSpPr>
-        <p:spPr>
-          <a:xfrm>
-            <a:off x="10826496" y="2368296"/>
-            <a:ext cx="292608" cy="292608"/>
-          </a:xfrm>
-          <a:prstGeom prst="ellipse">
-            <a:avLst/>
-          </a:prstGeom>
-          <a:solidFill>
-            <a:srgbClr val="16A34A"/>
-          </a:solidFill>
-          <a:ln>
-            <a:noFill/>
-          </a:ln>
-        </p:spPr>
-        <p:style>
-          <a:lnRef idx="1">
-            <a:schemeClr val="accent1"/>
-          </a:lnRef>
-          <a:fillRef idx="3">
-            <a:schemeClr val="accent1"/>
-          </a:fillRef>
-          <a:effectRef idx="2">
-            <a:schemeClr val="accent1"/>
-          </a:effectRef>
-          <a:fontRef idx="minor">
-            <a:schemeClr val="lt1"/>
-          </a:fontRef>
-        </p:style>
-        <p:txBody>
-          <a:bodyPr rtlCol="0" anchor="ctr"/>
-          <a:lstStyle/>
-          <a:p>
-            <a:pPr algn="ctr"/>
-          </a:p>
-        </p:txBody>
-      </p:sp>
-      <p:sp>
-        <p:nvSpPr>
-          <p:cNvPr id="38" name="TextBox 37"/>
-          <p:cNvSpPr txBox="1"/>
-          <p:nvPr/>
-        </p:nvSpPr>
-        <p:spPr>
-          <a:xfrm>
-            <a:off x="10332720" y="1828800"/>
-            <a:ext cx="1280160" cy="365760"/>
-          </a:xfrm>
-          <a:prstGeom prst="rect">
-            <a:avLst/>
-          </a:prstGeom>
-          <a:noFill/>
-        </p:spPr>
-        <p:txBody>
-          <a:bodyPr wrap="none">
-            <a:spAutoFit/>
-          </a:bodyPr>
-          <a:lstStyle/>
-          <a:p>
-            <a:pPr algn="ctr">
-              <a:defRPr sz="1200" b="1">
-                <a:solidFill>
-                  <a:srgbClr val="16A34A"/>
-                </a:solidFill>
-                <a:latin typeface="微软雅黑" panose="020B0503020204020204" charset="-122"/>
-              </a:defRPr>
-            </a:pPr>
-            <a:r>
-              <a:t>第四阶段</a:t>
-            </a:r>
-          </a:p>
-        </p:txBody>
-      </p:sp>
-      <p:sp>
-        <p:nvSpPr>
-          <p:cNvPr id="39" name="TextBox 38"/>
-          <p:cNvSpPr txBox="1"/>
-          <p:nvPr/>
-        </p:nvSpPr>
-        <p:spPr>
-          <a:xfrm>
-            <a:off x="10332720" y="2103120"/>
-            <a:ext cx="1280160" cy="228600"/>
-          </a:xfrm>
-          <a:prstGeom prst="rect">
-            <a:avLst/>
-          </a:prstGeom>
-          <a:noFill/>
-        </p:spPr>
-        <p:txBody>
-          <a:bodyPr wrap="none">
-            <a:spAutoFit/>
-          </a:bodyPr>
-          <a:lstStyle/>
-          <a:p>
-            <a:pPr algn="ctr">
-              <a:defRPr sz="1000">
-                <a:solidFill>
-                  <a:srgbClr val="6B7280"/>
-                </a:solidFill>
-                <a:latin typeface="微软雅黑" panose="020B0503020204020204" charset="-122"/>
-              </a:defRPr>
-            </a:pPr>
-            <a:r>
-              <a:t>10月</a:t>
-            </a:r>
-          </a:p>
-        </p:txBody>
-      </p:sp>
-      <p:sp>
-        <p:nvSpPr>
-          <p:cNvPr id="40" name="TextBox 39"/>
-          <p:cNvSpPr txBox="1"/>
-          <p:nvPr/>
-        </p:nvSpPr>
-        <p:spPr>
-          <a:xfrm>
-            <a:off x="10378440" y="2834640"/>
-            <a:ext cx="1188720" cy="2560320"/>
-          </a:xfrm>
-          <a:prstGeom prst="rect">
-            <a:avLst/>
-          </a:prstGeom>
-          <a:noFill/>
-        </p:spPr>
-        <p:txBody>
-          <a:bodyPr wrap="square">
-            <a:spAutoFit/>
-          </a:bodyPr>
-          <a:lstStyle/>
-          <a:p>
-            <a:pPr algn="ctr">
-              <a:defRPr sz="1000" b="1">
-                <a:solidFill>
-                  <a:srgbClr val="16A34A"/>
-                </a:solidFill>
-                <a:latin typeface="微软雅黑" panose="020B0503020204020204" charset="-122"/>
-              </a:defRPr>
-            </a:pPr>
-            <a:r>
-              <a:t>写回判定</a:t>
-            </a:r>
-          </a:p>
-          <a:p>
-            <a:pPr algn="ctr">
-              <a:defRPr sz="1000">
-                <a:solidFill>
-                  <a:srgbClr val="000000"/>
-                </a:solidFill>
-                <a:latin typeface="微软雅黑" panose="020B0503020204020204" charset="-122"/>
-              </a:defRPr>
-            </a:pPr>
-            <a:r>
-              <a:t>Sink对比</a:t>
-            </a:r>
-          </a:p>
-          <a:p>
-            <a:pPr algn="ctr">
-              <a:defRPr sz="1000">
-                <a:solidFill>
-                  <a:srgbClr val="000000"/>
-                </a:solidFill>
-                <a:latin typeface="微软雅黑" panose="020B0503020204020204" charset="-122"/>
-              </a:defRPr>
-            </a:pPr>
-            <a:r>
-              <a:t>保护约束</a:t>
-            </a:r>
-          </a:p>
-        </p:txBody>
-      </p:sp>
+        </p:nvPicPr>
+        <p:blipFill>
+          <a:blip r:embed="rId1"/>
+          <a:stretch>
+            <a:fillRect/>
+          </a:stretch>
+        </p:blipFill>
+        <p:spPr>
+          <a:xfrm>
+            <a:off x="1116465" y="1840000"/>
+            <a:ext cx="9959069" cy="4040000"/>
+          </a:xfrm>
+          <a:prstGeom prst="rect">
+            <a:avLst/>
+          </a:prstGeom>
+        </p:spPr>
+      </p:pic>
     </p:spTree>
   </p:cSld>
   <p:clrMapOvr>
@@ -13595,6 +13101,49 @@
           </a:p>
         </p:txBody>
       </p:sp>
+      <p:sp>
+        <p:nvSpPr>
+          <p:cNvPr id="3" name="Rectangle 5"/>
+          <p:cNvSpPr/>
+          <p:nvPr/>
+        </p:nvSpPr>
+        <p:spPr>
+          <a:xfrm>
+            <a:off x="658368" y="1945182"/>
+            <a:ext cx="50292" cy="307238"/>
+          </a:xfrm>
+          <a:prstGeom prst="rect">
+            <a:avLst/>
+          </a:prstGeom>
+          <a:solidFill>
+            <a:srgbClr val="1588C7"/>
+          </a:solidFill>
+          <a:ln>
+            <a:noFill/>
+          </a:ln>
+        </p:spPr>
+        <p:style>
+          <a:lnRef idx="1">
+            <a:schemeClr val="accent1"/>
+          </a:lnRef>
+          <a:fillRef idx="3">
+            <a:schemeClr val="accent1"/>
+          </a:fillRef>
+          <a:effectRef idx="2">
+            <a:schemeClr val="accent1"/>
+          </a:effectRef>
+          <a:fontRef idx="minor">
+            <a:schemeClr val="lt1"/>
+          </a:fontRef>
+        </p:style>
+        <p:txBody>
+          <a:bodyPr rtlCol="0" anchor="ctr"/>
+          <a:lstStyle/>
+          <a:p>
+            <a:pPr algn="ctr"/>
+          </a:p>
+        </p:txBody>
+      </p:sp>
     </p:spTree>
   </p:cSld>
   <p:clrMapOvr>
@@ -13615,301 +13164,14 @@
       <p:grpSpPr/>
       <p:sp>
         <p:nvSpPr>
-          <p:cNvPr id="2" name="TextBox 1"/>
-          <p:cNvSpPr txBox="1"/>
-          <p:nvPr/>
-        </p:nvSpPr>
-        <p:spPr>
-          <a:xfrm>
-            <a:off x="685800" y="804672"/>
-            <a:ext cx="10972800" cy="502920"/>
-          </a:xfrm>
-          <a:prstGeom prst="rect">
-            <a:avLst/>
-          </a:prstGeom>
-          <a:noFill/>
-        </p:spPr>
-        <p:txBody>
-          <a:bodyPr wrap="none" lIns="0" tIns="0" rIns="0" bIns="0">
-            <a:spAutoFit/>
-          </a:bodyPr>
-          <a:lstStyle/>
-          <a:p>
-            <a:pPr algn="ctr"/>
-            <a:r>
-              <a:rPr sz="2700" b="1">
-                <a:solidFill>
-                  <a:srgbClr val="172033"/>
-                </a:solidFill>
-                <a:latin typeface="微软雅黑" panose="020B0503020204020204" charset="-122"/>
-              </a:rPr>
-              <a:t>目录</a:t>
-            </a:r>
-            <a:endParaRPr sz="2700" b="1">
-              <a:solidFill>
-                <a:srgbClr val="172033"/>
-              </a:solidFill>
-              <a:latin typeface="微软雅黑" panose="020B0503020204020204" charset="-122"/>
-            </a:endParaRPr>
-          </a:p>
-        </p:txBody>
-      </p:sp>
-      <p:sp>
-        <p:nvSpPr>
-          <p:cNvPr id="4" name="TextBox 3"/>
-          <p:cNvSpPr txBox="1"/>
-          <p:nvPr/>
-        </p:nvSpPr>
-        <p:spPr>
-          <a:xfrm>
-            <a:off x="1078992" y="1965960"/>
-            <a:ext cx="512064" cy="384048"/>
-          </a:xfrm>
-          <a:prstGeom prst="rect">
-            <a:avLst/>
-          </a:prstGeom>
-          <a:noFill/>
-        </p:spPr>
-        <p:txBody>
-          <a:bodyPr wrap="none" lIns="0" tIns="0" rIns="0" bIns="0">
-            <a:spAutoFit/>
-          </a:bodyPr>
-          <a:lstStyle/>
-          <a:p>
-            <a:pPr algn="r"/>
-            <a:r>
-              <a:rPr sz="1900" b="1">
-                <a:solidFill>
-                  <a:srgbClr val="526078"/>
-                </a:solidFill>
-                <a:latin typeface="Arial" panose="020B0604020202020204"/>
-              </a:rPr>
-              <a:t>01</a:t>
-            </a:r>
-            <a:endParaRPr sz="1900" b="1">
-              <a:solidFill>
-                <a:srgbClr val="526078"/>
-              </a:solidFill>
-              <a:latin typeface="Arial" panose="020B0604020202020204"/>
-            </a:endParaRPr>
-          </a:p>
-        </p:txBody>
-      </p:sp>
-      <p:sp>
-        <p:nvSpPr>
-          <p:cNvPr id="5" name="TextBox 4"/>
-          <p:cNvSpPr txBox="1"/>
-          <p:nvPr/>
-        </p:nvSpPr>
-        <p:spPr>
-          <a:xfrm>
-            <a:off x="1783080" y="1965960"/>
-            <a:ext cx="5303520" cy="384048"/>
-          </a:xfrm>
-          <a:prstGeom prst="rect">
-            <a:avLst/>
-          </a:prstGeom>
-          <a:noFill/>
-        </p:spPr>
-        <p:txBody>
-          <a:bodyPr wrap="none" lIns="0" tIns="0" rIns="0" bIns="0">
-            <a:spAutoFit/>
-          </a:bodyPr>
-          <a:lstStyle/>
-          <a:p>
-            <a:pPr algn="l"/>
-            <a:r>
-              <a:rPr sz="1900" b="0">
-                <a:solidFill>
-                  <a:srgbClr val="2C3443"/>
-                </a:solidFill>
-                <a:latin typeface="微软雅黑" panose="020B0503020204020204" charset="-122"/>
-              </a:rPr>
-              <a:t>研究背景与问题</a:t>
-            </a:r>
-            <a:endParaRPr sz="1900" b="0">
-              <a:solidFill>
-                <a:srgbClr val="2C3443"/>
-              </a:solidFill>
-              <a:latin typeface="微软雅黑" panose="020B0503020204020204" charset="-122"/>
-            </a:endParaRPr>
-          </a:p>
-        </p:txBody>
-      </p:sp>
-      <p:sp>
-        <p:nvSpPr>
-          <p:cNvPr id="6" name="TextBox 5"/>
-          <p:cNvSpPr txBox="1"/>
-          <p:nvPr/>
-        </p:nvSpPr>
-        <p:spPr>
-          <a:xfrm>
-            <a:off x="1078992" y="2624328"/>
-            <a:ext cx="512064" cy="384048"/>
-          </a:xfrm>
-          <a:prstGeom prst="rect">
-            <a:avLst/>
-          </a:prstGeom>
-          <a:noFill/>
-        </p:spPr>
-        <p:txBody>
-          <a:bodyPr wrap="none" lIns="0" tIns="0" rIns="0" bIns="0">
-            <a:spAutoFit/>
-          </a:bodyPr>
-          <a:lstStyle/>
-          <a:p>
-            <a:pPr algn="r"/>
-            <a:r>
-              <a:rPr sz="1900" b="1">
-                <a:solidFill>
-                  <a:srgbClr val="526078"/>
-                </a:solidFill>
-                <a:latin typeface="Arial" panose="020B0604020202020204"/>
-              </a:rPr>
-              <a:t>02</a:t>
-            </a:r>
-            <a:endParaRPr sz="1900" b="1">
-              <a:solidFill>
-                <a:srgbClr val="526078"/>
-              </a:solidFill>
-              <a:latin typeface="Arial" panose="020B0604020202020204"/>
-            </a:endParaRPr>
-          </a:p>
-        </p:txBody>
-      </p:sp>
-      <p:sp>
-        <p:nvSpPr>
-          <p:cNvPr id="7" name="TextBox 6"/>
-          <p:cNvSpPr txBox="1"/>
-          <p:nvPr/>
-        </p:nvSpPr>
-        <p:spPr>
-          <a:xfrm>
-            <a:off x="1783080" y="2624328"/>
-            <a:ext cx="5303520" cy="384048"/>
-          </a:xfrm>
-          <a:prstGeom prst="rect">
-            <a:avLst/>
-          </a:prstGeom>
-          <a:noFill/>
-        </p:spPr>
-        <p:txBody>
-          <a:bodyPr wrap="none" lIns="0" tIns="0" rIns="0" bIns="0">
-            <a:spAutoFit/>
-          </a:bodyPr>
-          <a:lstStyle/>
-          <a:p>
-            <a:pPr algn="l"/>
-            <a:r>
-              <a:rPr sz="1900" b="0">
-                <a:solidFill>
-                  <a:srgbClr val="2C3443"/>
-                </a:solidFill>
-                <a:latin typeface="微软雅黑" panose="020B0503020204020204" charset="-122"/>
-              </a:rPr>
-              <a:t>预研基础与动机证据</a:t>
-            </a:r>
-            <a:endParaRPr sz="1900" b="0">
-              <a:solidFill>
-                <a:srgbClr val="2C3443"/>
-              </a:solidFill>
-              <a:latin typeface="微软雅黑" panose="020B0503020204020204" charset="-122"/>
-            </a:endParaRPr>
-          </a:p>
-        </p:txBody>
-      </p:sp>
-      <p:sp>
-        <p:nvSpPr>
-          <p:cNvPr id="8" name="TextBox 7"/>
-          <p:cNvSpPr txBox="1"/>
-          <p:nvPr/>
-        </p:nvSpPr>
-        <p:spPr>
-          <a:xfrm>
-            <a:off x="1078992" y="3282696"/>
-            <a:ext cx="512064" cy="384048"/>
-          </a:xfrm>
-          <a:prstGeom prst="rect">
-            <a:avLst/>
-          </a:prstGeom>
-          <a:noFill/>
-        </p:spPr>
-        <p:txBody>
-          <a:bodyPr wrap="none" lIns="0" tIns="0" rIns="0" bIns="0">
-            <a:spAutoFit/>
-          </a:bodyPr>
-          <a:lstStyle/>
-          <a:p>
-            <a:pPr algn="r"/>
-            <a:r>
-              <a:rPr sz="1900" b="1">
-                <a:solidFill>
-                  <a:srgbClr val="526078"/>
-                </a:solidFill>
-                <a:latin typeface="Arial" panose="020B0604020202020204"/>
-              </a:rPr>
-              <a:t>03</a:t>
-            </a:r>
-            <a:endParaRPr sz="1900" b="1">
-              <a:solidFill>
-                <a:srgbClr val="526078"/>
-              </a:solidFill>
-              <a:latin typeface="Arial" panose="020B0604020202020204"/>
-            </a:endParaRPr>
-          </a:p>
-        </p:txBody>
-      </p:sp>
-      <p:sp>
-        <p:nvSpPr>
-          <p:cNvPr id="9" name="TextBox 8"/>
-          <p:cNvSpPr txBox="1"/>
-          <p:nvPr/>
-        </p:nvSpPr>
-        <p:spPr>
-          <a:xfrm>
-            <a:off x="1783080" y="3282696"/>
-            <a:ext cx="5303520" cy="384048"/>
-          </a:xfrm>
-          <a:prstGeom prst="rect">
-            <a:avLst/>
-          </a:prstGeom>
-          <a:noFill/>
-        </p:spPr>
-        <p:txBody>
-          <a:bodyPr wrap="none" lIns="0" tIns="0" rIns="0" bIns="0">
-            <a:spAutoFit/>
-          </a:bodyPr>
-          <a:lstStyle/>
-          <a:p>
-            <a:pPr algn="l"/>
-            <a:r>
-              <a:rPr sz="1900" b="0">
-                <a:solidFill>
-                  <a:srgbClr val="2C3443"/>
-                </a:solidFill>
-                <a:latin typeface="微软雅黑" panose="020B0503020204020204" charset="-122"/>
-              </a:rPr>
-              <a:t>研究目标与内容</a:t>
-            </a:r>
-            <a:endParaRPr sz="1900" b="0">
-              <a:solidFill>
-                <a:srgbClr val="2C3443"/>
-              </a:solidFill>
-              <a:latin typeface="微软雅黑" panose="020B0503020204020204" charset="-122"/>
-            </a:endParaRPr>
-          </a:p>
-        </p:txBody>
-      </p:sp>
-      <p:sp>
-        <p:nvSpPr>
-          <p:cNvPr id="10" name="Rectangle 9"/>
+          <p:cNvPr id="2" name="Rectangle 1"/>
           <p:cNvSpPr/>
           <p:nvPr/>
         </p:nvSpPr>
         <p:spPr>
           <a:xfrm>
-            <a:off x="658368" y="3979468"/>
-            <a:ext cx="50292" cy="307238"/>
+            <a:off x="548640" y="978408"/>
+            <a:ext cx="731520" cy="649224"/>
           </a:xfrm>
           <a:prstGeom prst="rect">
             <a:avLst/>
@@ -13936,23 +13198,33 @@
           </a:fontRef>
         </p:style>
         <p:txBody>
-          <a:bodyPr rtlCol="0" anchor="ctr"/>
-          <a:lstStyle/>
-          <a:p>
-            <a:pPr algn="ctr"/>
-          </a:p>
-        </p:txBody>
-      </p:sp>
-      <p:sp>
-        <p:nvSpPr>
-          <p:cNvPr id="11" name="TextBox 10"/>
+          <a:bodyPr wrap="none" rtlCol="0" anchor="ctr"/>
+          <a:lstStyle/>
+          <a:p>
+            <a:pPr algn="ctr">
+              <a:defRPr sz="3200" b="1">
+                <a:solidFill>
+                  <a:srgbClr val="FFFFFF"/>
+                </a:solidFill>
+                <a:latin typeface="微软雅黑" panose="020B0503020204020204" charset="-122"/>
+              </a:defRPr>
+            </a:pPr>
+            <a:r>
+              <a:t>03</a:t>
+            </a:r>
+          </a:p>
+        </p:txBody>
+      </p:sp>
+      <p:sp>
+        <p:nvSpPr>
+          <p:cNvPr id="3" name="TextBox 2"/>
           <p:cNvSpPr txBox="1"/>
           <p:nvPr/>
         </p:nvSpPr>
         <p:spPr>
           <a:xfrm>
-            <a:off x="1078992" y="3941064"/>
-            <a:ext cx="512064" cy="384048"/>
+            <a:off x="1508760" y="1024128"/>
+            <a:ext cx="9144000" cy="502920"/>
           </a:xfrm>
           <a:prstGeom prst="rect">
             <a:avLst/>
@@ -13960,71 +13232,222 @@
           <a:noFill/>
         </p:spPr>
         <p:txBody>
-          <a:bodyPr wrap="none" lIns="0" tIns="0" rIns="0" bIns="0">
-            <a:spAutoFit/>
-          </a:bodyPr>
-          <a:lstStyle/>
-          <a:p>
-            <a:pPr algn="r"/>
-            <a:r>
-              <a:rPr sz="1900" b="1">
-                <a:solidFill>
-                  <a:srgbClr val="1588C7"/>
-                </a:solidFill>
-                <a:latin typeface="Arial" panose="020B0604020202020204"/>
+          <a:bodyPr wrap="square"/>
+          <a:lstStyle/>
+          <a:p>
+            <a:r>
+              <a:rPr sz="2400" b="1">
+                <a:solidFill>
+                  <a:srgbClr val="172033"/>
+                </a:solidFill>
               </a:rPr>
-              <a:t>04</a:t>
-            </a:r>
-            <a:endParaRPr sz="1900" b="1">
-              <a:solidFill>
-                <a:srgbClr val="1588C7"/>
-              </a:solidFill>
-              <a:latin typeface="Arial" panose="020B0604020202020204"/>
-            </a:endParaRPr>
-          </a:p>
-        </p:txBody>
-      </p:sp>
-      <p:sp>
-        <p:nvSpPr>
-          <p:cNvPr id="12" name="TextBox 11"/>
-          <p:cNvSpPr txBox="1"/>
-          <p:nvPr/>
-        </p:nvSpPr>
-        <p:spPr>
-          <a:xfrm>
-            <a:off x="1783080" y="3941064"/>
-            <a:ext cx="5303520" cy="384048"/>
-          </a:xfrm>
-          <a:prstGeom prst="rect">
-            <a:avLst/>
-          </a:prstGeom>
-          <a:noFill/>
-        </p:spPr>
-        <p:txBody>
-          <a:bodyPr wrap="none" lIns="0" tIns="0" rIns="0" bIns="0">
-            <a:spAutoFit/>
-          </a:bodyPr>
-          <a:lstStyle/>
-          <a:p>
-            <a:pPr algn="l"/>
-            <a:r>
-              <a:rPr sz="1900" b="1">
-                <a:solidFill>
-                  <a:srgbClr val="172033"/>
-                </a:solidFill>
-                <a:latin typeface="微软雅黑" panose="020B0503020204020204" charset="-122"/>
-              </a:rPr>
-              <a:t>可行性与计划</a:t>
-            </a:r>
-            <a:endParaRPr sz="1900" b="1">
+              <a:t>研究内容二：面向服务状态的调度与提交控制策略</a:t>
+            </a:r>
+            <a:endParaRPr sz="2400" b="1">
               <a:solidFill>
                 <a:srgbClr val="172033"/>
               </a:solidFill>
-              <a:latin typeface="微软雅黑" panose="020B0503020204020204" charset="-122"/>
             </a:endParaRPr>
           </a:p>
         </p:txBody>
       </p:sp>
+      <p:sp>
+        <p:nvSpPr>
+          <p:cNvPr id="5" name="TextBox 4"/>
+          <p:cNvSpPr txBox="1"/>
+          <p:nvPr/>
+        </p:nvSpPr>
+        <p:spPr>
+          <a:xfrm>
+            <a:off x="118745" y="5229225"/>
+            <a:ext cx="11925935" cy="1021080"/>
+          </a:xfrm>
+          <a:prstGeom prst="rect">
+            <a:avLst/>
+          </a:prstGeom>
+          <a:noFill/>
+        </p:spPr>
+        <p:txBody>
+          <a:bodyPr wrap="square">
+            <a:noAutofit/>
+          </a:bodyPr>
+          <a:lstStyle/>
+          <a:p>
+            <a:r>
+              <a:rPr sz="1400">
+                <a:solidFill>
+                  <a:srgbClr val="1F4E79"/>
+                </a:solidFill>
+              </a:rPr>
+              <a:t>■ 问题：固定提交间隔或固定并发难以适配 vLLM 队列波动，容易在排队积压与 GPU 空闲之间摆动。</a:t>
+            </a:r>
+            <a:endParaRPr sz="1400">
+              <a:solidFill>
+                <a:srgbClr val="1F4E79"/>
+              </a:solidFill>
+            </a:endParaRPr>
+          </a:p>
+          <a:p>
+            <a:r>
+              <a:rPr sz="1400">
+                <a:solidFill>
+                  <a:srgbClr val="1F4E79"/>
+                </a:solidFill>
+              </a:rPr>
+              <a:t>■ 做法① Queue-adaptive flush：Ray actor 根据队列与在途请求信号决定何时提交。</a:t>
+            </a:r>
+            <a:endParaRPr sz="1400">
+              <a:solidFill>
+                <a:srgbClr val="1F4E79"/>
+              </a:solidFill>
+            </a:endParaRPr>
+          </a:p>
+          <a:p>
+            <a:r>
+              <a:rPr sz="1400">
+                <a:solidFill>
+                  <a:srgbClr val="1F4E79"/>
+                </a:solidFill>
+              </a:rPr>
+              <a:t>■ 做法② K_max 动态控制：根据排队压力和尾延迟信号调整在途请求上限。</a:t>
+            </a:r>
+            <a:endParaRPr sz="1400">
+              <a:solidFill>
+                <a:srgbClr val="1F4E79"/>
+              </a:solidFill>
+            </a:endParaRPr>
+          </a:p>
+          <a:p>
+            <a:r>
+              <a:rPr sz="1400">
+                <a:solidFill>
+                  <a:srgbClr val="1F4E79"/>
+                </a:solidFill>
+              </a:rPr>
+              <a:t>■ 做法③ Actor-pool routing：按请求长度、prefix 与服务端压力分配到不同 actor 池。</a:t>
+            </a:r>
+            <a:endParaRPr sz="1400">
+              <a:solidFill>
+                <a:srgbClr val="1F4E79"/>
+              </a:solidFill>
+            </a:endParaRPr>
+          </a:p>
+        </p:txBody>
+      </p:sp>
+      <p:sp>
+        <p:nvSpPr>
+          <p:cNvPr id="7" name="Rectangle 6"/>
+          <p:cNvSpPr/>
+          <p:nvPr/>
+        </p:nvSpPr>
+        <p:spPr>
+          <a:xfrm>
+            <a:off x="201168" y="6318504"/>
+            <a:ext cx="41148" cy="329184"/>
+          </a:xfrm>
+          <a:prstGeom prst="rect">
+            <a:avLst/>
+          </a:prstGeom>
+          <a:solidFill>
+            <a:srgbClr val="2F6FEB"/>
+          </a:solidFill>
+          <a:ln>
+            <a:noFill/>
+          </a:ln>
+        </p:spPr>
+        <p:style>
+          <a:lnRef idx="1">
+            <a:schemeClr val="accent1"/>
+          </a:lnRef>
+          <a:fillRef idx="3">
+            <a:schemeClr val="accent1"/>
+          </a:fillRef>
+          <a:effectRef idx="2">
+            <a:schemeClr val="accent1"/>
+          </a:effectRef>
+          <a:fontRef idx="minor">
+            <a:schemeClr val="lt1"/>
+          </a:fontRef>
+        </p:style>
+        <p:txBody>
+          <a:bodyPr rtlCol="0" anchor="ctr"/>
+          <a:lstStyle/>
+          <a:p>
+            <a:pPr algn="ctr"/>
+          </a:p>
+        </p:txBody>
+      </p:sp>
+      <p:sp>
+        <p:nvSpPr>
+          <p:cNvPr id="8" name="TextBox 7"/>
+          <p:cNvSpPr txBox="1"/>
+          <p:nvPr/>
+        </p:nvSpPr>
+        <p:spPr>
+          <a:xfrm>
+            <a:off x="411480" y="6318504"/>
+            <a:ext cx="11201400" cy="329184"/>
+          </a:xfrm>
+          <a:prstGeom prst="rect">
+            <a:avLst/>
+          </a:prstGeom>
+          <a:noFill/>
+        </p:spPr>
+        <p:txBody>
+          <a:bodyPr wrap="square" lIns="0" tIns="0" rIns="0" bIns="0" anchor="ctr"/>
+          <a:lstStyle/>
+          <a:p>
+            <a:pPr>
+              <a:lnSpc>
+                <a:spcPct val="100000"/>
+              </a:lnSpc>
+              <a:spcBef>
+                <a:spcPts val="0"/>
+              </a:spcBef>
+              <a:spcAft>
+                <a:spcPts val="0"/>
+              </a:spcAft>
+            </a:pPr>
+            <a:r>
+              <a:rPr sz="1250" b="1">
+                <a:solidFill>
+                  <a:srgbClr val="009650"/>
+                </a:solidFill>
+              </a:rPr>
+              <a:t>核心思路：利用 Ray actor 的状态记忆与异步执行能力，在不引入全局调度器的前提下实现自适应提交控制。</a:t>
+            </a:r>
+            <a:endParaRPr sz="1400" b="1">
+              <a:solidFill>
+                <a:srgbClr val="009650"/>
+              </a:solidFill>
+            </a:endParaRPr>
+          </a:p>
+        </p:txBody>
+      </p:sp>
+      <p:pic>
+        <p:nvPicPr>
+          <p:cNvPr id="6" name="图片 5"/>
+          <p:cNvPicPr>
+            <a:picLocks noChangeAspect="1"/>
+          </p:cNvPicPr>
+          <p:nvPr/>
+        </p:nvPicPr>
+        <p:blipFill>
+          <a:blip r:embed="rId1"/>
+          <a:stretch>
+            <a:fillRect/>
+          </a:stretch>
+        </p:blipFill>
+        <p:spPr>
+          <a:xfrm>
+            <a:off x="119380" y="1737360"/>
+            <a:ext cx="11925300" cy="2871470"/>
+          </a:xfrm>
+          <a:prstGeom prst="rect">
+            <a:avLst/>
+          </a:prstGeom>
+        </p:spPr>
+      </p:pic>
     </p:spTree>
   </p:cSld>
   <p:clrMapOvr>
@@ -14091,7 +13514,7 @@
               </a:defRPr>
             </a:pPr>
             <a:r>
-              <a:t>04</a:t>
+              <a:t>03</a:t>
             </a:r>
           </a:p>
         </p:txBody>
@@ -14125,7 +13548,7 @@
               </a:defRPr>
             </a:pPr>
             <a:r>
-              <a:t>可行性与创新点</a:t>
+              <a:t>耦合验证与实验设计</a:t>
             </a:r>
           </a:p>
         </p:txBody>
@@ -14139,41 +13562,7 @@
         <p:spPr>
           <a:xfrm>
             <a:off x="548640" y="1920240"/>
-            <a:ext cx="5303520" cy="320040"/>
-          </a:xfrm>
-          <a:prstGeom prst="rect">
-            <a:avLst/>
-          </a:prstGeom>
-          <a:noFill/>
-        </p:spPr>
-        <p:txBody>
-          <a:bodyPr wrap="square"/>
-          <a:lstStyle/>
-          <a:p>
-            <a:pPr algn="l">
-              <a:defRPr sz="1600" b="1">
-                <a:solidFill>
-                  <a:srgbClr val="7C3AED"/>
-                </a:solidFill>
-                <a:latin typeface="微软雅黑" panose="020B0503020204020204" charset="-122"/>
-              </a:defRPr>
-            </a:pPr>
-            <a:r>
-              <a:t>可行性依据</a:t>
-            </a:r>
-          </a:p>
-        </p:txBody>
-      </p:sp>
-      <p:sp>
-        <p:nvSpPr>
-          <p:cNvPr id="6" name="TextBox 5"/>
-          <p:cNvSpPr txBox="1"/>
-          <p:nvPr/>
-        </p:nvSpPr>
-        <p:spPr>
-          <a:xfrm>
-            <a:off x="548640" y="2286000"/>
-            <a:ext cx="5303520" cy="1511935"/>
+            <a:ext cx="10972800" cy="3200400"/>
           </a:xfrm>
           <a:prstGeom prst="rect">
             <a:avLst/>
@@ -14188,9 +13577,9 @@
           <a:p>
             <a:pPr>
               <a:spcAft>
-                <a:spcPts val="500"/>
+                <a:spcPts val="800"/>
               </a:spcAft>
-              <a:defRPr sz="1400">
+              <a:defRPr sz="1500">
                 <a:solidFill>
                   <a:srgbClr val="244C89"/>
                 </a:solidFill>
@@ -14203,7 +13592,7 @@
                   <a:srgbClr val="244C89"/>
                 </a:solidFill>
               </a:rPr>
-              <a:t>■ 真实GPU-backed链路已跑通——AI_EMBED预研 + AI_COMPLETE baseline，阶段计时方法成熟</a:t>
+              <a:t>■ 验证问题：两项策略分别调优后拼接，是否等于联合调优？还是需要联合搜索才能找到最优组合？</a:t>
             </a:r>
             <a:endParaRPr>
               <a:solidFill>
@@ -14214,9 +13603,9 @@
           <a:p>
             <a:pPr>
               <a:spcAft>
-                <a:spcPts val="500"/>
+                <a:spcPts val="800"/>
               </a:spcAft>
-              <a:defRPr sz="1400">
+              <a:defRPr sz="1500">
                 <a:solidFill>
                   <a:srgbClr val="000000"/>
                 </a:solidFill>
@@ -14229,7 +13618,7 @@
                   <a:srgbClr val="244C89"/>
                 </a:solidFill>
               </a:rPr>
-              <a:t>■ Daft数据引擎接入已验证——管线开销&lt;0.1s，与手动Arrow路径同数量级</a:t>
+              <a:t>■ 方法：独立搜索最优batching配置 → 独立搜索最优submission配置 → 拼接独立最优 → 联合grid search（batching × submission）→ 比较差距</a:t>
             </a:r>
             <a:endParaRPr>
               <a:solidFill>
@@ -14240,9 +13629,9 @@
           <a:p>
             <a:pPr>
               <a:spcAft>
-                <a:spcPts val="500"/>
+                <a:spcPts val="800"/>
               </a:spcAft>
-              <a:defRPr sz="1400">
+              <a:defRPr sz="1500">
                 <a:solidFill>
                   <a:srgbClr val="000000"/>
                 </a:solidFill>
@@ -14255,7 +13644,7 @@
                   <a:srgbClr val="244C89"/>
                 </a:solidFill>
               </a:rPr>
-              <a:t>■ 风险降级：自适应3轮不超越则降级为K_max必要性论证；文本消融完成前不启动多模态</a:t>
+              <a:t>■ 判定：联合显著优于拼接 → 需要联合调优（交互效应强）；两者接近 → 分层独立优化即可（策略正交）</a:t>
             </a:r>
             <a:endParaRPr>
               <a:solidFill>
@@ -14263,82 +13652,25 @@
               </a:solidFill>
             </a:endParaRPr>
           </a:p>
-        </p:txBody>
-      </p:sp>
-      <p:sp>
-        <p:nvSpPr>
-          <p:cNvPr id="7" name="TextBox 6"/>
-          <p:cNvSpPr txBox="1"/>
-          <p:nvPr/>
-        </p:nvSpPr>
-        <p:spPr>
-          <a:xfrm>
-            <a:off x="6217920" y="1920240"/>
-            <a:ext cx="5303520" cy="320040"/>
-          </a:xfrm>
-          <a:prstGeom prst="rect">
-            <a:avLst/>
-          </a:prstGeom>
-          <a:noFill/>
-        </p:spPr>
-        <p:txBody>
-          <a:bodyPr wrap="square"/>
-          <a:lstStyle/>
-          <a:p>
-            <a:pPr algn="l">
-              <a:defRPr sz="1600" b="1">
-                <a:solidFill>
-                  <a:srgbClr val="7C3AED"/>
+          <a:p>
+            <a:pPr>
+              <a:spcAft>
+                <a:spcPts val="800"/>
+              </a:spcAft>
+              <a:defRPr sz="1500">
+                <a:solidFill>
+                  <a:srgbClr val="000000"/>
                 </a:solidFill>
                 <a:latin typeface="微软雅黑" panose="020B0503020204020204" charset="-122"/>
               </a:defRPr>
             </a:pPr>
             <a:r>
-              <a:t>预期创新点</a:t>
-            </a:r>
-          </a:p>
-        </p:txBody>
-      </p:sp>
-      <p:sp>
-        <p:nvSpPr>
-          <p:cNvPr id="8" name="TextBox 7"/>
-          <p:cNvSpPr txBox="1"/>
-          <p:nvPr/>
-        </p:nvSpPr>
-        <p:spPr>
-          <a:xfrm>
-            <a:off x="6217920" y="2286000"/>
-            <a:ext cx="5303520" cy="3017520"/>
-          </a:xfrm>
-          <a:prstGeom prst="rect">
-            <a:avLst/>
-          </a:prstGeom>
-          <a:noFill/>
-        </p:spPr>
-        <p:txBody>
-          <a:bodyPr wrap="square">
-            <a:spAutoFit/>
-          </a:bodyPr>
-          <a:lstStyle/>
-          <a:p>
-            <a:pPr>
-              <a:spcAft>
-                <a:spcPts val="500"/>
-              </a:spcAft>
-              <a:defRPr sz="1400">
+              <a:rPr>
                 <a:solidFill>
                   <a:srgbClr val="244C89"/>
                 </a:solidFill>
-                <a:latin typeface="微软雅黑" panose="020B0503020204020204" charset="-122"/>
-              </a:defRPr>
-            </a:pPr>
-            <a:r>
-              <a:rPr>
-                <a:solidFill>
-                  <a:srgbClr val="244C89"/>
-                </a:solidFill>
               </a:rPr>
-              <a:t>■ 创新点①：AI workload感知的上游动态数据组织策略——在Ray侧设计token-budget/length-align/prefix-aware三种batching policy</a:t>
+              <a:t>■ 无论哪种结果，都不改变课题的核心贡献——上游数据组织+提交控制两项策略的设计空间表征与实验验证。</a:t>
             </a:r>
             <a:endParaRPr>
               <a:solidFill>
@@ -14346,63 +13678,11 @@
               </a:solidFill>
             </a:endParaRPr>
           </a:p>
-          <a:p>
-            <a:pPr>
-              <a:spcAft>
-                <a:spcPts val="500"/>
-              </a:spcAft>
-              <a:defRPr sz="1400">
-                <a:solidFill>
-                  <a:srgbClr val="000000"/>
-                </a:solidFill>
-                <a:latin typeface="微软雅黑" panose="020B0503020204020204" charset="-122"/>
-              </a:defRPr>
-            </a:pPr>
-            <a:r>
-              <a:rPr>
-                <a:solidFill>
-                  <a:srgbClr val="244C89"/>
-                </a:solidFill>
-              </a:rPr>
-              <a:t>■ 创新点②：Ray actor去中心化自适应提交策略——每个actor独立观测vLLM队列状态自主决定flush时机</a:t>
-            </a:r>
-            <a:endParaRPr>
-              <a:solidFill>
-                <a:srgbClr val="244C89"/>
-              </a:solidFill>
-            </a:endParaRPr>
-          </a:p>
-          <a:p>
-            <a:pPr>
-              <a:spcAft>
-                <a:spcPts val="500"/>
-              </a:spcAft>
-              <a:defRPr sz="1400">
-                <a:solidFill>
-                  <a:srgbClr val="000000"/>
-                </a:solidFill>
-                <a:latin typeface="微软雅黑" panose="020B0503020204020204" charset="-122"/>
-              </a:defRPr>
-            </a:pPr>
-            <a:r>
-              <a:rPr>
-                <a:solidFill>
-                  <a:srgbClr val="244C89"/>
-                </a:solidFill>
-              </a:rPr>
-              <a:t>■ 创新点③：AI数据流持久化瓶颈判定——通过耦合验证与sink对比为全链路优化提供写入侧边界条件</a:t>
-            </a:r>
-            <a:endParaRPr>
-              <a:solidFill>
-                <a:srgbClr val="244C89"/>
-              </a:solidFill>
-            </a:endParaRPr>
-          </a:p>
-        </p:txBody>
-      </p:sp>
-      <p:sp>
-        <p:nvSpPr>
-          <p:cNvPr id="9" name="Rectangle 8"/>
+        </p:txBody>
+      </p:sp>
+      <p:sp>
+        <p:nvSpPr>
+          <p:cNvPr id="6" name="Rectangle 5"/>
           <p:cNvSpPr/>
           <p:nvPr/>
         </p:nvSpPr>
@@ -14445,7 +13725,7 @@
       </p:sp>
       <p:sp>
         <p:nvSpPr>
-          <p:cNvPr id="10" name="TextBox 9"/>
+          <p:cNvPr id="7" name="TextBox 6"/>
           <p:cNvSpPr txBox="1"/>
           <p:nvPr/>
         </p:nvSpPr>
@@ -14473,16 +13753,16 @@
               <a:spcAft>
                 <a:spcPts val="0"/>
               </a:spcAft>
-              <a:defRPr sz="1100" b="1">
-                <a:solidFill>
-                  <a:srgbClr val="7C3AED"/>
+              <a:defRPr sz="1200" b="1">
+                <a:solidFill>
+                  <a:srgbClr val="16A34A"/>
                 </a:solidFill>
                 <a:latin typeface="微软雅黑" panose="020B0503020204020204" charset="-122"/>
               </a:defRPr>
             </a:pPr>
             <a:r>
               <a:rPr sz="1250"/>
-              <a:t>方法已通过预研验证；硬件边界不影响核心方法；风险有明确触发条件和降级路径。创新点为预期，需后续实验验证。</a:t>
+              <a:t>写回使用PostgreSQL+pgvector（COPY+deferred index）作为工程baseline，不作为独立方法贡献——仅在端到端评价中检查写回是否吞噬上游收益。</a:t>
             </a:r>
             <a:endParaRPr sz="1250"/>
           </a:p>
@@ -14542,23 +13822,20 @@
           </a:fontRef>
         </p:style>
         <p:txBody>
-          <a:bodyPr rtlCol="0" anchor="ctr"/>
-          <a:lstStyle/>
-          <a:p>
-            <a:pPr algn="ctr"/>
-            <a:r>
-              <a:rPr sz="2400" b="1">
+          <a:bodyPr wrap="none" rtlCol="0" anchor="ctr"/>
+          <a:lstStyle/>
+          <a:p>
+            <a:pPr algn="ctr">
+              <a:defRPr sz="3200" b="1">
                 <a:solidFill>
                   <a:srgbClr val="FFFFFF"/>
                 </a:solidFill>
-              </a:rPr>
-              <a:t>04</a:t>
-            </a:r>
-            <a:endParaRPr sz="2400" b="1">
-              <a:solidFill>
-                <a:srgbClr val="FFFFFF"/>
-              </a:solidFill>
-            </a:endParaRPr>
+                <a:latin typeface="微软雅黑" panose="020B0503020204020204" charset="-122"/>
+              </a:defRPr>
+            </a:pPr>
+            <a:r>
+              <a:t>03</a:t>
+            </a:r>
           </a:p>
         </p:txBody>
       </p:sp>
@@ -14571,7 +13848,7 @@
         <p:spPr>
           <a:xfrm>
             <a:off x="1508760" y="1024128"/>
-            <a:ext cx="9098280" cy="502920"/>
+            <a:ext cx="9144000" cy="502920"/>
           </a:xfrm>
           <a:prstGeom prst="rect">
             <a:avLst/>
@@ -14579,94 +13856,26 @@
           <a:noFill/>
         </p:spPr>
         <p:txBody>
-          <a:bodyPr wrap="none" lIns="0" tIns="0" rIns="0" bIns="0">
-            <a:spAutoFit/>
-          </a:bodyPr>
-          <a:lstStyle/>
-          <a:p>
-            <a:pPr algn="l"/>
-            <a:r>
-              <a:rPr sz="2400" b="1">
-                <a:solidFill>
-                  <a:srgbClr val="172033"/>
-                </a:solidFill>
-              </a:rPr>
-              <a:t>后续工作：多模态泛化验证</a:t>
-            </a:r>
-            <a:endParaRPr sz="2400" b="1">
-              <a:solidFill>
-                <a:srgbClr val="172033"/>
-              </a:solidFill>
-            </a:endParaRPr>
-          </a:p>
-        </p:txBody>
-      </p:sp>
-      <p:sp>
-        <p:nvSpPr>
-          <p:cNvPr id="4" name="TextBox 3"/>
-          <p:cNvSpPr txBox="1"/>
-          <p:nvPr/>
-        </p:nvSpPr>
-        <p:spPr>
-          <a:xfrm>
-            <a:off x="548640" y="1572768"/>
-            <a:ext cx="11109960" cy="365760"/>
-          </a:xfrm>
-          <a:prstGeom prst="rect">
-            <a:avLst/>
-          </a:prstGeom>
-          <a:noFill/>
-        </p:spPr>
-        <p:txBody>
-          <a:bodyPr wrap="none" lIns="0" tIns="0" rIns="0" bIns="0">
-            <a:spAutoFit/>
-          </a:bodyPr>
-          <a:lstStyle/>
-          <a:p>
-            <a:pPr algn="l"/>
-            <a:r>
-              <a:rPr sz="1300" b="0">
-                <a:solidFill>
-                  <a:srgbClr val="475569"/>
-                </a:solidFill>
-              </a:rPr>
-              <a:t>Daft 接入后的阶段耗时表明：DB 读取与组织开销仍小于 0.1s，后续图像 workload 可沿用同一数据管线，重点验证策略抽象是否从 token 预算扩展到 image/frame 预算。</a:t>
-            </a:r>
-            <a:endParaRPr sz="1300" b="0">
-              <a:solidFill>
-                <a:srgbClr val="475569"/>
-              </a:solidFill>
-            </a:endParaRPr>
-          </a:p>
-        </p:txBody>
-      </p:sp>
-      <p:pic>
-        <p:nvPicPr>
-          <p:cNvPr id="5" name="Picture 4" descr="b26_arrow_vs_daft_stage_breakdown.png"/>
-          <p:cNvPicPr>
-            <a:picLocks noChangeAspect="1"/>
-          </p:cNvPicPr>
-          <p:nvPr/>
-        </p:nvPicPr>
-        <p:blipFill>
-          <a:blip r:embed="rId1"/>
-          <a:stretch>
-            <a:fillRect/>
-          </a:stretch>
-        </p:blipFill>
-        <p:spPr>
-          <a:xfrm>
-            <a:off x="702394" y="1947672"/>
-            <a:ext cx="10564707" cy="3822191"/>
-          </a:xfrm>
-          <a:prstGeom prst="rect">
-            <a:avLst/>
-          </a:prstGeom>
-        </p:spPr>
-      </p:pic>
-      <p:sp>
-        <p:nvSpPr>
-          <p:cNvPr id="6" name="Rectangle 5"/>
+          <a:bodyPr wrap="square"/>
+          <a:lstStyle/>
+          <a:p>
+            <a:pPr algn="l">
+              <a:defRPr sz="2800" b="1">
+                <a:solidFill>
+                  <a:srgbClr val="000000"/>
+                </a:solidFill>
+                <a:latin typeface="微软雅黑" panose="020B0503020204020204" charset="-122"/>
+              </a:defRPr>
+            </a:pPr>
+            <a:r>
+              <a:t>实验阶段路线图</a:t>
+            </a:r>
+          </a:p>
+        </p:txBody>
+      </p:sp>
+      <p:sp>
+        <p:nvSpPr>
+          <p:cNvPr id="19" name="Rectangle 18"/>
           <p:cNvSpPr/>
           <p:nvPr/>
         </p:nvSpPr>
@@ -14709,7 +13918,7 @@
       </p:sp>
       <p:sp>
         <p:nvSpPr>
-          <p:cNvPr id="7" name="TextBox 6"/>
+          <p:cNvPr id="20" name="TextBox 19"/>
           <p:cNvSpPr txBox="1"/>
           <p:nvPr/>
         </p:nvSpPr>
@@ -14724,9 +13933,7 @@
           <a:noFill/>
         </p:spPr>
         <p:txBody>
-          <a:bodyPr wrap="none" lIns="0" tIns="0" rIns="0" bIns="0" anchor="ctr">
-            <a:spAutoFit/>
-          </a:bodyPr>
+          <a:bodyPr wrap="square" lIns="0" tIns="0" rIns="0" bIns="0" anchor="ctr"/>
           <a:lstStyle/>
           <a:p>
             <a:pPr algn="l">
@@ -14739,20 +13946,923 @@
               <a:spcAft>
                 <a:spcPts val="0"/>
               </a:spcAft>
-            </a:pPr>
-            <a:r>
-              <a:rPr sz="1250" b="1">
-                <a:solidFill>
-                  <a:srgbClr val="009650"/>
-                </a:solidFill>
-              </a:rPr>
-              <a:t>后续验证目标：同一套 Daft/Ray 策略代码从 prompt 列扩展到 image/frame 列，检查策略是否具有模态无关性。</a:t>
-            </a:r>
-            <a:endParaRPr sz="1250" b="1">
-              <a:solidFill>
-                <a:srgbClr val="009650"/>
-              </a:solidFill>
-            </a:endParaRPr>
+              <a:defRPr sz="1100" b="1">
+                <a:solidFill>
+                  <a:srgbClr val="16A34A"/>
+                </a:solidFill>
+                <a:latin typeface="微软雅黑" panose="020B0503020204020204" charset="-122"/>
+              </a:defRPr>
+            </a:pPr>
+            <a:r>
+              <a:rPr sz="1250"/>
+              <a:t>前置条件已完成，后续四阶段每阶段有明确验证目标和反证条件。</a:t>
+            </a:r>
+            <a:endParaRPr sz="1250"/>
+          </a:p>
+        </p:txBody>
+      </p:sp>
+      <p:sp>
+        <p:nvSpPr>
+          <p:cNvPr id="21" name="Rectangle 20"/>
+          <p:cNvSpPr/>
+          <p:nvPr/>
+        </p:nvSpPr>
+        <p:spPr>
+          <a:xfrm>
+            <a:off x="731520" y="2500884"/>
+            <a:ext cx="10241280" cy="27432"/>
+          </a:xfrm>
+          <a:prstGeom prst="rect">
+            <a:avLst/>
+          </a:prstGeom>
+          <a:solidFill>
+            <a:srgbClr val="16A34A"/>
+          </a:solidFill>
+          <a:ln>
+            <a:noFill/>
+          </a:ln>
+        </p:spPr>
+        <p:style>
+          <a:lnRef idx="1">
+            <a:schemeClr val="accent1"/>
+          </a:lnRef>
+          <a:fillRef idx="3">
+            <a:schemeClr val="accent1"/>
+          </a:fillRef>
+          <a:effectRef idx="2">
+            <a:schemeClr val="accent1"/>
+          </a:effectRef>
+          <a:fontRef idx="minor">
+            <a:schemeClr val="lt1"/>
+          </a:fontRef>
+        </p:style>
+        <p:txBody>
+          <a:bodyPr rtlCol="0" anchor="ctr"/>
+          <a:lstStyle/>
+          <a:p>
+            <a:pPr algn="ctr"/>
+          </a:p>
+        </p:txBody>
+      </p:sp>
+      <p:sp>
+        <p:nvSpPr>
+          <p:cNvPr id="22" name="Oval 21"/>
+          <p:cNvSpPr/>
+          <p:nvPr/>
+        </p:nvSpPr>
+        <p:spPr>
+          <a:xfrm>
+            <a:off x="585216" y="2368296"/>
+            <a:ext cx="292608" cy="292608"/>
+          </a:xfrm>
+          <a:prstGeom prst="ellipse">
+            <a:avLst/>
+          </a:prstGeom>
+          <a:solidFill>
+            <a:srgbClr val="16A34A"/>
+          </a:solidFill>
+          <a:ln>
+            <a:noFill/>
+          </a:ln>
+        </p:spPr>
+        <p:style>
+          <a:lnRef idx="1">
+            <a:schemeClr val="accent1"/>
+          </a:lnRef>
+          <a:fillRef idx="3">
+            <a:schemeClr val="accent1"/>
+          </a:fillRef>
+          <a:effectRef idx="2">
+            <a:schemeClr val="accent1"/>
+          </a:effectRef>
+          <a:fontRef idx="minor">
+            <a:schemeClr val="lt1"/>
+          </a:fontRef>
+        </p:style>
+        <p:txBody>
+          <a:bodyPr rtlCol="0" anchor="ctr"/>
+          <a:lstStyle/>
+          <a:p>
+            <a:pPr algn="ctr"/>
+          </a:p>
+        </p:txBody>
+      </p:sp>
+      <p:sp>
+        <p:nvSpPr>
+          <p:cNvPr id="23" name="TextBox 22"/>
+          <p:cNvSpPr txBox="1"/>
+          <p:nvPr/>
+        </p:nvSpPr>
+        <p:spPr>
+          <a:xfrm>
+            <a:off x="91440" y="1828800"/>
+            <a:ext cx="1280160" cy="365760"/>
+          </a:xfrm>
+          <a:prstGeom prst="rect">
+            <a:avLst/>
+          </a:prstGeom>
+          <a:noFill/>
+        </p:spPr>
+        <p:txBody>
+          <a:bodyPr wrap="none">
+            <a:spAutoFit/>
+          </a:bodyPr>
+          <a:lstStyle/>
+          <a:p>
+            <a:pPr algn="ctr">
+              <a:defRPr sz="1200" b="1">
+                <a:solidFill>
+                  <a:srgbClr val="16A34A"/>
+                </a:solidFill>
+                <a:latin typeface="微软雅黑" panose="020B0503020204020204" charset="-122"/>
+              </a:defRPr>
+            </a:pPr>
+            <a:r>
+              <a:t>前置阶段</a:t>
+            </a:r>
+          </a:p>
+        </p:txBody>
+      </p:sp>
+      <p:sp>
+        <p:nvSpPr>
+          <p:cNvPr id="24" name="TextBox 23"/>
+          <p:cNvSpPr txBox="1"/>
+          <p:nvPr/>
+        </p:nvSpPr>
+        <p:spPr>
+          <a:xfrm>
+            <a:off x="137160" y="2834640"/>
+            <a:ext cx="1188720" cy="2560320"/>
+          </a:xfrm>
+          <a:prstGeom prst="rect">
+            <a:avLst/>
+          </a:prstGeom>
+          <a:noFill/>
+        </p:spPr>
+        <p:txBody>
+          <a:bodyPr wrap="square">
+            <a:spAutoFit/>
+          </a:bodyPr>
+          <a:lstStyle/>
+          <a:p>
+            <a:pPr algn="ctr">
+              <a:defRPr sz="1000" b="1">
+                <a:solidFill>
+                  <a:srgbClr val="16A34A"/>
+                </a:solidFill>
+                <a:latin typeface="微软雅黑" panose="020B0503020204020204" charset="-122"/>
+              </a:defRPr>
+            </a:pPr>
+            <a:r>
+              <a:t>vLLM baseline</a:t>
+            </a:r>
+          </a:p>
+          <a:p>
+            <a:pPr algn="ctr">
+              <a:defRPr sz="1000">
+                <a:solidFill>
+                  <a:srgbClr val="000000"/>
+                </a:solidFill>
+                <a:latin typeface="微软雅黑" panose="020B0503020204020204" charset="-122"/>
+              </a:defRPr>
+            </a:pPr>
+            <a:r>
+              <a:t>Daft接入 ✅</a:t>
+            </a:r>
+          </a:p>
+        </p:txBody>
+      </p:sp>
+      <p:sp>
+        <p:nvSpPr>
+          <p:cNvPr id="25" name="Oval 24"/>
+          <p:cNvSpPr/>
+          <p:nvPr/>
+        </p:nvSpPr>
+        <p:spPr>
+          <a:xfrm>
+            <a:off x="3145535" y="2368296"/>
+            <a:ext cx="292608" cy="292608"/>
+          </a:xfrm>
+          <a:prstGeom prst="ellipse">
+            <a:avLst/>
+          </a:prstGeom>
+          <a:solidFill>
+            <a:srgbClr val="16A34A"/>
+          </a:solidFill>
+          <a:ln>
+            <a:noFill/>
+          </a:ln>
+        </p:spPr>
+        <p:style>
+          <a:lnRef idx="1">
+            <a:schemeClr val="accent1"/>
+          </a:lnRef>
+          <a:fillRef idx="3">
+            <a:schemeClr val="accent1"/>
+          </a:fillRef>
+          <a:effectRef idx="2">
+            <a:schemeClr val="accent1"/>
+          </a:effectRef>
+          <a:fontRef idx="minor">
+            <a:schemeClr val="lt1"/>
+          </a:fontRef>
+        </p:style>
+        <p:txBody>
+          <a:bodyPr rtlCol="0" anchor="ctr"/>
+          <a:lstStyle/>
+          <a:p>
+            <a:pPr algn="ctr"/>
+          </a:p>
+        </p:txBody>
+      </p:sp>
+      <p:sp>
+        <p:nvSpPr>
+          <p:cNvPr id="26" name="TextBox 25"/>
+          <p:cNvSpPr txBox="1"/>
+          <p:nvPr/>
+        </p:nvSpPr>
+        <p:spPr>
+          <a:xfrm>
+            <a:off x="2651759" y="1828800"/>
+            <a:ext cx="1280160" cy="365760"/>
+          </a:xfrm>
+          <a:prstGeom prst="rect">
+            <a:avLst/>
+          </a:prstGeom>
+          <a:noFill/>
+        </p:spPr>
+        <p:txBody>
+          <a:bodyPr wrap="none">
+            <a:spAutoFit/>
+          </a:bodyPr>
+          <a:lstStyle/>
+          <a:p>
+            <a:pPr algn="ctr">
+              <a:defRPr sz="1200" b="1">
+                <a:solidFill>
+                  <a:srgbClr val="16A34A"/>
+                </a:solidFill>
+                <a:latin typeface="微软雅黑" panose="020B0503020204020204" charset="-122"/>
+              </a:defRPr>
+            </a:pPr>
+            <a:r>
+              <a:t>第一阶段</a:t>
+            </a:r>
+          </a:p>
+        </p:txBody>
+      </p:sp>
+      <p:sp>
+        <p:nvSpPr>
+          <p:cNvPr id="27" name="TextBox 26"/>
+          <p:cNvSpPr txBox="1"/>
+          <p:nvPr/>
+        </p:nvSpPr>
+        <p:spPr>
+          <a:xfrm>
+            <a:off x="2651759" y="2103120"/>
+            <a:ext cx="1280160" cy="228600"/>
+          </a:xfrm>
+          <a:prstGeom prst="rect">
+            <a:avLst/>
+          </a:prstGeom>
+          <a:noFill/>
+        </p:spPr>
+        <p:txBody>
+          <a:bodyPr wrap="none">
+            <a:spAutoFit/>
+          </a:bodyPr>
+          <a:lstStyle/>
+          <a:p>
+            <a:pPr algn="ctr">
+              <a:defRPr sz="1000">
+                <a:solidFill>
+                  <a:srgbClr val="6B7280"/>
+                </a:solidFill>
+                <a:latin typeface="微软雅黑" panose="020B0503020204020204" charset="-122"/>
+              </a:defRPr>
+            </a:pPr>
+            <a:r>
+              <a:t>8月</a:t>
+            </a:r>
+          </a:p>
+        </p:txBody>
+      </p:sp>
+      <p:sp>
+        <p:nvSpPr>
+          <p:cNvPr id="28" name="TextBox 27"/>
+          <p:cNvSpPr txBox="1"/>
+          <p:nvPr/>
+        </p:nvSpPr>
+        <p:spPr>
+          <a:xfrm>
+            <a:off x="2697479" y="2834640"/>
+            <a:ext cx="1188720" cy="2560320"/>
+          </a:xfrm>
+          <a:prstGeom prst="rect">
+            <a:avLst/>
+          </a:prstGeom>
+          <a:noFill/>
+        </p:spPr>
+        <p:txBody>
+          <a:bodyPr wrap="square">
+            <a:spAutoFit/>
+          </a:bodyPr>
+          <a:lstStyle/>
+          <a:p>
+            <a:pPr algn="ctr">
+              <a:defRPr sz="1000" b="1">
+                <a:solidFill>
+                  <a:srgbClr val="16A34A"/>
+                </a:solidFill>
+                <a:latin typeface="微软雅黑" panose="020B0503020204020204" charset="-122"/>
+              </a:defRPr>
+            </a:pPr>
+            <a:r>
+              <a:t>数据组织消融</a:t>
+            </a:r>
+          </a:p>
+          <a:p>
+            <a:pPr algn="ctr">
+              <a:defRPr sz="1000">
+                <a:solidFill>
+                  <a:srgbClr val="000000"/>
+                </a:solidFill>
+                <a:latin typeface="微软雅黑" panose="020B0503020204020204" charset="-122"/>
+              </a:defRPr>
+            </a:pPr>
+            <a:r>
+              <a:t>Token-budget</a:t>
+            </a:r>
+          </a:p>
+          <a:p>
+            <a:pPr algn="ctr">
+              <a:defRPr sz="1000">
+                <a:solidFill>
+                  <a:srgbClr val="000000"/>
+                </a:solidFill>
+                <a:latin typeface="微软雅黑" panose="020B0503020204020204" charset="-122"/>
+              </a:defRPr>
+            </a:pPr>
+            <a:r>
+              <a:t>Length-align</a:t>
+            </a:r>
+          </a:p>
+          <a:p>
+            <a:pPr algn="ctr">
+              <a:defRPr sz="1000">
+                <a:solidFill>
+                  <a:srgbClr val="000000"/>
+                </a:solidFill>
+                <a:latin typeface="微软雅黑" panose="020B0503020204020204" charset="-122"/>
+              </a:defRPr>
+            </a:pPr>
+            <a:r>
+              <a:t>Prefix-aware</a:t>
+            </a:r>
+          </a:p>
+        </p:txBody>
+      </p:sp>
+      <p:sp>
+        <p:nvSpPr>
+          <p:cNvPr id="29" name="Oval 28"/>
+          <p:cNvSpPr/>
+          <p:nvPr/>
+        </p:nvSpPr>
+        <p:spPr>
+          <a:xfrm>
+            <a:off x="5705855" y="2368296"/>
+            <a:ext cx="292608" cy="292608"/>
+          </a:xfrm>
+          <a:prstGeom prst="ellipse">
+            <a:avLst/>
+          </a:prstGeom>
+          <a:solidFill>
+            <a:srgbClr val="16A34A"/>
+          </a:solidFill>
+          <a:ln>
+            <a:noFill/>
+          </a:ln>
+        </p:spPr>
+        <p:style>
+          <a:lnRef idx="1">
+            <a:schemeClr val="accent1"/>
+          </a:lnRef>
+          <a:fillRef idx="3">
+            <a:schemeClr val="accent1"/>
+          </a:fillRef>
+          <a:effectRef idx="2">
+            <a:schemeClr val="accent1"/>
+          </a:effectRef>
+          <a:fontRef idx="minor">
+            <a:schemeClr val="lt1"/>
+          </a:fontRef>
+        </p:style>
+        <p:txBody>
+          <a:bodyPr rtlCol="0" anchor="ctr"/>
+          <a:lstStyle/>
+          <a:p>
+            <a:pPr algn="ctr"/>
+          </a:p>
+        </p:txBody>
+      </p:sp>
+      <p:sp>
+        <p:nvSpPr>
+          <p:cNvPr id="30" name="TextBox 29"/>
+          <p:cNvSpPr txBox="1"/>
+          <p:nvPr/>
+        </p:nvSpPr>
+        <p:spPr>
+          <a:xfrm>
+            <a:off x="5212079" y="1828800"/>
+            <a:ext cx="1280160" cy="365760"/>
+          </a:xfrm>
+          <a:prstGeom prst="rect">
+            <a:avLst/>
+          </a:prstGeom>
+          <a:noFill/>
+        </p:spPr>
+        <p:txBody>
+          <a:bodyPr wrap="none">
+            <a:spAutoFit/>
+          </a:bodyPr>
+          <a:lstStyle/>
+          <a:p>
+            <a:pPr algn="ctr">
+              <a:defRPr sz="1200" b="1">
+                <a:solidFill>
+                  <a:srgbClr val="16A34A"/>
+                </a:solidFill>
+                <a:latin typeface="微软雅黑" panose="020B0503020204020204" charset="-122"/>
+              </a:defRPr>
+            </a:pPr>
+            <a:r>
+              <a:t>第二阶段</a:t>
+            </a:r>
+          </a:p>
+        </p:txBody>
+      </p:sp>
+      <p:sp>
+        <p:nvSpPr>
+          <p:cNvPr id="31" name="TextBox 30"/>
+          <p:cNvSpPr txBox="1"/>
+          <p:nvPr/>
+        </p:nvSpPr>
+        <p:spPr>
+          <a:xfrm>
+            <a:off x="5212079" y="2103120"/>
+            <a:ext cx="1280160" cy="228600"/>
+          </a:xfrm>
+          <a:prstGeom prst="rect">
+            <a:avLst/>
+          </a:prstGeom>
+          <a:noFill/>
+        </p:spPr>
+        <p:txBody>
+          <a:bodyPr wrap="none">
+            <a:spAutoFit/>
+          </a:bodyPr>
+          <a:lstStyle/>
+          <a:p>
+            <a:pPr algn="ctr">
+              <a:defRPr sz="1000">
+                <a:solidFill>
+                  <a:srgbClr val="6B7280"/>
+                </a:solidFill>
+                <a:latin typeface="微软雅黑" panose="020B0503020204020204" charset="-122"/>
+              </a:defRPr>
+            </a:pPr>
+            <a:r>
+              <a:t>9月</a:t>
+            </a:r>
+          </a:p>
+        </p:txBody>
+      </p:sp>
+      <p:sp>
+        <p:nvSpPr>
+          <p:cNvPr id="32" name="TextBox 31"/>
+          <p:cNvSpPr txBox="1"/>
+          <p:nvPr/>
+        </p:nvSpPr>
+        <p:spPr>
+          <a:xfrm>
+            <a:off x="5257799" y="2834640"/>
+            <a:ext cx="1188720" cy="2560320"/>
+          </a:xfrm>
+          <a:prstGeom prst="rect">
+            <a:avLst/>
+          </a:prstGeom>
+          <a:noFill/>
+        </p:spPr>
+        <p:txBody>
+          <a:bodyPr wrap="square">
+            <a:spAutoFit/>
+          </a:bodyPr>
+          <a:lstStyle/>
+          <a:p>
+            <a:pPr algn="ctr">
+              <a:defRPr sz="1000" b="1">
+                <a:solidFill>
+                  <a:srgbClr val="16A34A"/>
+                </a:solidFill>
+                <a:latin typeface="微软雅黑" panose="020B0503020204020204" charset="-122"/>
+              </a:defRPr>
+            </a:pPr>
+            <a:r>
+              <a:t>提交控制消融</a:t>
+            </a:r>
+          </a:p>
+          <a:p>
+            <a:pPr algn="ctr">
+              <a:defRPr sz="1000">
+                <a:solidFill>
+                  <a:srgbClr val="000000"/>
+                </a:solidFill>
+                <a:latin typeface="微软雅黑" panose="020B0503020204020204" charset="-122"/>
+              </a:defRPr>
+            </a:pPr>
+            <a:r>
+              <a:t>Queue-adaptive</a:t>
+            </a:r>
+          </a:p>
+          <a:p>
+            <a:pPr algn="ctr">
+              <a:defRPr sz="1000">
+                <a:solidFill>
+                  <a:srgbClr val="000000"/>
+                </a:solidFill>
+                <a:latin typeface="微软雅黑" panose="020B0503020204020204" charset="-122"/>
+              </a:defRPr>
+            </a:pPr>
+            <a:r>
+              <a:t>K_max动态</a:t>
+            </a:r>
+          </a:p>
+          <a:p>
+            <a:pPr algn="ctr">
+              <a:defRPr sz="1000">
+                <a:solidFill>
+                  <a:srgbClr val="000000"/>
+                </a:solidFill>
+                <a:latin typeface="微软雅黑" panose="020B0503020204020204" charset="-122"/>
+              </a:defRPr>
+            </a:pPr>
+            <a:r>
+              <a:t>Pool路由</a:t>
+            </a:r>
+          </a:p>
+        </p:txBody>
+      </p:sp>
+      <p:sp>
+        <p:nvSpPr>
+          <p:cNvPr id="33" name="Oval 32"/>
+          <p:cNvSpPr/>
+          <p:nvPr/>
+        </p:nvSpPr>
+        <p:spPr>
+          <a:xfrm>
+            <a:off x="8266175" y="2368296"/>
+            <a:ext cx="292608" cy="292608"/>
+          </a:xfrm>
+          <a:prstGeom prst="ellipse">
+            <a:avLst/>
+          </a:prstGeom>
+          <a:solidFill>
+            <a:srgbClr val="16A34A"/>
+          </a:solidFill>
+          <a:ln>
+            <a:noFill/>
+          </a:ln>
+        </p:spPr>
+        <p:style>
+          <a:lnRef idx="1">
+            <a:schemeClr val="accent1"/>
+          </a:lnRef>
+          <a:fillRef idx="3">
+            <a:schemeClr val="accent1"/>
+          </a:fillRef>
+          <a:effectRef idx="2">
+            <a:schemeClr val="accent1"/>
+          </a:effectRef>
+          <a:fontRef idx="minor">
+            <a:schemeClr val="lt1"/>
+          </a:fontRef>
+        </p:style>
+        <p:txBody>
+          <a:bodyPr rtlCol="0" anchor="ctr"/>
+          <a:lstStyle/>
+          <a:p>
+            <a:pPr algn="ctr"/>
+          </a:p>
+        </p:txBody>
+      </p:sp>
+      <p:sp>
+        <p:nvSpPr>
+          <p:cNvPr id="34" name="TextBox 33"/>
+          <p:cNvSpPr txBox="1"/>
+          <p:nvPr/>
+        </p:nvSpPr>
+        <p:spPr>
+          <a:xfrm>
+            <a:off x="7772400" y="1828800"/>
+            <a:ext cx="1280160" cy="365760"/>
+          </a:xfrm>
+          <a:prstGeom prst="rect">
+            <a:avLst/>
+          </a:prstGeom>
+          <a:noFill/>
+        </p:spPr>
+        <p:txBody>
+          <a:bodyPr wrap="none">
+            <a:spAutoFit/>
+          </a:bodyPr>
+          <a:lstStyle/>
+          <a:p>
+            <a:pPr algn="ctr">
+              <a:defRPr sz="1200" b="1">
+                <a:solidFill>
+                  <a:srgbClr val="16A34A"/>
+                </a:solidFill>
+                <a:latin typeface="微软雅黑" panose="020B0503020204020204" charset="-122"/>
+              </a:defRPr>
+            </a:pPr>
+            <a:r>
+              <a:t>第三阶段</a:t>
+            </a:r>
+          </a:p>
+        </p:txBody>
+      </p:sp>
+      <p:sp>
+        <p:nvSpPr>
+          <p:cNvPr id="35" name="TextBox 34"/>
+          <p:cNvSpPr txBox="1"/>
+          <p:nvPr/>
+        </p:nvSpPr>
+        <p:spPr>
+          <a:xfrm>
+            <a:off x="7772400" y="2103120"/>
+            <a:ext cx="1280160" cy="228600"/>
+          </a:xfrm>
+          <a:prstGeom prst="rect">
+            <a:avLst/>
+          </a:prstGeom>
+          <a:noFill/>
+        </p:spPr>
+        <p:txBody>
+          <a:bodyPr wrap="none">
+            <a:spAutoFit/>
+          </a:bodyPr>
+          <a:lstStyle/>
+          <a:p>
+            <a:pPr algn="ctr">
+              <a:defRPr sz="1000">
+                <a:solidFill>
+                  <a:srgbClr val="6B7280"/>
+                </a:solidFill>
+                <a:latin typeface="微软雅黑" panose="020B0503020204020204" charset="-122"/>
+              </a:defRPr>
+            </a:pPr>
+            <a:r>
+              <a:t>9-10月</a:t>
+            </a:r>
+          </a:p>
+        </p:txBody>
+      </p:sp>
+      <p:sp>
+        <p:nvSpPr>
+          <p:cNvPr id="36" name="TextBox 35"/>
+          <p:cNvSpPr txBox="1"/>
+          <p:nvPr/>
+        </p:nvSpPr>
+        <p:spPr>
+          <a:xfrm>
+            <a:off x="7818119" y="2834640"/>
+            <a:ext cx="1188720" cy="2560320"/>
+          </a:xfrm>
+          <a:prstGeom prst="rect">
+            <a:avLst/>
+          </a:prstGeom>
+          <a:noFill/>
+        </p:spPr>
+        <p:txBody>
+          <a:bodyPr wrap="square">
+            <a:spAutoFit/>
+          </a:bodyPr>
+          <a:lstStyle/>
+          <a:p>
+            <a:pPr algn="ctr">
+              <a:defRPr sz="1000" b="1">
+                <a:solidFill>
+                  <a:srgbClr val="16A34A"/>
+                </a:solidFill>
+                <a:latin typeface="微软雅黑" panose="020B0503020204020204" charset="-122"/>
+              </a:defRPr>
+            </a:pPr>
+            <a:r>
+              <a:t>耦合验证</a:t>
+            </a:r>
+          </a:p>
+          <a:p>
+            <a:pPr algn="ctr">
+              <a:defRPr sz="1000">
+                <a:solidFill>
+                  <a:srgbClr val="000000"/>
+                </a:solidFill>
+                <a:latin typeface="微软雅黑" panose="020B0503020204020204" charset="-122"/>
+              </a:defRPr>
+            </a:pPr>
+            <a:r>
+              <a:t>独立拼接 vs</a:t>
+            </a:r>
+          </a:p>
+          <a:p>
+            <a:pPr algn="ctr">
+              <a:defRPr sz="1000">
+                <a:solidFill>
+                  <a:srgbClr val="000000"/>
+                </a:solidFill>
+                <a:latin typeface="微软雅黑" panose="020B0503020204020204" charset="-122"/>
+              </a:defRPr>
+            </a:pPr>
+            <a:r>
+              <a:t>联合grid search</a:t>
+            </a:r>
+          </a:p>
+        </p:txBody>
+      </p:sp>
+      <p:sp>
+        <p:nvSpPr>
+          <p:cNvPr id="37" name="Oval 36"/>
+          <p:cNvSpPr/>
+          <p:nvPr/>
+        </p:nvSpPr>
+        <p:spPr>
+          <a:xfrm>
+            <a:off x="10826496" y="2368296"/>
+            <a:ext cx="292608" cy="292608"/>
+          </a:xfrm>
+          <a:prstGeom prst="ellipse">
+            <a:avLst/>
+          </a:prstGeom>
+          <a:solidFill>
+            <a:srgbClr val="16A34A"/>
+          </a:solidFill>
+          <a:ln>
+            <a:noFill/>
+          </a:ln>
+        </p:spPr>
+        <p:style>
+          <a:lnRef idx="1">
+            <a:schemeClr val="accent1"/>
+          </a:lnRef>
+          <a:fillRef idx="3">
+            <a:schemeClr val="accent1"/>
+          </a:fillRef>
+          <a:effectRef idx="2">
+            <a:schemeClr val="accent1"/>
+          </a:effectRef>
+          <a:fontRef idx="minor">
+            <a:schemeClr val="lt1"/>
+          </a:fontRef>
+        </p:style>
+        <p:txBody>
+          <a:bodyPr rtlCol="0" anchor="ctr"/>
+          <a:lstStyle/>
+          <a:p>
+            <a:pPr algn="ctr"/>
+          </a:p>
+        </p:txBody>
+      </p:sp>
+      <p:sp>
+        <p:nvSpPr>
+          <p:cNvPr id="38" name="TextBox 37"/>
+          <p:cNvSpPr txBox="1"/>
+          <p:nvPr/>
+        </p:nvSpPr>
+        <p:spPr>
+          <a:xfrm>
+            <a:off x="10332720" y="1828800"/>
+            <a:ext cx="1280160" cy="365760"/>
+          </a:xfrm>
+          <a:prstGeom prst="rect">
+            <a:avLst/>
+          </a:prstGeom>
+          <a:noFill/>
+        </p:spPr>
+        <p:txBody>
+          <a:bodyPr wrap="none">
+            <a:spAutoFit/>
+          </a:bodyPr>
+          <a:lstStyle/>
+          <a:p>
+            <a:pPr algn="ctr">
+              <a:defRPr sz="1200" b="1">
+                <a:solidFill>
+                  <a:srgbClr val="16A34A"/>
+                </a:solidFill>
+                <a:latin typeface="微软雅黑" panose="020B0503020204020204" charset="-122"/>
+              </a:defRPr>
+            </a:pPr>
+            <a:r>
+              <a:t>第四阶段</a:t>
+            </a:r>
+          </a:p>
+        </p:txBody>
+      </p:sp>
+      <p:sp>
+        <p:nvSpPr>
+          <p:cNvPr id="39" name="TextBox 38"/>
+          <p:cNvSpPr txBox="1"/>
+          <p:nvPr/>
+        </p:nvSpPr>
+        <p:spPr>
+          <a:xfrm>
+            <a:off x="10332720" y="2103120"/>
+            <a:ext cx="1280160" cy="228600"/>
+          </a:xfrm>
+          <a:prstGeom prst="rect">
+            <a:avLst/>
+          </a:prstGeom>
+          <a:noFill/>
+        </p:spPr>
+        <p:txBody>
+          <a:bodyPr wrap="none">
+            <a:spAutoFit/>
+          </a:bodyPr>
+          <a:lstStyle/>
+          <a:p>
+            <a:pPr algn="ctr">
+              <a:defRPr sz="1000">
+                <a:solidFill>
+                  <a:srgbClr val="6B7280"/>
+                </a:solidFill>
+                <a:latin typeface="微软雅黑" panose="020B0503020204020204" charset="-122"/>
+              </a:defRPr>
+            </a:pPr>
+            <a:r>
+              <a:t>10月</a:t>
+            </a:r>
+          </a:p>
+        </p:txBody>
+      </p:sp>
+      <p:sp>
+        <p:nvSpPr>
+          <p:cNvPr id="40" name="TextBox 39"/>
+          <p:cNvSpPr txBox="1"/>
+          <p:nvPr/>
+        </p:nvSpPr>
+        <p:spPr>
+          <a:xfrm>
+            <a:off x="10378440" y="2834640"/>
+            <a:ext cx="1188720" cy="2560320"/>
+          </a:xfrm>
+          <a:prstGeom prst="rect">
+            <a:avLst/>
+          </a:prstGeom>
+          <a:noFill/>
+        </p:spPr>
+        <p:txBody>
+          <a:bodyPr wrap="square">
+            <a:spAutoFit/>
+          </a:bodyPr>
+          <a:lstStyle/>
+          <a:p>
+            <a:pPr algn="ctr">
+              <a:defRPr sz="1000" b="1">
+                <a:solidFill>
+                  <a:srgbClr val="16A34A"/>
+                </a:solidFill>
+                <a:latin typeface="微软雅黑" panose="020B0503020204020204" charset="-122"/>
+              </a:defRPr>
+            </a:pPr>
+            <a:r>
+              <a:t>写回判定</a:t>
+            </a:r>
+          </a:p>
+          <a:p>
+            <a:pPr algn="ctr">
+              <a:defRPr sz="1000">
+                <a:solidFill>
+                  <a:srgbClr val="000000"/>
+                </a:solidFill>
+                <a:latin typeface="微软雅黑" panose="020B0503020204020204" charset="-122"/>
+              </a:defRPr>
+            </a:pPr>
+            <a:r>
+              <a:t>Sink对比</a:t>
+            </a:r>
+          </a:p>
+          <a:p>
+            <a:pPr algn="ctr">
+              <a:defRPr sz="1000">
+                <a:solidFill>
+                  <a:srgbClr val="000000"/>
+                </a:solidFill>
+                <a:latin typeface="微软雅黑" panose="020B0503020204020204" charset="-122"/>
+              </a:defRPr>
+            </a:pPr>
+            <a:r>
+              <a:t>保护约束</a:t>
+            </a:r>
           </a:p>
         </p:txBody>
       </p:sp>
@@ -14776,14 +14886,301 @@
       <p:grpSpPr/>
       <p:sp>
         <p:nvSpPr>
-          <p:cNvPr id="2" name="Rectangle 1"/>
+          <p:cNvPr id="2" name="TextBox 1"/>
+          <p:cNvSpPr txBox="1"/>
+          <p:nvPr/>
+        </p:nvSpPr>
+        <p:spPr>
+          <a:xfrm>
+            <a:off x="685800" y="804672"/>
+            <a:ext cx="10972800" cy="502920"/>
+          </a:xfrm>
+          <a:prstGeom prst="rect">
+            <a:avLst/>
+          </a:prstGeom>
+          <a:noFill/>
+        </p:spPr>
+        <p:txBody>
+          <a:bodyPr wrap="none" lIns="0" tIns="0" rIns="0" bIns="0">
+            <a:spAutoFit/>
+          </a:bodyPr>
+          <a:lstStyle/>
+          <a:p>
+            <a:pPr algn="ctr"/>
+            <a:r>
+              <a:rPr sz="2700" b="1">
+                <a:solidFill>
+                  <a:srgbClr val="172033"/>
+                </a:solidFill>
+                <a:latin typeface="微软雅黑" panose="020B0503020204020204" charset="-122"/>
+              </a:rPr>
+              <a:t>目录</a:t>
+            </a:r>
+            <a:endParaRPr sz="2700" b="1">
+              <a:solidFill>
+                <a:srgbClr val="172033"/>
+              </a:solidFill>
+              <a:latin typeface="微软雅黑" panose="020B0503020204020204" charset="-122"/>
+            </a:endParaRPr>
+          </a:p>
+        </p:txBody>
+      </p:sp>
+      <p:sp>
+        <p:nvSpPr>
+          <p:cNvPr id="4" name="TextBox 3"/>
+          <p:cNvSpPr txBox="1"/>
+          <p:nvPr/>
+        </p:nvSpPr>
+        <p:spPr>
+          <a:xfrm>
+            <a:off x="1078992" y="1965960"/>
+            <a:ext cx="512064" cy="384048"/>
+          </a:xfrm>
+          <a:prstGeom prst="rect">
+            <a:avLst/>
+          </a:prstGeom>
+          <a:noFill/>
+        </p:spPr>
+        <p:txBody>
+          <a:bodyPr wrap="none" lIns="0" tIns="0" rIns="0" bIns="0">
+            <a:spAutoFit/>
+          </a:bodyPr>
+          <a:lstStyle/>
+          <a:p>
+            <a:pPr algn="r"/>
+            <a:r>
+              <a:rPr sz="1900" b="1">
+                <a:solidFill>
+                  <a:srgbClr val="526078"/>
+                </a:solidFill>
+                <a:latin typeface="Arial" panose="020B0604020202020204"/>
+              </a:rPr>
+              <a:t>01</a:t>
+            </a:r>
+            <a:endParaRPr sz="1900" b="1">
+              <a:solidFill>
+                <a:srgbClr val="526078"/>
+              </a:solidFill>
+              <a:latin typeface="Arial" panose="020B0604020202020204"/>
+            </a:endParaRPr>
+          </a:p>
+        </p:txBody>
+      </p:sp>
+      <p:sp>
+        <p:nvSpPr>
+          <p:cNvPr id="5" name="TextBox 4"/>
+          <p:cNvSpPr txBox="1"/>
+          <p:nvPr/>
+        </p:nvSpPr>
+        <p:spPr>
+          <a:xfrm>
+            <a:off x="1783080" y="1965960"/>
+            <a:ext cx="5303520" cy="384048"/>
+          </a:xfrm>
+          <a:prstGeom prst="rect">
+            <a:avLst/>
+          </a:prstGeom>
+          <a:noFill/>
+        </p:spPr>
+        <p:txBody>
+          <a:bodyPr wrap="none" lIns="0" tIns="0" rIns="0" bIns="0">
+            <a:spAutoFit/>
+          </a:bodyPr>
+          <a:lstStyle/>
+          <a:p>
+            <a:pPr algn="l"/>
+            <a:r>
+              <a:rPr sz="1900" b="0">
+                <a:solidFill>
+                  <a:srgbClr val="2C3443"/>
+                </a:solidFill>
+                <a:latin typeface="微软雅黑" panose="020B0503020204020204" charset="-122"/>
+              </a:rPr>
+              <a:t>研究背景与问题</a:t>
+            </a:r>
+            <a:endParaRPr sz="1900" b="0">
+              <a:solidFill>
+                <a:srgbClr val="2C3443"/>
+              </a:solidFill>
+              <a:latin typeface="微软雅黑" panose="020B0503020204020204" charset="-122"/>
+            </a:endParaRPr>
+          </a:p>
+        </p:txBody>
+      </p:sp>
+      <p:sp>
+        <p:nvSpPr>
+          <p:cNvPr id="6" name="TextBox 5"/>
+          <p:cNvSpPr txBox="1"/>
+          <p:nvPr/>
+        </p:nvSpPr>
+        <p:spPr>
+          <a:xfrm>
+            <a:off x="1078992" y="2624328"/>
+            <a:ext cx="512064" cy="384048"/>
+          </a:xfrm>
+          <a:prstGeom prst="rect">
+            <a:avLst/>
+          </a:prstGeom>
+          <a:noFill/>
+        </p:spPr>
+        <p:txBody>
+          <a:bodyPr wrap="none" lIns="0" tIns="0" rIns="0" bIns="0">
+            <a:spAutoFit/>
+          </a:bodyPr>
+          <a:lstStyle/>
+          <a:p>
+            <a:pPr algn="r"/>
+            <a:r>
+              <a:rPr sz="1900" b="1">
+                <a:solidFill>
+                  <a:srgbClr val="526078"/>
+                </a:solidFill>
+                <a:latin typeface="Arial" panose="020B0604020202020204"/>
+              </a:rPr>
+              <a:t>02</a:t>
+            </a:r>
+            <a:endParaRPr sz="1900" b="1">
+              <a:solidFill>
+                <a:srgbClr val="526078"/>
+              </a:solidFill>
+              <a:latin typeface="Arial" panose="020B0604020202020204"/>
+            </a:endParaRPr>
+          </a:p>
+        </p:txBody>
+      </p:sp>
+      <p:sp>
+        <p:nvSpPr>
+          <p:cNvPr id="7" name="TextBox 6"/>
+          <p:cNvSpPr txBox="1"/>
+          <p:nvPr/>
+        </p:nvSpPr>
+        <p:spPr>
+          <a:xfrm>
+            <a:off x="1783080" y="2624328"/>
+            <a:ext cx="5303520" cy="384048"/>
+          </a:xfrm>
+          <a:prstGeom prst="rect">
+            <a:avLst/>
+          </a:prstGeom>
+          <a:noFill/>
+        </p:spPr>
+        <p:txBody>
+          <a:bodyPr wrap="none" lIns="0" tIns="0" rIns="0" bIns="0">
+            <a:spAutoFit/>
+          </a:bodyPr>
+          <a:lstStyle/>
+          <a:p>
+            <a:pPr algn="l"/>
+            <a:r>
+              <a:rPr sz="1900" b="0">
+                <a:solidFill>
+                  <a:srgbClr val="2C3443"/>
+                </a:solidFill>
+                <a:latin typeface="微软雅黑" panose="020B0503020204020204" charset="-122"/>
+              </a:rPr>
+              <a:t>预研基础与动机证据</a:t>
+            </a:r>
+            <a:endParaRPr sz="1900" b="0">
+              <a:solidFill>
+                <a:srgbClr val="2C3443"/>
+              </a:solidFill>
+              <a:latin typeface="微软雅黑" panose="020B0503020204020204" charset="-122"/>
+            </a:endParaRPr>
+          </a:p>
+        </p:txBody>
+      </p:sp>
+      <p:sp>
+        <p:nvSpPr>
+          <p:cNvPr id="8" name="TextBox 7"/>
+          <p:cNvSpPr txBox="1"/>
+          <p:nvPr/>
+        </p:nvSpPr>
+        <p:spPr>
+          <a:xfrm>
+            <a:off x="1078992" y="3282696"/>
+            <a:ext cx="512064" cy="384048"/>
+          </a:xfrm>
+          <a:prstGeom prst="rect">
+            <a:avLst/>
+          </a:prstGeom>
+          <a:noFill/>
+        </p:spPr>
+        <p:txBody>
+          <a:bodyPr wrap="none" lIns="0" tIns="0" rIns="0" bIns="0">
+            <a:spAutoFit/>
+          </a:bodyPr>
+          <a:lstStyle/>
+          <a:p>
+            <a:pPr algn="r"/>
+            <a:r>
+              <a:rPr sz="1900" b="1">
+                <a:solidFill>
+                  <a:srgbClr val="526078"/>
+                </a:solidFill>
+                <a:latin typeface="Arial" panose="020B0604020202020204"/>
+              </a:rPr>
+              <a:t>03</a:t>
+            </a:r>
+            <a:endParaRPr sz="1900" b="1">
+              <a:solidFill>
+                <a:srgbClr val="526078"/>
+              </a:solidFill>
+              <a:latin typeface="Arial" panose="020B0604020202020204"/>
+            </a:endParaRPr>
+          </a:p>
+        </p:txBody>
+      </p:sp>
+      <p:sp>
+        <p:nvSpPr>
+          <p:cNvPr id="9" name="TextBox 8"/>
+          <p:cNvSpPr txBox="1"/>
+          <p:nvPr/>
+        </p:nvSpPr>
+        <p:spPr>
+          <a:xfrm>
+            <a:off x="1783080" y="3282696"/>
+            <a:ext cx="5303520" cy="384048"/>
+          </a:xfrm>
+          <a:prstGeom prst="rect">
+            <a:avLst/>
+          </a:prstGeom>
+          <a:noFill/>
+        </p:spPr>
+        <p:txBody>
+          <a:bodyPr wrap="none" lIns="0" tIns="0" rIns="0" bIns="0">
+            <a:spAutoFit/>
+          </a:bodyPr>
+          <a:lstStyle/>
+          <a:p>
+            <a:pPr algn="l"/>
+            <a:r>
+              <a:rPr sz="1900" b="0">
+                <a:solidFill>
+                  <a:srgbClr val="2C3443"/>
+                </a:solidFill>
+                <a:latin typeface="微软雅黑" panose="020B0503020204020204" charset="-122"/>
+              </a:rPr>
+              <a:t>研究目标与内容</a:t>
+            </a:r>
+            <a:endParaRPr sz="1900" b="0">
+              <a:solidFill>
+                <a:srgbClr val="2C3443"/>
+              </a:solidFill>
+              <a:latin typeface="微软雅黑" panose="020B0503020204020204" charset="-122"/>
+            </a:endParaRPr>
+          </a:p>
+        </p:txBody>
+      </p:sp>
+      <p:sp>
+        <p:nvSpPr>
+          <p:cNvPr id="10" name="Rectangle 9"/>
           <p:cNvSpPr/>
           <p:nvPr/>
         </p:nvSpPr>
         <p:spPr>
           <a:xfrm>
-            <a:off x="548640" y="978408"/>
-            <a:ext cx="731520" cy="649224"/>
+            <a:off x="658368" y="3979468"/>
+            <a:ext cx="50292" cy="307238"/>
           </a:xfrm>
           <a:prstGeom prst="rect">
             <a:avLst/>
@@ -14810,33 +15207,23 @@
           </a:fontRef>
         </p:style>
         <p:txBody>
-          <a:bodyPr wrap="none" rtlCol="0" anchor="ctr"/>
-          <a:lstStyle/>
-          <a:p>
-            <a:pPr algn="ctr">
-              <a:defRPr sz="3200" b="1">
-                <a:solidFill>
-                  <a:srgbClr val="FFFFFF"/>
-                </a:solidFill>
-                <a:latin typeface="微软雅黑" panose="020B0503020204020204" charset="-122"/>
-              </a:defRPr>
-            </a:pPr>
-            <a:r>
-              <a:t>04</a:t>
-            </a:r>
-          </a:p>
-        </p:txBody>
-      </p:sp>
-      <p:sp>
-        <p:nvSpPr>
-          <p:cNvPr id="3" name="TextBox 2"/>
+          <a:bodyPr rtlCol="0" anchor="ctr"/>
+          <a:lstStyle/>
+          <a:p>
+            <a:pPr algn="ctr"/>
+          </a:p>
+        </p:txBody>
+      </p:sp>
+      <p:sp>
+        <p:nvSpPr>
+          <p:cNvPr id="11" name="TextBox 10"/>
           <p:cNvSpPr txBox="1"/>
           <p:nvPr/>
         </p:nvSpPr>
         <p:spPr>
           <a:xfrm>
-            <a:off x="1508760" y="1024128"/>
-            <a:ext cx="9144000" cy="502920"/>
+            <a:off x="1078992" y="3941064"/>
+            <a:ext cx="512064" cy="384048"/>
           </a:xfrm>
           <a:prstGeom prst="rect">
             <a:avLst/>
@@ -14844,33 +15231,40 @@
           <a:noFill/>
         </p:spPr>
         <p:txBody>
-          <a:bodyPr wrap="square"/>
-          <a:lstStyle/>
-          <a:p>
-            <a:pPr algn="l">
-              <a:defRPr sz="2800" b="1">
-                <a:solidFill>
-                  <a:srgbClr val="000000"/>
-                </a:solidFill>
-                <a:latin typeface="微软雅黑" panose="020B0503020204020204" charset="-122"/>
-              </a:defRPr>
-            </a:pPr>
-            <a:r>
-              <a:t>进度安排</a:t>
-            </a:r>
-          </a:p>
-        </p:txBody>
-      </p:sp>
-      <p:sp>
-        <p:nvSpPr>
-          <p:cNvPr id="5" name="TextBox 4"/>
+          <a:bodyPr wrap="none" lIns="0" tIns="0" rIns="0" bIns="0">
+            <a:spAutoFit/>
+          </a:bodyPr>
+          <a:lstStyle/>
+          <a:p>
+            <a:pPr algn="r"/>
+            <a:r>
+              <a:rPr sz="1900" b="1">
+                <a:solidFill>
+                  <a:srgbClr val="1588C7"/>
+                </a:solidFill>
+                <a:latin typeface="Arial" panose="020B0604020202020204"/>
+              </a:rPr>
+              <a:t>04</a:t>
+            </a:r>
+            <a:endParaRPr sz="1900" b="1">
+              <a:solidFill>
+                <a:srgbClr val="1588C7"/>
+              </a:solidFill>
+              <a:latin typeface="Arial" panose="020B0604020202020204"/>
+            </a:endParaRPr>
+          </a:p>
+        </p:txBody>
+      </p:sp>
+      <p:sp>
+        <p:nvSpPr>
+          <p:cNvPr id="12" name="TextBox 11"/>
           <p:cNvSpPr txBox="1"/>
           <p:nvPr/>
         </p:nvSpPr>
         <p:spPr>
           <a:xfrm>
-            <a:off x="548640" y="1920240"/>
-            <a:ext cx="10972800" cy="3200400"/>
+            <a:off x="1783080" y="3941064"/>
+            <a:ext cx="5303520" cy="384048"/>
           </a:xfrm>
           <a:prstGeom prst="rect">
             <a:avLst/>
@@ -14878,253 +15272,27 @@
           <a:noFill/>
         </p:spPr>
         <p:txBody>
-          <a:bodyPr wrap="square">
+          <a:bodyPr wrap="none" lIns="0" tIns="0" rIns="0" bIns="0">
             <a:spAutoFit/>
           </a:bodyPr>
           <a:lstStyle/>
           <a:p>
-            <a:pPr>
-              <a:spcAft>
-                <a:spcPts val="800"/>
-              </a:spcAft>
-              <a:defRPr sz="1500">
-                <a:solidFill>
-                  <a:srgbClr val="244C89"/>
+            <a:pPr algn="l"/>
+            <a:r>
+              <a:rPr sz="1900" b="1">
+                <a:solidFill>
+                  <a:srgbClr val="172033"/>
                 </a:solidFill>
                 <a:latin typeface="微软雅黑" panose="020B0503020204020204" charset="-122"/>
-              </a:defRPr>
-            </a:pPr>
-            <a:r>
-              <a:rPr>
-                <a:solidFill>
-                  <a:srgbClr val="244C89"/>
-                </a:solidFill>
               </a:rPr>
-              <a:t>■ 2026.07  开题报告 ✅ | vLLM baseline建立 ✅ | Daft接入 ✅ | token-tail revision ✅</a:t>
-            </a:r>
-            <a:endParaRPr>
+              <a:t>可行性与计划</a:t>
+            </a:r>
+            <a:endParaRPr sz="1900" b="1">
               <a:solidFill>
-                <a:srgbClr val="244C89"/>
+                <a:srgbClr val="172033"/>
               </a:solidFill>
+              <a:latin typeface="微软雅黑" panose="020B0503020204020204" charset="-122"/>
             </a:endParaRPr>
-          </a:p>
-          <a:p>
-            <a:pPr>
-              <a:spcAft>
-                <a:spcPts val="800"/>
-              </a:spcAft>
-              <a:defRPr sz="1500">
-                <a:solidFill>
-                  <a:srgbClr val="000000"/>
-                </a:solidFill>
-                <a:latin typeface="微软雅黑" panose="020B0503020204020204" charset="-122"/>
-              </a:defRPr>
-            </a:pPr>
-            <a:r>
-              <a:rPr>
-                <a:solidFill>
-                  <a:srgbClr val="244C89"/>
-                </a:solidFill>
-              </a:rPr>
-              <a:t>■ 2026.08  研究内容一消融：Token-budget / Length-align / Prefix-aware vs 静态baseline</a:t>
-            </a:r>
-            <a:endParaRPr>
-              <a:solidFill>
-                <a:srgbClr val="244C89"/>
-              </a:solidFill>
-            </a:endParaRPr>
-          </a:p>
-          <a:p>
-            <a:pPr>
-              <a:spcAft>
-                <a:spcPts val="800"/>
-              </a:spcAft>
-              <a:defRPr sz="1500">
-                <a:solidFill>
-                  <a:srgbClr val="000000"/>
-                </a:solidFill>
-                <a:latin typeface="微软雅黑" panose="020B0503020204020204" charset="-122"/>
-              </a:defRPr>
-            </a:pPr>
-            <a:r>
-              <a:rPr>
-                <a:solidFill>
-                  <a:srgbClr val="244C89"/>
-                </a:solidFill>
-              </a:rPr>
-              <a:t>■ 2026.09  研究内容二消融：Queue-adaptive / K_max动态 / Pool路由 vs 固定K_max + 耦合验证启动</a:t>
-            </a:r>
-            <a:endParaRPr>
-              <a:solidFill>
-                <a:srgbClr val="244C89"/>
-              </a:solidFill>
-            </a:endParaRPr>
-          </a:p>
-          <a:p>
-            <a:pPr>
-              <a:spcAft>
-                <a:spcPts val="800"/>
-              </a:spcAft>
-              <a:defRPr sz="1500">
-                <a:solidFill>
-                  <a:srgbClr val="000000"/>
-                </a:solidFill>
-                <a:latin typeface="微软雅黑" panose="020B0503020204020204" charset="-122"/>
-              </a:defRPr>
-            </a:pPr>
-            <a:r>
-              <a:rPr>
-                <a:solidFill>
-                  <a:srgbClr val="244C89"/>
-                </a:solidFill>
-              </a:rPr>
-              <a:t>■ 2026.10  写回瓶颈判定 + sink对比</a:t>
-            </a:r>
-            <a:endParaRPr>
-              <a:solidFill>
-                <a:srgbClr val="244C89"/>
-              </a:solidFill>
-            </a:endParaRPr>
-          </a:p>
-          <a:p>
-            <a:pPr>
-              <a:spcAft>
-                <a:spcPts val="800"/>
-              </a:spcAft>
-              <a:defRPr sz="1500">
-                <a:solidFill>
-                  <a:srgbClr val="000000"/>
-                </a:solidFill>
-                <a:latin typeface="微软雅黑" panose="020B0503020204020204" charset="-122"/>
-              </a:defRPr>
-            </a:pPr>
-            <a:r>
-              <a:rPr>
-                <a:solidFill>
-                  <a:srgbClr val="244C89"/>
-                </a:solidFill>
-              </a:rPr>
-              <a:t>■ 2026.11  整理统一方法，补齐消融与反证实验，形成可复现脚本和完整CSV</a:t>
-            </a:r>
-            <a:endParaRPr>
-              <a:solidFill>
-                <a:srgbClr val="244C89"/>
-              </a:solidFill>
-            </a:endParaRPr>
-          </a:p>
-          <a:p>
-            <a:pPr>
-              <a:spcAft>
-                <a:spcPts val="800"/>
-              </a:spcAft>
-              <a:defRPr sz="1500">
-                <a:solidFill>
-                  <a:srgbClr val="000000"/>
-                </a:solidFill>
-                <a:latin typeface="微软雅黑" panose="020B0503020204020204" charset="-122"/>
-              </a:defRPr>
-            </a:pPr>
-            <a:r>
-              <a:rPr>
-                <a:solidFill>
-                  <a:srgbClr val="244C89"/>
-                </a:solidFill>
-              </a:rPr>
-              <a:t>■ 2026.12+ 论文实验、图表、正文撰写、答辩材料准备</a:t>
-            </a:r>
-            <a:endParaRPr>
-              <a:solidFill>
-                <a:srgbClr val="244C89"/>
-              </a:solidFill>
-            </a:endParaRPr>
-          </a:p>
-        </p:txBody>
-      </p:sp>
-      <p:sp>
-        <p:nvSpPr>
-          <p:cNvPr id="6" name="Rectangle 5"/>
-          <p:cNvSpPr/>
-          <p:nvPr/>
-        </p:nvSpPr>
-        <p:spPr>
-          <a:xfrm>
-            <a:off x="201168" y="6318504"/>
-            <a:ext cx="41148" cy="329184"/>
-          </a:xfrm>
-          <a:prstGeom prst="rect">
-            <a:avLst/>
-          </a:prstGeom>
-          <a:solidFill>
-            <a:srgbClr val="2F6FEB"/>
-          </a:solidFill>
-          <a:ln>
-            <a:noFill/>
-          </a:ln>
-        </p:spPr>
-        <p:style>
-          <a:lnRef idx="1">
-            <a:schemeClr val="accent1"/>
-          </a:lnRef>
-          <a:fillRef idx="3">
-            <a:schemeClr val="accent1"/>
-          </a:fillRef>
-          <a:effectRef idx="2">
-            <a:schemeClr val="accent1"/>
-          </a:effectRef>
-          <a:fontRef idx="minor">
-            <a:schemeClr val="lt1"/>
-          </a:fontRef>
-        </p:style>
-        <p:txBody>
-          <a:bodyPr rtlCol="0" anchor="ctr"/>
-          <a:lstStyle/>
-          <a:p>
-            <a:pPr algn="ctr"/>
-          </a:p>
-        </p:txBody>
-      </p:sp>
-      <p:sp>
-        <p:nvSpPr>
-          <p:cNvPr id="7" name="TextBox 6"/>
-          <p:cNvSpPr txBox="1"/>
-          <p:nvPr/>
-        </p:nvSpPr>
-        <p:spPr>
-          <a:xfrm>
-            <a:off x="411480" y="6318504"/>
-            <a:ext cx="11201400" cy="329184"/>
-          </a:xfrm>
-          <a:prstGeom prst="rect">
-            <a:avLst/>
-          </a:prstGeom>
-          <a:noFill/>
-        </p:spPr>
-        <p:txBody>
-          <a:bodyPr wrap="square" lIns="0" tIns="0" rIns="0" bIns="0" anchor="ctr"/>
-          <a:lstStyle/>
-          <a:p>
-            <a:pPr algn="l">
-              <a:lnSpc>
-                <a:spcPct val="100000"/>
-              </a:lnSpc>
-              <a:spcBef>
-                <a:spcPts val="0"/>
-              </a:spcBef>
-              <a:spcAft>
-                <a:spcPts val="0"/>
-              </a:spcAft>
-              <a:defRPr sz="1200" b="1">
-                <a:solidFill>
-                  <a:srgbClr val="7C3AED"/>
-                </a:solidFill>
-                <a:latin typeface="微软雅黑" panose="020B0503020204020204" charset="-122"/>
-              </a:defRPr>
-            </a:pPr>
-            <a:r>
-              <a:rPr sz="1250"/>
-              <a:t>按基线→消融→耦合验证→写回判定顺序推进，每阶段保留可反证条件，不朝预设结论单向跑。</a:t>
-            </a:r>
-            <a:endParaRPr sz="1250"/>
           </a:p>
         </p:txBody>
       </p:sp>
@@ -15182,10 +15350,20 @@
           </a:fontRef>
         </p:style>
         <p:txBody>
-          <a:bodyPr rtlCol="0" anchor="ctr"/>
-          <a:lstStyle/>
-          <a:p>
-            <a:pPr algn="ctr"/>
+          <a:bodyPr wrap="none" rtlCol="0" anchor="ctr"/>
+          <a:lstStyle/>
+          <a:p>
+            <a:pPr algn="ctr">
+              <a:defRPr sz="3200" b="1">
+                <a:solidFill>
+                  <a:srgbClr val="FFFFFF"/>
+                </a:solidFill>
+                <a:latin typeface="微软雅黑" panose="020B0503020204020204" charset="-122"/>
+              </a:defRPr>
+            </a:pPr>
+            <a:r>
+              <a:t>04</a:t>
+            </a:r>
           </a:p>
         </p:txBody>
       </p:sp>
@@ -15218,7 +15396,7 @@
               </a:defRPr>
             </a:pPr>
             <a:r>
-              <a:t>总结</a:t>
+              <a:t>可行性与创新点</a:t>
             </a:r>
           </a:p>
         </p:txBody>
@@ -15232,7 +15410,41 @@
         <p:spPr>
           <a:xfrm>
             <a:off x="548640" y="1920240"/>
-            <a:ext cx="10972800" cy="3200400"/>
+            <a:ext cx="5303520" cy="320040"/>
+          </a:xfrm>
+          <a:prstGeom prst="rect">
+            <a:avLst/>
+          </a:prstGeom>
+          <a:noFill/>
+        </p:spPr>
+        <p:txBody>
+          <a:bodyPr wrap="square"/>
+          <a:lstStyle/>
+          <a:p>
+            <a:pPr algn="l">
+              <a:defRPr sz="1600" b="1">
+                <a:solidFill>
+                  <a:srgbClr val="7C3AED"/>
+                </a:solidFill>
+                <a:latin typeface="微软雅黑" panose="020B0503020204020204" charset="-122"/>
+              </a:defRPr>
+            </a:pPr>
+            <a:r>
+              <a:t>可行性依据</a:t>
+            </a:r>
+          </a:p>
+        </p:txBody>
+      </p:sp>
+      <p:sp>
+        <p:nvSpPr>
+          <p:cNvPr id="6" name="TextBox 5"/>
+          <p:cNvSpPr txBox="1"/>
+          <p:nvPr/>
+        </p:nvSpPr>
+        <p:spPr>
+          <a:xfrm>
+            <a:off x="548640" y="2286000"/>
+            <a:ext cx="5303520" cy="1511935"/>
           </a:xfrm>
           <a:prstGeom prst="rect">
             <a:avLst/>
@@ -15247,9 +15459,9 @@
           <a:p>
             <a:pPr>
               <a:spcAft>
-                <a:spcPts val="800"/>
+                <a:spcPts val="500"/>
               </a:spcAft>
-              <a:defRPr sz="1500">
+              <a:defRPr sz="1400">
                 <a:solidFill>
                   <a:srgbClr val="244C89"/>
                 </a:solidFill>
@@ -15262,7 +15474,7 @@
                   <a:srgbClr val="244C89"/>
                 </a:solidFill>
               </a:rPr>
-              <a:t>■ 场景真实：数据库已是AI workload入口（Snowflake/BigQuery/Oracle），AI算子外部执行链路需要独立优化</a:t>
+              <a:t>■ 真实GPU-backed链路已跑通——AI_EMBED预研 + AI_COMPLETE baseline，阶段计时方法成熟</a:t>
             </a:r>
             <a:endParaRPr>
               <a:solidFill>
@@ -15273,9 +15485,9 @@
           <a:p>
             <a:pPr>
               <a:spcAft>
-                <a:spcPts val="800"/>
+                <a:spcPts val="500"/>
               </a:spcAft>
-              <a:defRPr sz="1500">
+              <a:defRPr sz="1400">
                 <a:solidFill>
                   <a:srgbClr val="000000"/>
                 </a:solidFill>
@@ -15288,7 +15500,7 @@
                   <a:srgbClr val="244C89"/>
                 </a:solidFill>
               </a:rPr>
-              <a:t>■ 证据初步成立：GPU-backed预研显示batch粒度37.5×差异 + writeback成本量化 + vLLM baseline三项核心发现</a:t>
+              <a:t>■ Daft数据引擎接入已验证——管线开销&lt;0.1s，与手动Arrow路径同数量级</a:t>
             </a:r>
             <a:endParaRPr>
               <a:solidFill>
@@ -15299,9 +15511,9 @@
           <a:p>
             <a:pPr>
               <a:spcAft>
-                <a:spcPts val="800"/>
+                <a:spcPts val="500"/>
               </a:spcAft>
-              <a:defRPr sz="1500">
+              <a:defRPr sz="1400">
                 <a:solidFill>
                   <a:srgbClr val="000000"/>
                 </a:solidFill>
@@ -15314,7 +15526,7 @@
                   <a:srgbClr val="244C89"/>
                 </a:solidFill>
               </a:rPr>
-              <a:t>■ 后续聚焦：数据组织策略（token-budget/length-align/prefix-aware）+ 提交控制策略（queue-adaptive flush/pool路由）→ 耦合实验 → 写回判定</a:t>
+              <a:t>■ 风险降级：自适应3轮不超越则降级为K_max必要性论证；文本消融完成前不启动多模态</a:t>
             </a:r>
             <a:endParaRPr>
               <a:solidFill>
@@ -15322,14 +15534,71 @@
               </a:solidFill>
             </a:endParaRPr>
           </a:p>
+        </p:txBody>
+      </p:sp>
+      <p:sp>
+        <p:nvSpPr>
+          <p:cNvPr id="7" name="TextBox 6"/>
+          <p:cNvSpPr txBox="1"/>
+          <p:nvPr/>
+        </p:nvSpPr>
+        <p:spPr>
+          <a:xfrm>
+            <a:off x="6217920" y="1920240"/>
+            <a:ext cx="5303520" cy="320040"/>
+          </a:xfrm>
+          <a:prstGeom prst="rect">
+            <a:avLst/>
+          </a:prstGeom>
+          <a:noFill/>
+        </p:spPr>
+        <p:txBody>
+          <a:bodyPr wrap="square"/>
+          <a:lstStyle/>
+          <a:p>
+            <a:pPr algn="l">
+              <a:defRPr sz="1600" b="1">
+                <a:solidFill>
+                  <a:srgbClr val="7C3AED"/>
+                </a:solidFill>
+                <a:latin typeface="微软雅黑" panose="020B0503020204020204" charset="-122"/>
+              </a:defRPr>
+            </a:pPr>
+            <a:r>
+              <a:t>预期创新点</a:t>
+            </a:r>
+          </a:p>
+        </p:txBody>
+      </p:sp>
+      <p:sp>
+        <p:nvSpPr>
+          <p:cNvPr id="8" name="TextBox 7"/>
+          <p:cNvSpPr txBox="1"/>
+          <p:nvPr/>
+        </p:nvSpPr>
+        <p:spPr>
+          <a:xfrm>
+            <a:off x="6217920" y="2286000"/>
+            <a:ext cx="5303520" cy="3017520"/>
+          </a:xfrm>
+          <a:prstGeom prst="rect">
+            <a:avLst/>
+          </a:prstGeom>
+          <a:noFill/>
+        </p:spPr>
+        <p:txBody>
+          <a:bodyPr wrap="square">
+            <a:spAutoFit/>
+          </a:bodyPr>
+          <a:lstStyle/>
           <a:p>
             <a:pPr>
               <a:spcAft>
-                <a:spcPts val="800"/>
+                <a:spcPts val="500"/>
               </a:spcAft>
-              <a:defRPr sz="1500">
-                <a:solidFill>
-                  <a:srgbClr val="000000"/>
+              <a:defRPr sz="1400">
+                <a:solidFill>
+                  <a:srgbClr val="244C89"/>
                 </a:solidFill>
                 <a:latin typeface="微软雅黑" panose="020B0503020204020204" charset="-122"/>
               </a:defRPr>
@@ -15340,7 +15609,7 @@
                   <a:srgbClr val="244C89"/>
                 </a:solidFill>
               </a:rPr>
-              <a:t>■ 边界清楚：不修改vLLM内部 · 不改造Ray核心 · 不做GPU kernel优化 · 不把CPU/fake当最终结论</a:t>
+              <a:t>■ 创新点①：AI workload感知的上游动态数据组织策略——在Ray侧设计token-budget/length-align/prefix-aware三种batching policy</a:t>
             </a:r>
             <a:endParaRPr>
               <a:solidFill>
@@ -15348,11 +15617,63 @@
               </a:solidFill>
             </a:endParaRPr>
           </a:p>
-        </p:txBody>
-      </p:sp>
-      <p:sp>
-        <p:nvSpPr>
-          <p:cNvPr id="6" name="Rectangle 5"/>
+          <a:p>
+            <a:pPr>
+              <a:spcAft>
+                <a:spcPts val="500"/>
+              </a:spcAft>
+              <a:defRPr sz="1400">
+                <a:solidFill>
+                  <a:srgbClr val="000000"/>
+                </a:solidFill>
+                <a:latin typeface="微软雅黑" panose="020B0503020204020204" charset="-122"/>
+              </a:defRPr>
+            </a:pPr>
+            <a:r>
+              <a:rPr>
+                <a:solidFill>
+                  <a:srgbClr val="244C89"/>
+                </a:solidFill>
+              </a:rPr>
+              <a:t>■ 创新点②：Ray actor去中心化自适应提交策略——每个actor独立观测vLLM队列状态自主决定flush时机</a:t>
+            </a:r>
+            <a:endParaRPr>
+              <a:solidFill>
+                <a:srgbClr val="244C89"/>
+              </a:solidFill>
+            </a:endParaRPr>
+          </a:p>
+          <a:p>
+            <a:pPr>
+              <a:spcAft>
+                <a:spcPts val="500"/>
+              </a:spcAft>
+              <a:defRPr sz="1400">
+                <a:solidFill>
+                  <a:srgbClr val="000000"/>
+                </a:solidFill>
+                <a:latin typeface="微软雅黑" panose="020B0503020204020204" charset="-122"/>
+              </a:defRPr>
+            </a:pPr>
+            <a:r>
+              <a:rPr>
+                <a:solidFill>
+                  <a:srgbClr val="244C89"/>
+                </a:solidFill>
+              </a:rPr>
+              <a:t>■ 创新点③：AI数据流持久化瓶颈判定——通过耦合验证与sink对比为全链路优化提供写入侧边界条件</a:t>
+            </a:r>
+            <a:endParaRPr>
+              <a:solidFill>
+                <a:srgbClr val="244C89"/>
+              </a:solidFill>
+            </a:endParaRPr>
+          </a:p>
+        </p:txBody>
+      </p:sp>
+      <p:sp>
+        <p:nvSpPr>
+          <p:cNvPr id="9" name="Rectangle 8"/>
           <p:cNvSpPr/>
           <p:nvPr/>
         </p:nvSpPr>
@@ -15395,6 +15716,645 @@
       </p:sp>
       <p:sp>
         <p:nvSpPr>
+          <p:cNvPr id="10" name="TextBox 9"/>
+          <p:cNvSpPr txBox="1"/>
+          <p:nvPr/>
+        </p:nvSpPr>
+        <p:spPr>
+          <a:xfrm>
+            <a:off x="411480" y="6318504"/>
+            <a:ext cx="11201400" cy="329184"/>
+          </a:xfrm>
+          <a:prstGeom prst="rect">
+            <a:avLst/>
+          </a:prstGeom>
+          <a:noFill/>
+        </p:spPr>
+        <p:txBody>
+          <a:bodyPr wrap="square" lIns="0" tIns="0" rIns="0" bIns="0" anchor="ctr"/>
+          <a:lstStyle/>
+          <a:p>
+            <a:pPr algn="l">
+              <a:lnSpc>
+                <a:spcPct val="100000"/>
+              </a:lnSpc>
+              <a:spcBef>
+                <a:spcPts val="0"/>
+              </a:spcBef>
+              <a:spcAft>
+                <a:spcPts val="0"/>
+              </a:spcAft>
+              <a:defRPr sz="1100" b="1">
+                <a:solidFill>
+                  <a:srgbClr val="7C3AED"/>
+                </a:solidFill>
+                <a:latin typeface="微软雅黑" panose="020B0503020204020204" charset="-122"/>
+              </a:defRPr>
+            </a:pPr>
+            <a:r>
+              <a:rPr sz="1250"/>
+              <a:t>方法已通过预研验证；硬件边界不影响核心方法；风险有明确触发条件和降级路径。创新点为预期，需后续实验验证。</a:t>
+            </a:r>
+            <a:endParaRPr sz="1250"/>
+          </a:p>
+        </p:txBody>
+      </p:sp>
+    </p:spTree>
+  </p:cSld>
+  <p:clrMapOvr>
+    <a:masterClrMapping/>
+  </p:clrMapOvr>
+</p:sld>
+</file>
+
+<file path=ppt/slides/slide25.xml><?xml version="1.0" encoding="utf-8"?>
+<p:sld xmlns:a="http://schemas.openxmlformats.org/drawingml/2006/main" xmlns:r="http://schemas.openxmlformats.org/officeDocument/2006/relationships" xmlns:p="http://schemas.openxmlformats.org/presentationml/2006/main" show="0">
+  <p:cSld>
+    <p:spTree>
+      <p:nvGrpSpPr>
+        <p:cNvPr id="1" name=""/>
+        <p:cNvGrpSpPr/>
+        <p:nvPr/>
+      </p:nvGrpSpPr>
+      <p:grpSpPr/>
+      <p:sp>
+        <p:nvSpPr>
+          <p:cNvPr id="3" name="TextBox 2"/>
+          <p:cNvSpPr txBox="1"/>
+          <p:nvPr/>
+        </p:nvSpPr>
+        <p:spPr>
+          <a:xfrm>
+            <a:off x="1463040" y="1024128"/>
+            <a:ext cx="9098280" cy="502920"/>
+          </a:xfrm>
+          <a:prstGeom prst="rect">
+            <a:avLst/>
+          </a:prstGeom>
+          <a:noFill/>
+        </p:spPr>
+        <p:txBody>
+          <a:bodyPr wrap="none" lIns="0" tIns="0" rIns="0" bIns="0">
+            <a:spAutoFit/>
+          </a:bodyPr>
+          <a:lstStyle/>
+          <a:p>
+            <a:pPr algn="l"/>
+            <a:r>
+              <a:rPr sz="2400" b="1">
+                <a:solidFill>
+                  <a:srgbClr val="172033"/>
+                </a:solidFill>
+              </a:rPr>
+              <a:t>后续工作：多模态泛化验证</a:t>
+            </a:r>
+            <a:endParaRPr sz="2400" b="1">
+              <a:solidFill>
+                <a:srgbClr val="172033"/>
+              </a:solidFill>
+            </a:endParaRPr>
+          </a:p>
+        </p:txBody>
+      </p:sp>
+      <p:sp>
+        <p:nvSpPr>
+          <p:cNvPr id="4" name="TextBox 3"/>
+          <p:cNvSpPr txBox="1"/>
+          <p:nvPr/>
+        </p:nvSpPr>
+        <p:spPr>
+          <a:xfrm>
+            <a:off x="548640" y="1772285"/>
+            <a:ext cx="10718165" cy="400050"/>
+          </a:xfrm>
+          <a:prstGeom prst="rect">
+            <a:avLst/>
+          </a:prstGeom>
+          <a:noFill/>
+        </p:spPr>
+        <p:txBody>
+          <a:bodyPr wrap="square" lIns="0" tIns="0" rIns="0" bIns="0">
+            <a:spAutoFit/>
+          </a:bodyPr>
+          <a:lstStyle/>
+          <a:p>
+            <a:pPr algn="l" eaLnBrk="1" hangingPunct="1"/>
+            <a:r>
+              <a:rPr sz="1300" b="0">
+                <a:solidFill>
+                  <a:srgbClr val="475569"/>
+                </a:solidFill>
+              </a:rPr>
+              <a:t>Daft 接入后的阶段耗时表明：DB 读取与组织开销仍小于 0.1s，后续图像 workload 可沿用同一数据管线，重点验证策略抽象是否从 token 预算扩展到 image/frame 预算。</a:t>
+            </a:r>
+            <a:endParaRPr sz="1300" b="0">
+              <a:solidFill>
+                <a:srgbClr val="475569"/>
+              </a:solidFill>
+            </a:endParaRPr>
+          </a:p>
+        </p:txBody>
+      </p:sp>
+      <p:pic>
+        <p:nvPicPr>
+          <p:cNvPr id="5" name="Picture 4" descr="b26_arrow_vs_daft_stage_breakdown.png"/>
+          <p:cNvPicPr>
+            <a:picLocks noChangeAspect="1"/>
+          </p:cNvPicPr>
+          <p:nvPr/>
+        </p:nvPicPr>
+        <p:blipFill>
+          <a:blip r:embed="rId1"/>
+          <a:srcRect l="1298" t="5645"/>
+          <a:stretch>
+            <a:fillRect/>
+          </a:stretch>
+        </p:blipFill>
+        <p:spPr>
+          <a:xfrm>
+            <a:off x="839470" y="2492375"/>
+            <a:ext cx="10427335" cy="3606165"/>
+          </a:xfrm>
+          <a:prstGeom prst="rect">
+            <a:avLst/>
+          </a:prstGeom>
+        </p:spPr>
+      </p:pic>
+      <p:sp>
+        <p:nvSpPr>
+          <p:cNvPr id="6" name="Rectangle 5"/>
+          <p:cNvSpPr/>
+          <p:nvPr/>
+        </p:nvSpPr>
+        <p:spPr>
+          <a:xfrm>
+            <a:off x="201168" y="6318504"/>
+            <a:ext cx="41148" cy="329184"/>
+          </a:xfrm>
+          <a:prstGeom prst="rect">
+            <a:avLst/>
+          </a:prstGeom>
+          <a:solidFill>
+            <a:srgbClr val="2F6FEB"/>
+          </a:solidFill>
+          <a:ln>
+            <a:noFill/>
+          </a:ln>
+        </p:spPr>
+        <p:style>
+          <a:lnRef idx="1">
+            <a:schemeClr val="accent1"/>
+          </a:lnRef>
+          <a:fillRef idx="3">
+            <a:schemeClr val="accent1"/>
+          </a:fillRef>
+          <a:effectRef idx="2">
+            <a:schemeClr val="accent1"/>
+          </a:effectRef>
+          <a:fontRef idx="minor">
+            <a:schemeClr val="lt1"/>
+          </a:fontRef>
+        </p:style>
+        <p:txBody>
+          <a:bodyPr rtlCol="0" anchor="ctr"/>
+          <a:lstStyle/>
+          <a:p>
+            <a:pPr algn="ctr"/>
+          </a:p>
+        </p:txBody>
+      </p:sp>
+      <p:sp>
+        <p:nvSpPr>
+          <p:cNvPr id="7" name="TextBox 6"/>
+          <p:cNvSpPr txBox="1"/>
+          <p:nvPr/>
+        </p:nvSpPr>
+        <p:spPr>
+          <a:xfrm>
+            <a:off x="411480" y="6318504"/>
+            <a:ext cx="11201400" cy="329184"/>
+          </a:xfrm>
+          <a:prstGeom prst="rect">
+            <a:avLst/>
+          </a:prstGeom>
+          <a:noFill/>
+        </p:spPr>
+        <p:txBody>
+          <a:bodyPr wrap="none" lIns="0" tIns="0" rIns="0" bIns="0" anchor="ctr">
+            <a:spAutoFit/>
+          </a:bodyPr>
+          <a:lstStyle/>
+          <a:p>
+            <a:pPr algn="l">
+              <a:lnSpc>
+                <a:spcPct val="100000"/>
+              </a:lnSpc>
+              <a:spcBef>
+                <a:spcPts val="0"/>
+              </a:spcBef>
+              <a:spcAft>
+                <a:spcPts val="0"/>
+              </a:spcAft>
+            </a:pPr>
+            <a:r>
+              <a:rPr sz="1250" b="1">
+                <a:solidFill>
+                  <a:srgbClr val="009650"/>
+                </a:solidFill>
+              </a:rPr>
+              <a:t>后续验证目标：同一套 Daft/Ray 策略代码从 prompt 列扩展到 image/frame 列，检查策略是否具有模态无关性。</a:t>
+            </a:r>
+            <a:endParaRPr sz="1250" b="1">
+              <a:solidFill>
+                <a:srgbClr val="009650"/>
+              </a:solidFill>
+            </a:endParaRPr>
+          </a:p>
+        </p:txBody>
+      </p:sp>
+      <p:sp>
+        <p:nvSpPr>
+          <p:cNvPr id="8" name="Rectangle 1"/>
+          <p:cNvSpPr/>
+          <p:nvPr/>
+        </p:nvSpPr>
+        <p:spPr>
+          <a:xfrm>
+            <a:off x="623570" y="951103"/>
+            <a:ext cx="731520" cy="649224"/>
+          </a:xfrm>
+          <a:prstGeom prst="rect">
+            <a:avLst/>
+          </a:prstGeom>
+          <a:solidFill>
+            <a:srgbClr val="1588C7"/>
+          </a:solidFill>
+          <a:ln>
+            <a:noFill/>
+          </a:ln>
+        </p:spPr>
+        <p:style>
+          <a:lnRef idx="1">
+            <a:schemeClr val="accent1"/>
+          </a:lnRef>
+          <a:fillRef idx="3">
+            <a:schemeClr val="accent1"/>
+          </a:fillRef>
+          <a:effectRef idx="2">
+            <a:schemeClr val="accent1"/>
+          </a:effectRef>
+          <a:fontRef idx="minor">
+            <a:schemeClr val="lt1"/>
+          </a:fontRef>
+        </p:style>
+        <p:txBody>
+          <a:bodyPr wrap="none" rtlCol="0" anchor="ctr"/>
+          <a:lstStyle/>
+          <a:p>
+            <a:pPr algn="ctr">
+              <a:defRPr sz="3200" b="1">
+                <a:solidFill>
+                  <a:srgbClr val="FFFFFF"/>
+                </a:solidFill>
+                <a:latin typeface="微软雅黑" panose="020B0503020204020204" charset="-122"/>
+              </a:defRPr>
+            </a:pPr>
+            <a:r>
+              <a:t>04</a:t>
+            </a:r>
+          </a:p>
+        </p:txBody>
+      </p:sp>
+    </p:spTree>
+  </p:cSld>
+  <p:clrMapOvr>
+    <a:masterClrMapping/>
+  </p:clrMapOvr>
+  <p:transition/>
+</p:sld>
+</file>
+
+<file path=ppt/slides/slide26.xml><?xml version="1.0" encoding="utf-8"?>
+<p:sld xmlns:a="http://schemas.openxmlformats.org/drawingml/2006/main" xmlns:r="http://schemas.openxmlformats.org/officeDocument/2006/relationships" xmlns:p="http://schemas.openxmlformats.org/presentationml/2006/main">
+  <p:cSld>
+    <p:spTree>
+      <p:nvGrpSpPr>
+        <p:cNvPr id="1" name=""/>
+        <p:cNvGrpSpPr/>
+        <p:nvPr/>
+      </p:nvGrpSpPr>
+      <p:grpSpPr/>
+      <p:sp>
+        <p:nvSpPr>
+          <p:cNvPr id="2" name="Rectangle 1"/>
+          <p:cNvSpPr/>
+          <p:nvPr/>
+        </p:nvSpPr>
+        <p:spPr>
+          <a:xfrm>
+            <a:off x="548640" y="978408"/>
+            <a:ext cx="731520" cy="649224"/>
+          </a:xfrm>
+          <a:prstGeom prst="rect">
+            <a:avLst/>
+          </a:prstGeom>
+          <a:solidFill>
+            <a:srgbClr val="1588C7"/>
+          </a:solidFill>
+          <a:ln>
+            <a:noFill/>
+          </a:ln>
+        </p:spPr>
+        <p:style>
+          <a:lnRef idx="1">
+            <a:schemeClr val="accent1"/>
+          </a:lnRef>
+          <a:fillRef idx="3">
+            <a:schemeClr val="accent1"/>
+          </a:fillRef>
+          <a:effectRef idx="2">
+            <a:schemeClr val="accent1"/>
+          </a:effectRef>
+          <a:fontRef idx="minor">
+            <a:schemeClr val="lt1"/>
+          </a:fontRef>
+        </p:style>
+        <p:txBody>
+          <a:bodyPr wrap="none" rtlCol="0" anchor="ctr"/>
+          <a:lstStyle/>
+          <a:p>
+            <a:pPr algn="ctr">
+              <a:defRPr sz="3200" b="1">
+                <a:solidFill>
+                  <a:srgbClr val="FFFFFF"/>
+                </a:solidFill>
+                <a:latin typeface="微软雅黑" panose="020B0503020204020204" charset="-122"/>
+              </a:defRPr>
+            </a:pPr>
+            <a:r>
+              <a:t>04</a:t>
+            </a:r>
+          </a:p>
+        </p:txBody>
+      </p:sp>
+      <p:sp>
+        <p:nvSpPr>
+          <p:cNvPr id="3" name="TextBox 2"/>
+          <p:cNvSpPr txBox="1"/>
+          <p:nvPr/>
+        </p:nvSpPr>
+        <p:spPr>
+          <a:xfrm>
+            <a:off x="1508760" y="1024128"/>
+            <a:ext cx="9144000" cy="502920"/>
+          </a:xfrm>
+          <a:prstGeom prst="rect">
+            <a:avLst/>
+          </a:prstGeom>
+          <a:noFill/>
+        </p:spPr>
+        <p:txBody>
+          <a:bodyPr wrap="square"/>
+          <a:lstStyle/>
+          <a:p>
+            <a:pPr algn="l">
+              <a:defRPr sz="2800" b="1">
+                <a:solidFill>
+                  <a:srgbClr val="000000"/>
+                </a:solidFill>
+                <a:latin typeface="微软雅黑" panose="020B0503020204020204" charset="-122"/>
+              </a:defRPr>
+            </a:pPr>
+            <a:r>
+              <a:t>进度安排</a:t>
+            </a:r>
+          </a:p>
+        </p:txBody>
+      </p:sp>
+      <p:sp>
+        <p:nvSpPr>
+          <p:cNvPr id="5" name="TextBox 4"/>
+          <p:cNvSpPr txBox="1"/>
+          <p:nvPr/>
+        </p:nvSpPr>
+        <p:spPr>
+          <a:xfrm>
+            <a:off x="548640" y="1920240"/>
+            <a:ext cx="10972800" cy="3200400"/>
+          </a:xfrm>
+          <a:prstGeom prst="rect">
+            <a:avLst/>
+          </a:prstGeom>
+          <a:noFill/>
+        </p:spPr>
+        <p:txBody>
+          <a:bodyPr wrap="square">
+            <a:spAutoFit/>
+          </a:bodyPr>
+          <a:lstStyle/>
+          <a:p>
+            <a:pPr>
+              <a:spcAft>
+                <a:spcPts val="800"/>
+              </a:spcAft>
+              <a:defRPr sz="1500">
+                <a:solidFill>
+                  <a:srgbClr val="244C89"/>
+                </a:solidFill>
+                <a:latin typeface="微软雅黑" panose="020B0503020204020204" charset="-122"/>
+              </a:defRPr>
+            </a:pPr>
+            <a:r>
+              <a:rPr>
+                <a:solidFill>
+                  <a:srgbClr val="244C89"/>
+                </a:solidFill>
+              </a:rPr>
+              <a:t>■ 2026.07  开题报告 ✅ | vLLM baseline建立 ✅ | Daft接入 ✅ | token-tail revision ✅</a:t>
+            </a:r>
+            <a:endParaRPr>
+              <a:solidFill>
+                <a:srgbClr val="244C89"/>
+              </a:solidFill>
+            </a:endParaRPr>
+          </a:p>
+          <a:p>
+            <a:pPr>
+              <a:spcAft>
+                <a:spcPts val="800"/>
+              </a:spcAft>
+              <a:defRPr sz="1500">
+                <a:solidFill>
+                  <a:srgbClr val="000000"/>
+                </a:solidFill>
+                <a:latin typeface="微软雅黑" panose="020B0503020204020204" charset="-122"/>
+              </a:defRPr>
+            </a:pPr>
+            <a:r>
+              <a:rPr>
+                <a:solidFill>
+                  <a:srgbClr val="244C89"/>
+                </a:solidFill>
+              </a:rPr>
+              <a:t>■ 2026.08  研究内容一消融：Token-budget / Length-align / Prefix-aware vs 静态baseline</a:t>
+            </a:r>
+            <a:endParaRPr>
+              <a:solidFill>
+                <a:srgbClr val="244C89"/>
+              </a:solidFill>
+            </a:endParaRPr>
+          </a:p>
+          <a:p>
+            <a:pPr>
+              <a:spcAft>
+                <a:spcPts val="800"/>
+              </a:spcAft>
+              <a:defRPr sz="1500">
+                <a:solidFill>
+                  <a:srgbClr val="000000"/>
+                </a:solidFill>
+                <a:latin typeface="微软雅黑" panose="020B0503020204020204" charset="-122"/>
+              </a:defRPr>
+            </a:pPr>
+            <a:r>
+              <a:rPr>
+                <a:solidFill>
+                  <a:srgbClr val="244C89"/>
+                </a:solidFill>
+              </a:rPr>
+              <a:t>■ 2026.09  研究内容二消融：Queue-adaptive / K_max动态 / Pool路由 vs 固定K_max + 耦合验证启动</a:t>
+            </a:r>
+            <a:endParaRPr>
+              <a:solidFill>
+                <a:srgbClr val="244C89"/>
+              </a:solidFill>
+            </a:endParaRPr>
+          </a:p>
+          <a:p>
+            <a:pPr>
+              <a:spcAft>
+                <a:spcPts val="800"/>
+              </a:spcAft>
+              <a:defRPr sz="1500">
+                <a:solidFill>
+                  <a:srgbClr val="000000"/>
+                </a:solidFill>
+                <a:latin typeface="微软雅黑" panose="020B0503020204020204" charset="-122"/>
+              </a:defRPr>
+            </a:pPr>
+            <a:r>
+              <a:rPr>
+                <a:solidFill>
+                  <a:srgbClr val="244C89"/>
+                </a:solidFill>
+              </a:rPr>
+              <a:t>■ 2026.10  写回瓶颈判定 + sink对比</a:t>
+            </a:r>
+            <a:endParaRPr>
+              <a:solidFill>
+                <a:srgbClr val="244C89"/>
+              </a:solidFill>
+            </a:endParaRPr>
+          </a:p>
+          <a:p>
+            <a:pPr>
+              <a:spcAft>
+                <a:spcPts val="800"/>
+              </a:spcAft>
+              <a:defRPr sz="1500">
+                <a:solidFill>
+                  <a:srgbClr val="000000"/>
+                </a:solidFill>
+                <a:latin typeface="微软雅黑" panose="020B0503020204020204" charset="-122"/>
+              </a:defRPr>
+            </a:pPr>
+            <a:r>
+              <a:rPr>
+                <a:solidFill>
+                  <a:srgbClr val="244C89"/>
+                </a:solidFill>
+              </a:rPr>
+              <a:t>■ 2026.11  整理统一方法，补齐消融与反证实验，形成可复现脚本和完整CSV</a:t>
+            </a:r>
+            <a:endParaRPr>
+              <a:solidFill>
+                <a:srgbClr val="244C89"/>
+              </a:solidFill>
+            </a:endParaRPr>
+          </a:p>
+          <a:p>
+            <a:pPr>
+              <a:spcAft>
+                <a:spcPts val="800"/>
+              </a:spcAft>
+              <a:defRPr sz="1500">
+                <a:solidFill>
+                  <a:srgbClr val="000000"/>
+                </a:solidFill>
+                <a:latin typeface="微软雅黑" panose="020B0503020204020204" charset="-122"/>
+              </a:defRPr>
+            </a:pPr>
+            <a:r>
+              <a:rPr>
+                <a:solidFill>
+                  <a:srgbClr val="244C89"/>
+                </a:solidFill>
+              </a:rPr>
+              <a:t>■ 2026.12+ 论文实验、图表、正文撰写、答辩材料准备</a:t>
+            </a:r>
+            <a:endParaRPr>
+              <a:solidFill>
+                <a:srgbClr val="244C89"/>
+              </a:solidFill>
+            </a:endParaRPr>
+          </a:p>
+        </p:txBody>
+      </p:sp>
+      <p:sp>
+        <p:nvSpPr>
+          <p:cNvPr id="6" name="Rectangle 5"/>
+          <p:cNvSpPr/>
+          <p:nvPr/>
+        </p:nvSpPr>
+        <p:spPr>
+          <a:xfrm>
+            <a:off x="201168" y="6318504"/>
+            <a:ext cx="41148" cy="329184"/>
+          </a:xfrm>
+          <a:prstGeom prst="rect">
+            <a:avLst/>
+          </a:prstGeom>
+          <a:solidFill>
+            <a:srgbClr val="2F6FEB"/>
+          </a:solidFill>
+          <a:ln>
+            <a:noFill/>
+          </a:ln>
+        </p:spPr>
+        <p:style>
+          <a:lnRef idx="1">
+            <a:schemeClr val="accent1"/>
+          </a:lnRef>
+          <a:fillRef idx="3">
+            <a:schemeClr val="accent1"/>
+          </a:fillRef>
+          <a:effectRef idx="2">
+            <a:schemeClr val="accent1"/>
+          </a:effectRef>
+          <a:fontRef idx="minor">
+            <a:schemeClr val="lt1"/>
+          </a:fontRef>
+        </p:style>
+        <p:txBody>
+          <a:bodyPr rtlCol="0" anchor="ctr"/>
+          <a:lstStyle/>
+          <a:p>
+            <a:pPr algn="ctr"/>
+          </a:p>
+        </p:txBody>
+      </p:sp>
+      <p:sp>
+        <p:nvSpPr>
           <p:cNvPr id="7" name="TextBox 6"/>
           <p:cNvSpPr txBox="1"/>
           <p:nvPr/>
@@ -15425,14 +16385,14 @@
               </a:spcAft>
               <a:defRPr sz="1200" b="1">
                 <a:solidFill>
-                  <a:srgbClr val="1588C7"/>
+                  <a:srgbClr val="7C3AED"/>
                 </a:solidFill>
                 <a:latin typeface="微软雅黑" panose="020B0503020204020204" charset="-122"/>
               </a:defRPr>
             </a:pPr>
             <a:r>
               <a:rPr sz="1250"/>
-              <a:t>题目有真实场景支撑，初步证据链成立，后续路线可执行且边界明确——恳请各位老师批评指正。</a:t>
+              <a:t>按基线→消融→耦合验证→写回判定顺序推进，每阶段保留可反证条件，不朝预设结论单向跑。</a:t>
             </a:r>
             <a:endParaRPr sz="1250"/>
           </a:p>
@@ -15446,7 +16406,317 @@
 </p:sld>
 </file>
 
-<file path=ppt/slides/slide25.xml><?xml version="1.0" encoding="utf-8"?>
+<file path=ppt/slides/slide27.xml><?xml version="1.0" encoding="utf-8"?>
+<p:sld xmlns:a="http://schemas.openxmlformats.org/drawingml/2006/main" xmlns:r="http://schemas.openxmlformats.org/officeDocument/2006/relationships" xmlns:p="http://schemas.openxmlformats.org/presentationml/2006/main">
+  <p:cSld>
+    <p:spTree>
+      <p:nvGrpSpPr>
+        <p:cNvPr id="1" name=""/>
+        <p:cNvGrpSpPr/>
+        <p:nvPr/>
+      </p:nvGrpSpPr>
+      <p:grpSpPr/>
+      <p:sp>
+        <p:nvSpPr>
+          <p:cNvPr id="2" name="Rectangle 1"/>
+          <p:cNvSpPr/>
+          <p:nvPr/>
+        </p:nvSpPr>
+        <p:spPr>
+          <a:xfrm>
+            <a:off x="548640" y="978408"/>
+            <a:ext cx="731520" cy="649224"/>
+          </a:xfrm>
+          <a:prstGeom prst="rect">
+            <a:avLst/>
+          </a:prstGeom>
+          <a:solidFill>
+            <a:srgbClr val="1588C7"/>
+          </a:solidFill>
+          <a:ln>
+            <a:noFill/>
+          </a:ln>
+        </p:spPr>
+        <p:style>
+          <a:lnRef idx="1">
+            <a:schemeClr val="accent1"/>
+          </a:lnRef>
+          <a:fillRef idx="3">
+            <a:schemeClr val="accent1"/>
+          </a:fillRef>
+          <a:effectRef idx="2">
+            <a:schemeClr val="accent1"/>
+          </a:effectRef>
+          <a:fontRef idx="minor">
+            <a:schemeClr val="lt1"/>
+          </a:fontRef>
+        </p:style>
+        <p:txBody>
+          <a:bodyPr rtlCol="0" anchor="ctr"/>
+          <a:lstStyle/>
+          <a:p>
+            <a:pPr algn="ctr"/>
+          </a:p>
+        </p:txBody>
+      </p:sp>
+      <p:sp>
+        <p:nvSpPr>
+          <p:cNvPr id="3" name="TextBox 2"/>
+          <p:cNvSpPr txBox="1"/>
+          <p:nvPr/>
+        </p:nvSpPr>
+        <p:spPr>
+          <a:xfrm>
+            <a:off x="1508760" y="1024128"/>
+            <a:ext cx="9144000" cy="502920"/>
+          </a:xfrm>
+          <a:prstGeom prst="rect">
+            <a:avLst/>
+          </a:prstGeom>
+          <a:noFill/>
+        </p:spPr>
+        <p:txBody>
+          <a:bodyPr wrap="square"/>
+          <a:lstStyle/>
+          <a:p>
+            <a:pPr algn="l">
+              <a:defRPr sz="2800" b="1">
+                <a:solidFill>
+                  <a:srgbClr val="000000"/>
+                </a:solidFill>
+                <a:latin typeface="微软雅黑" panose="020B0503020204020204" charset="-122"/>
+              </a:defRPr>
+            </a:pPr>
+            <a:r>
+              <a:t>总结</a:t>
+            </a:r>
+          </a:p>
+        </p:txBody>
+      </p:sp>
+      <p:sp>
+        <p:nvSpPr>
+          <p:cNvPr id="5" name="TextBox 4"/>
+          <p:cNvSpPr txBox="1"/>
+          <p:nvPr/>
+        </p:nvSpPr>
+        <p:spPr>
+          <a:xfrm>
+            <a:off x="548640" y="1920240"/>
+            <a:ext cx="10972800" cy="3200400"/>
+          </a:xfrm>
+          <a:prstGeom prst="rect">
+            <a:avLst/>
+          </a:prstGeom>
+          <a:noFill/>
+        </p:spPr>
+        <p:txBody>
+          <a:bodyPr wrap="square">
+            <a:spAutoFit/>
+          </a:bodyPr>
+          <a:lstStyle/>
+          <a:p>
+            <a:pPr eaLnBrk="1" hangingPunct="1">
+              <a:spcAft>
+                <a:spcPts val="800"/>
+              </a:spcAft>
+              <a:defRPr sz="1500">
+                <a:solidFill>
+                  <a:srgbClr val="244C89"/>
+                </a:solidFill>
+                <a:latin typeface="微软雅黑" panose="020B0503020204020204" charset="-122"/>
+              </a:defRPr>
+            </a:pPr>
+            <a:r>
+              <a:rPr>
+                <a:solidFill>
+                  <a:srgbClr val="244C89"/>
+                </a:solidFill>
+              </a:rPr>
+              <a:t>■ 场景真实：数据库已是AI workload入口（Snowflake/BigQuery/Oracle），AI算子外部执行链路需要独立优化</a:t>
+            </a:r>
+            <a:endParaRPr>
+              <a:solidFill>
+                <a:srgbClr val="244C89"/>
+              </a:solidFill>
+            </a:endParaRPr>
+          </a:p>
+          <a:p>
+            <a:pPr eaLnBrk="1" hangingPunct="1">
+              <a:spcAft>
+                <a:spcPts val="800"/>
+              </a:spcAft>
+              <a:defRPr sz="1500">
+                <a:solidFill>
+                  <a:srgbClr val="000000"/>
+                </a:solidFill>
+                <a:latin typeface="微软雅黑" panose="020B0503020204020204" charset="-122"/>
+              </a:defRPr>
+            </a:pPr>
+            <a:r>
+              <a:rPr>
+                <a:solidFill>
+                  <a:srgbClr val="244C89"/>
+                </a:solidFill>
+              </a:rPr>
+              <a:t>■ 证据初步成立：GPU-backed预研显示batch粒度37.5×差异 + writeback成本量化 + vLLM baseline三项核心发现</a:t>
+            </a:r>
+            <a:endParaRPr>
+              <a:solidFill>
+                <a:srgbClr val="244C89"/>
+              </a:solidFill>
+            </a:endParaRPr>
+          </a:p>
+          <a:p>
+            <a:pPr eaLnBrk="1" hangingPunct="1">
+              <a:spcAft>
+                <a:spcPts val="800"/>
+              </a:spcAft>
+              <a:defRPr sz="1500">
+                <a:solidFill>
+                  <a:srgbClr val="000000"/>
+                </a:solidFill>
+                <a:latin typeface="微软雅黑" panose="020B0503020204020204" charset="-122"/>
+              </a:defRPr>
+            </a:pPr>
+            <a:r>
+              <a:rPr>
+                <a:solidFill>
+                  <a:srgbClr val="244C89"/>
+                </a:solidFill>
+              </a:rPr>
+              <a:t>■ 后续聚焦：数据组织策略（token-budget/length-align/prefix-aware）+ 提交控制策略（queue-adaptive flush/pool路由）→ 耦合实验 → 写回判定</a:t>
+            </a:r>
+            <a:endParaRPr>
+              <a:solidFill>
+                <a:srgbClr val="244C89"/>
+              </a:solidFill>
+            </a:endParaRPr>
+          </a:p>
+          <a:p>
+            <a:pPr eaLnBrk="1" hangingPunct="1">
+              <a:spcAft>
+                <a:spcPts val="800"/>
+              </a:spcAft>
+              <a:defRPr sz="1500">
+                <a:solidFill>
+                  <a:srgbClr val="000000"/>
+                </a:solidFill>
+                <a:latin typeface="微软雅黑" panose="020B0503020204020204" charset="-122"/>
+              </a:defRPr>
+            </a:pPr>
+            <a:r>
+              <a:rPr>
+                <a:solidFill>
+                  <a:srgbClr val="244C89"/>
+                </a:solidFill>
+              </a:rPr>
+              <a:t>■ 边界清楚：不修改vLLM内部 · 不改造Ray核心 · 不做GPU kernel优化 · 不把CPU/fake当最终结论</a:t>
+            </a:r>
+            <a:endParaRPr>
+              <a:solidFill>
+                <a:srgbClr val="244C89"/>
+              </a:solidFill>
+            </a:endParaRPr>
+          </a:p>
+        </p:txBody>
+      </p:sp>
+      <p:sp>
+        <p:nvSpPr>
+          <p:cNvPr id="6" name="Rectangle 5"/>
+          <p:cNvSpPr/>
+          <p:nvPr/>
+        </p:nvSpPr>
+        <p:spPr>
+          <a:xfrm>
+            <a:off x="201168" y="6318504"/>
+            <a:ext cx="41148" cy="329184"/>
+          </a:xfrm>
+          <a:prstGeom prst="rect">
+            <a:avLst/>
+          </a:prstGeom>
+          <a:solidFill>
+            <a:srgbClr val="2F6FEB"/>
+          </a:solidFill>
+          <a:ln>
+            <a:noFill/>
+          </a:ln>
+        </p:spPr>
+        <p:style>
+          <a:lnRef idx="1">
+            <a:schemeClr val="accent1"/>
+          </a:lnRef>
+          <a:fillRef idx="3">
+            <a:schemeClr val="accent1"/>
+          </a:fillRef>
+          <a:effectRef idx="2">
+            <a:schemeClr val="accent1"/>
+          </a:effectRef>
+          <a:fontRef idx="minor">
+            <a:schemeClr val="lt1"/>
+          </a:fontRef>
+        </p:style>
+        <p:txBody>
+          <a:bodyPr rtlCol="0" anchor="ctr"/>
+          <a:lstStyle/>
+          <a:p>
+            <a:pPr algn="ctr"/>
+          </a:p>
+        </p:txBody>
+      </p:sp>
+      <p:sp>
+        <p:nvSpPr>
+          <p:cNvPr id="7" name="TextBox 6"/>
+          <p:cNvSpPr txBox="1"/>
+          <p:nvPr/>
+        </p:nvSpPr>
+        <p:spPr>
+          <a:xfrm>
+            <a:off x="411480" y="6318504"/>
+            <a:ext cx="11201400" cy="329184"/>
+          </a:xfrm>
+          <a:prstGeom prst="rect">
+            <a:avLst/>
+          </a:prstGeom>
+          <a:noFill/>
+        </p:spPr>
+        <p:txBody>
+          <a:bodyPr wrap="square" lIns="0" tIns="0" rIns="0" bIns="0" anchor="ctr"/>
+          <a:lstStyle/>
+          <a:p>
+            <a:pPr algn="l">
+              <a:lnSpc>
+                <a:spcPct val="100000"/>
+              </a:lnSpc>
+              <a:spcBef>
+                <a:spcPts val="0"/>
+              </a:spcBef>
+              <a:spcAft>
+                <a:spcPts val="0"/>
+              </a:spcAft>
+              <a:defRPr sz="1200" b="1">
+                <a:solidFill>
+                  <a:srgbClr val="1588C7"/>
+                </a:solidFill>
+                <a:latin typeface="微软雅黑" panose="020B0503020204020204" charset="-122"/>
+              </a:defRPr>
+            </a:pPr>
+            <a:r>
+              <a:rPr sz="1250"/>
+              <a:t>题目有真实场景支撑，初步证据链成立，后续路线可执行且边界明确——恳请各位老师批评指正。</a:t>
+            </a:r>
+            <a:endParaRPr sz="1250"/>
+          </a:p>
+        </p:txBody>
+      </p:sp>
+    </p:spTree>
+  </p:cSld>
+  <p:clrMapOvr>
+    <a:masterClrMapping/>
+  </p:clrMapOvr>
+</p:sld>
+</file>
+
+<file path=ppt/slides/slide28.xml><?xml version="1.0" encoding="utf-8"?>
 <p:sld xmlns:a="http://schemas.openxmlformats.org/drawingml/2006/main" xmlns:r="http://schemas.openxmlformats.org/officeDocument/2006/relationships" xmlns:p="http://schemas.openxmlformats.org/presentationml/2006/main">
   <p:cSld>
     <p:spTree>
@@ -15927,8 +17197,8 @@
         </p:nvSpPr>
         <p:spPr>
           <a:xfrm>
-            <a:off x="621665" y="5372100"/>
-            <a:ext cx="9904730" cy="937260"/>
+            <a:off x="685800" y="3572510"/>
+            <a:ext cx="10789285" cy="2390775"/>
           </a:xfrm>
           <a:prstGeom prst="rect">
             <a:avLst/>
@@ -15937,84 +17207,129 @@
         </p:spPr>
         <p:txBody>
           <a:bodyPr wrap="square">
-            <a:spAutoFit/>
+            <a:noAutofit/>
           </a:bodyPr>
           <a:lstStyle/>
           <a:p>
-            <a:pPr eaLnBrk="1" hangingPunct="1">
+            <a:pPr marL="285750" indent="-285750" eaLnBrk="1" hangingPunct="1">
+              <a:lnSpc>
+                <a:spcPct val="150000"/>
+              </a:lnSpc>
               <a:spcAft>
-                <a:spcPts val="600"/>
+                <a:spcPts val="0"/>
               </a:spcAft>
-              <a:defRPr sz="1500">
-                <a:solidFill>
-                  <a:srgbClr val="244C89"/>
+              <a:buFont typeface="Wingdings" panose="05000000000000000000" charset="0"/>
+              <a:buChar char="n"/>
+              <a:defRPr sz="1100" b="1">
+                <a:solidFill>
+                  <a:srgbClr val="1E293B"/>
                 </a:solidFill>
                 <a:latin typeface="微软雅黑" panose="020B0503020204020204" charset="-122"/>
               </a:defRPr>
             </a:pPr>
             <a:r>
-              <a:rPr>
-                <a:solidFill>
-                  <a:srgbClr val="244C89"/>
+              <a:rPr sz="1400"/>
+              <a:t>传统 SQL：数据不离开数据库。scan → filter → join → aggregate，全部在查询执行器内完成，优化器对每个阶段做代价估计和算子选择。</a:t>
+            </a:r>
+            <a:endParaRPr sz="1400"/>
+          </a:p>
+          <a:p>
+            <a:pPr marL="285750" indent="-285750">
+              <a:lnSpc>
+                <a:spcPct val="150000"/>
+              </a:lnSpc>
+              <a:spcAft>
+                <a:spcPts val="0"/>
+              </a:spcAft>
+              <a:buFont typeface="Wingdings" panose="05000000000000000000" charset="0"/>
+              <a:buChar char="n"/>
+              <a:defRPr sz="1100"/>
+            </a:pPr>
+            <a:r>
+              <a:rPr sz="1400" b="1">
+                <a:solidFill>
+                  <a:schemeClr val="tx1"/>
                 </a:solidFill>
               </a:rPr>
-              <a:t>■ 传统SQL算子：在数据库执行器内部完成（scan→filter→join→aggregate），数据不离开数据库进程</a:t>
-            </a:r>
-            <a:endParaRPr>
+              <a:t>AI 算子</a:t>
+            </a:r>
+            <a:r>
+              <a:rPr sz="1400">
+                <a:solidFill>
+                  <a:schemeClr val="tx1"/>
+                </a:solidFill>
+              </a:rPr>
+              <a:t>：增加了一个传统 SQL 没有的阶段</a:t>
+            </a:r>
+            <a:r>
+              <a:rPr lang="en-US" sz="1400">
+                <a:solidFill>
+                  <a:schemeClr val="tx1"/>
+                </a:solidFill>
+              </a:rPr>
+              <a:t>——</a:t>
+            </a:r>
+            <a:r>
+              <a:rPr sz="1400">
+                <a:solidFill>
+                  <a:schemeClr val="tx1"/>
+                </a:solidFill>
+              </a:rPr>
+              <a:t>模型推理。PostgresML、GaussML 等将推理嵌入数据库进程内，pgai、BigQuery ML、OceanBase 等通过网络调用外部模型服务。无论哪种方式，从数据读取到模型推理之间，都存在一段"中间地带"。</a:t>
+            </a:r>
+            <a:endParaRPr sz="1400">
               <a:solidFill>
-                <a:srgbClr val="244C89"/>
+                <a:schemeClr val="tx1"/>
               </a:solidFill>
             </a:endParaRPr>
           </a:p>
           <a:p>
-            <a:pPr eaLnBrk="1" hangingPunct="1">
+            <a:pPr marL="285750" indent="-285750">
+              <a:lnSpc>
+                <a:spcPct val="150000"/>
+              </a:lnSpc>
               <a:spcAft>
-                <a:spcPts val="600"/>
+                <a:spcPts val="0"/>
               </a:spcAft>
-              <a:defRPr sz="1500">
-                <a:solidFill>
-                  <a:srgbClr val="000000"/>
-                </a:solidFill>
-                <a:latin typeface="微软雅黑" panose="020B0503020204020204" charset="-122"/>
-              </a:defRPr>
-            </a:pPr>
-            <a:r>
-              <a:rPr>
-                <a:solidFill>
-                  <a:srgbClr val="244C89"/>
+              <a:buFont typeface="Wingdings" panose="05000000000000000000" charset="0"/>
+              <a:buChar char="n"/>
+              <a:defRPr sz="1100"/>
+            </a:pPr>
+            <a:r>
+              <a:rPr lang="zh-CN" sz="1400">
+                <a:solidFill>
+                  <a:schemeClr val="tx1"/>
                 </a:solidFill>
               </a:rPr>
-              <a:t>■ AI算子链路更长：表数据→Daft/Arrow batch组织→Ray调度执行→GPU推理服务→结果汇聚→写回</a:t>
-            </a:r>
-            <a:endParaRPr>
+              <a:t>决策环节</a:t>
+            </a:r>
+            <a:r>
+              <a:rPr sz="1400">
+                <a:solidFill>
+                  <a:schemeClr val="tx1"/>
+                </a:solidFill>
+              </a:rPr>
+              <a:t>：负责决定数据如何打包为请求（batch 粒度）、以什么节奏发送（提交并发）。在现有系统中，这些决策由各厂商内部实现，不是独立的优化目标。</a:t>
+            </a:r>
+            <a:r>
+              <a:rPr sz="1400" b="1">
+                <a:solidFill>
+                  <a:schemeClr val="tx1"/>
+                </a:solidFill>
+              </a:rPr>
+              <a:t>本课题把这个"数据→模型"之间的决策层称为上游调度——数据组织策略 + 提交控制策略</a:t>
+            </a:r>
+            <a:r>
+              <a:rPr sz="1400">
+                <a:solidFill>
+                  <a:schemeClr val="tx1"/>
+                </a:solidFill>
+              </a:rPr>
+              <a:t>，它是传统 SQL 优化器从未触及的新问题。</a:t>
+            </a:r>
+            <a:endParaRPr sz="1400">
               <a:solidFill>
-                <a:srgbClr val="244C89"/>
-              </a:solidFill>
-            </a:endParaRPr>
-          </a:p>
-          <a:p>
-            <a:pPr eaLnBrk="1" hangingPunct="1">
-              <a:spcAft>
-                <a:spcPts val="600"/>
-              </a:spcAft>
-              <a:defRPr sz="1500">
-                <a:solidFill>
-                  <a:srgbClr val="000000"/>
-                </a:solidFill>
-                <a:latin typeface="微软雅黑" panose="020B0503020204020204" charset="-122"/>
-              </a:defRPr>
-            </a:pPr>
-            <a:r>
-              <a:rPr>
-                <a:solidFill>
-                  <a:srgbClr val="244C89"/>
-                </a:solidFill>
-              </a:rPr>
-              <a:t>■ 端到端性能不只由GPU推理速度决定——数据组织方式、提交节奏、模型服务队列状态、结果写回批量共同影响</a:t>
-            </a:r>
-            <a:endParaRPr>
-              <a:solidFill>
-                <a:srgbClr val="244C89"/>
+                <a:schemeClr val="tx1"/>
               </a:solidFill>
             </a:endParaRPr>
           </a:p>
@@ -16071,8 +17386,8 @@
         </p:nvSpPr>
         <p:spPr>
           <a:xfrm>
-            <a:off x="411480" y="6318504"/>
-            <a:ext cx="11201400" cy="329184"/>
+            <a:off x="411480" y="6318250"/>
+            <a:ext cx="11372850" cy="328930"/>
           </a:xfrm>
           <a:prstGeom prst="rect">
             <a:avLst/>
@@ -16093,24 +17408,32 @@
               <a:spcAft>
                 <a:spcPts val="0"/>
               </a:spcAft>
-              <a:defRPr sz="1200" b="1">
-                <a:solidFill>
-                  <a:srgbClr val="2F6FEB"/>
+              <a:defRPr sz="1000" b="1">
+                <a:solidFill>
+                  <a:srgbClr val="475569"/>
                 </a:solidFill>
                 <a:latin typeface="微软雅黑" panose="020B0503020204020204" charset="-122"/>
               </a:defRPr>
             </a:pPr>
             <a:r>
-              <a:rPr sz="1250"/>
-              <a:t>AI算子的外部执行链路需要独立优化——上游数据如何组织为请求、以什么节奏发送、如何根据模型服务状态调节并发。</a:t>
-            </a:r>
-            <a:endParaRPr sz="1250"/>
+              <a:rPr sz="1200"/>
+              <a:t>无论推理在数据库内部还是外部完成，"数据读取"与"模型推理"之间都存在一段决策</a:t>
+            </a:r>
+            <a:r>
+              <a:rPr lang="zh-CN" sz="1200"/>
+              <a:t>地带</a:t>
+            </a:r>
+            <a:r>
+              <a:rPr sz="1200"/>
+              <a:t>。本课题把这个地带称为上游调度，研究其中的数据组织策略与提交控制策略。</a:t>
+            </a:r>
+            <a:endParaRPr sz="1200"/>
           </a:p>
         </p:txBody>
       </p:sp>
       <p:pic>
         <p:nvPicPr>
-          <p:cNvPr id="10" name="图片 9"/>
+          <p:cNvPr id="6" name="图片 5"/>
           <p:cNvPicPr>
             <a:picLocks noChangeAspect="1"/>
           </p:cNvPicPr>
@@ -16124,8 +17447,8 @@
         </p:blipFill>
         <p:spPr>
           <a:xfrm>
-            <a:off x="965200" y="1772285"/>
-            <a:ext cx="9870440" cy="3636010"/>
+            <a:off x="305435" y="2060575"/>
+            <a:ext cx="11563350" cy="1524000"/>
           </a:xfrm>
           <a:prstGeom prst="rect">
             <a:avLst/>
@@ -17050,7 +18373,23 @@
                   <a:srgbClr val="244C89"/>
                 </a:solidFill>
               </a:rPr>
-              <a:t>■ 完整链路：PostgreSQL → Arrow RecordBatch → Ray/Python → CUDA embedding endpoint → writeback，阶段计时均可独立观测</a:t>
+              <a:t>■ 完整链路：PostgreSQL → </a:t>
+            </a:r>
+            <a:r>
+              <a:rPr sz="1400">
+                <a:solidFill>
+                  <a:srgbClr val="FF0000"/>
+                </a:solidFill>
+              </a:rPr>
+              <a:t>Arrow RecordBatch</a:t>
+            </a:r>
+            <a:r>
+              <a:rPr sz="1400">
+                <a:solidFill>
+                  <a:srgbClr val="244C89"/>
+                </a:solidFill>
+              </a:rPr>
+              <a:t> → Ray/Python → CUDA embedding endpoint → writeback，阶段计时均可独立观测</a:t>
             </a:r>
             <a:endParaRPr sz="1400">
               <a:solidFill>
@@ -17485,7 +18824,15 @@
             </a:pPr>
             <a:r>
               <a:rPr sz="1250"/>
-              <a:t>三组信号共同指向：batch粒度和调度策略是上游优先调优方向；写回已量化作为端到端保护约束。</a:t>
+              <a:t>三组信号共同指向：batch粒度和调度策略是上游优先调优方向；写回已量化</a:t>
+            </a:r>
+            <a:r>
+              <a:rPr lang="zh-CN" altLang="en-US" sz="1250"/>
+              <a:t>纳入端到端效果评价，不作为独立优化目标</a:t>
+            </a:r>
+            <a:r>
+              <a:rPr sz="1250"/>
+              <a:t>。</a:t>
             </a:r>
             <a:endParaRPr sz="1250"/>
           </a:p>
@@ -17632,6 +18979,33 @@
             <a:r>
               <a:rPr>
                 <a:solidFill>
+                  <a:srgbClr val="FF0000"/>
+                </a:solidFill>
+                <a:sym typeface="+mn-ea"/>
+              </a:rPr>
+              <a:t>■ Daft管线已验证：开销&lt;0.1s，Rust内核+Arrow零拷贝——后续多模态实验可复用同一套pipeline代码</a:t>
+            </a:r>
+            <a:endParaRPr>
+              <a:solidFill>
+                <a:srgbClr val="FF0000"/>
+              </a:solidFill>
+            </a:endParaRPr>
+          </a:p>
+          <a:p>
+            <a:pPr>
+              <a:spcAft>
+                <a:spcPts val="600"/>
+              </a:spcAft>
+              <a:defRPr sz="1500">
+                <a:solidFill>
+                  <a:srgbClr val="244C89"/>
+                </a:solidFill>
+                <a:latin typeface="微软雅黑" panose="020B0503020204020204" charset="-122"/>
+              </a:defRPr>
+            </a:pPr>
+            <a:r>
+              <a:rPr>
+                <a:solidFill>
                   <a:srgbClr val="244C89"/>
                 </a:solidFill>
               </a:rPr>
@@ -17688,32 +19062,6 @@
                 </a:solidFill>
               </a:rPr>
               <a:t>■ 发现③：共享vLLM下无界提交伤害并发——前台作业端到端从4.9s恶化到11.4s（2.3×），证明需要in-flight控制</a:t>
-            </a:r>
-            <a:endParaRPr>
-              <a:solidFill>
-                <a:srgbClr val="244C89"/>
-              </a:solidFill>
-            </a:endParaRPr>
-          </a:p>
-          <a:p>
-            <a:pPr>
-              <a:spcAft>
-                <a:spcPts val="600"/>
-              </a:spcAft>
-              <a:defRPr sz="1500">
-                <a:solidFill>
-                  <a:srgbClr val="000000"/>
-                </a:solidFill>
-                <a:latin typeface="微软雅黑" panose="020B0503020204020204" charset="-122"/>
-              </a:defRPr>
-            </a:pPr>
-            <a:r>
-              <a:rPr>
-                <a:solidFill>
-                  <a:srgbClr val="244C89"/>
-                </a:solidFill>
-              </a:rPr>
-              <a:t>■ Daft管线已验证：开销&lt;0.1s，Rust内核+Arrow零拷贝——后续多模态实验可复用同一套pipeline代码</a:t>
             </a:r>
             <a:endParaRPr>
               <a:solidFill>
@@ -17813,7 +19161,7 @@
       </p:sp>
       <p:pic>
         <p:nvPicPr>
-          <p:cNvPr id="9" name="图片 8"/>
+          <p:cNvPr id="6" name="图片 5"/>
           <p:cNvPicPr>
             <a:picLocks noChangeAspect="1"/>
           </p:cNvPicPr>
@@ -17821,20 +19169,282 @@
         </p:nvPicPr>
         <p:blipFill>
           <a:blip r:embed="rId1"/>
+          <a:srcRect r="1568"/>
           <a:stretch>
             <a:fillRect/>
           </a:stretch>
         </p:blipFill>
         <p:spPr>
           <a:xfrm>
-            <a:off x="911860" y="1728470"/>
-            <a:ext cx="9673590" cy="3239770"/>
+            <a:off x="2174875" y="2564765"/>
+            <a:ext cx="7811770" cy="2559050"/>
           </a:xfrm>
           <a:prstGeom prst="rect">
             <a:avLst/>
           </a:prstGeom>
         </p:spPr>
       </p:pic>
+      <p:sp>
+        <p:nvSpPr>
+          <p:cNvPr id="9" name="TextBox 4"/>
+          <p:cNvSpPr txBox="1"/>
+          <p:nvPr/>
+        </p:nvSpPr>
+        <p:spPr>
+          <a:xfrm>
+            <a:off x="0" y="1700530"/>
+            <a:ext cx="12214225" cy="767715"/>
+          </a:xfrm>
+          <a:prstGeom prst="rect">
+            <a:avLst/>
+          </a:prstGeom>
+          <a:noFill/>
+        </p:spPr>
+        <p:txBody>
+          <a:bodyPr wrap="square">
+            <a:noAutofit/>
+          </a:bodyPr>
+          <a:lstStyle/>
+          <a:p>
+            <a:pPr>
+              <a:spcAft>
+                <a:spcPts val="400"/>
+              </a:spcAft>
+              <a:defRPr sz="1300">
+                <a:solidFill>
+                  <a:srgbClr val="244C89"/>
+                </a:solidFill>
+                <a:latin typeface="微软雅黑" panose="020B0503020204020204" charset="-122"/>
+              </a:defRPr>
+            </a:pPr>
+            <a:r>
+              <a:rPr sz="1400">
+                <a:solidFill>
+                  <a:srgbClr val="244C89"/>
+                </a:solidFill>
+              </a:rPr>
+              <a:t>■ </a:t>
+            </a:r>
+            <a:r>
+              <a:rPr lang="zh-CN" altLang="en-US" sz="1400">
+                <a:solidFill>
+                  <a:srgbClr val="244C89"/>
+                </a:solidFill>
+              </a:rPr>
+              <a:t>实验环境：本地 </a:t>
+            </a:r>
+            <a:r>
+              <a:rPr lang="en-US" altLang="zh-CN" sz="1400">
+                <a:solidFill>
+                  <a:srgbClr val="244C89"/>
+                </a:solidFill>
+              </a:rPr>
+              <a:t>PG18.4 </a:t>
+            </a:r>
+            <a:r>
+              <a:rPr lang="zh-CN" altLang="en-US" sz="1400">
+                <a:solidFill>
+                  <a:srgbClr val="244C89"/>
+                </a:solidFill>
+              </a:rPr>
+              <a:t>同构预演 + </a:t>
+            </a:r>
+            <a:r>
+              <a:rPr lang="en-US" altLang="zh-CN" sz="1400">
+                <a:solidFill>
+                  <a:srgbClr val="244C89"/>
+                </a:solidFill>
+              </a:rPr>
+              <a:t>RTX 5070 12GB + vLLM + Qwen2.5-1.5B-Instruct，max_model_len=2048，gpu_memory_utilization=0.75</a:t>
+            </a:r>
+            <a:endParaRPr lang="en-US" altLang="zh-CN" sz="1400">
+              <a:solidFill>
+                <a:srgbClr val="244C89"/>
+              </a:solidFill>
+            </a:endParaRPr>
+          </a:p>
+          <a:p>
+            <a:pPr>
+              <a:spcAft>
+                <a:spcPts val="400"/>
+              </a:spcAft>
+              <a:defRPr sz="1300">
+                <a:solidFill>
+                  <a:srgbClr val="000000"/>
+                </a:solidFill>
+                <a:latin typeface="微软雅黑" panose="020B0503020204020204" charset="-122"/>
+              </a:defRPr>
+            </a:pPr>
+            <a:r>
+              <a:rPr sz="1400">
+                <a:solidFill>
+                  <a:srgbClr val="244C89"/>
+                </a:solidFill>
+              </a:rPr>
+              <a:t>■ </a:t>
+            </a:r>
+            <a:r>
+              <a:rPr lang="zh-CN" altLang="en-US" sz="1400">
+                <a:solidFill>
+                  <a:srgbClr val="244C89"/>
+                </a:solidFill>
+              </a:rPr>
+              <a:t>完整链路：</a:t>
+            </a:r>
+            <a:r>
+              <a:rPr lang="en-US" altLang="zh-CN" sz="1400">
+                <a:solidFill>
+                  <a:srgbClr val="244C89"/>
+                </a:solidFill>
+              </a:rPr>
+              <a:t>PostgreSQL → </a:t>
+            </a:r>
+            <a:r>
+              <a:rPr lang="en-US" altLang="zh-CN" sz="1400">
+                <a:solidFill>
+                  <a:srgbClr val="FF0000"/>
+                </a:solidFill>
+              </a:rPr>
+              <a:t>Daft（Rust </a:t>
+            </a:r>
+            <a:r>
+              <a:rPr lang="zh-CN" altLang="en-US" sz="1400">
+                <a:solidFill>
+                  <a:srgbClr val="FF0000"/>
+                </a:solidFill>
+              </a:rPr>
+              <a:t>核心 + </a:t>
+            </a:r>
+            <a:r>
+              <a:rPr lang="en-US" altLang="zh-CN" sz="1400">
+                <a:solidFill>
+                  <a:srgbClr val="FF0000"/>
+                </a:solidFill>
+              </a:rPr>
+              <a:t>Arrow </a:t>
+            </a:r>
+            <a:r>
+              <a:rPr lang="zh-CN" altLang="en-US" sz="1400">
+                <a:solidFill>
+                  <a:srgbClr val="FF0000"/>
+                </a:solidFill>
+              </a:rPr>
+              <a:t>零拷贝）</a:t>
+            </a:r>
+            <a:r>
+              <a:rPr lang="zh-CN" altLang="en-US" sz="1400">
+                <a:solidFill>
+                  <a:srgbClr val="244C89"/>
+                </a:solidFill>
+              </a:rPr>
+              <a:t>→ </a:t>
+            </a:r>
+            <a:r>
+              <a:rPr lang="en-US" altLang="zh-CN" sz="1400">
+                <a:solidFill>
+                  <a:srgbClr val="244C89"/>
+                </a:solidFill>
+              </a:rPr>
+              <a:t>Ray actor → vLLM continuous batching → </a:t>
+            </a:r>
+            <a:r>
+              <a:rPr lang="zh-CN" altLang="en-US" sz="1400">
+                <a:solidFill>
+                  <a:srgbClr val="244C89"/>
+                </a:solidFill>
+              </a:rPr>
+              <a:t>无写回（本阶段聚焦上游调度）</a:t>
+            </a:r>
+            <a:endParaRPr lang="zh-CN" altLang="en-US" sz="1400">
+              <a:solidFill>
+                <a:srgbClr val="244C89"/>
+              </a:solidFill>
+            </a:endParaRPr>
+          </a:p>
+          <a:p>
+            <a:pPr>
+              <a:spcAft>
+                <a:spcPts val="400"/>
+              </a:spcAft>
+              <a:defRPr sz="1300">
+                <a:solidFill>
+                  <a:srgbClr val="000000"/>
+                </a:solidFill>
+                <a:latin typeface="微软雅黑" panose="020B0503020204020204" charset="-122"/>
+              </a:defRPr>
+            </a:pPr>
+            <a:r>
+              <a:rPr sz="1400">
+                <a:solidFill>
+                  <a:srgbClr val="244C89"/>
+                </a:solidFill>
+                <a:sym typeface="+mn-ea"/>
+              </a:rPr>
+              <a:t>■ </a:t>
+            </a:r>
+            <a:r>
+              <a:rPr lang="zh-CN" altLang="en-US" sz="1400">
+                <a:solidFill>
+                  <a:srgbClr val="244C89"/>
+                </a:solidFill>
+                <a:sym typeface="+mn-ea"/>
+              </a:rPr>
+              <a:t>数据集：</a:t>
+            </a:r>
+            <a:r>
+              <a:rPr lang="en-US" altLang="zh-CN" sz="1400">
+                <a:solidFill>
+                  <a:srgbClr val="244C89"/>
+                </a:solidFill>
+                <a:sym typeface="+mn-ea"/>
+              </a:rPr>
+              <a:t>ShareGPT + BurstGPT，</a:t>
+            </a:r>
+            <a:r>
+              <a:rPr lang="zh-CN" altLang="en-US" sz="1400">
+                <a:solidFill>
+                  <a:srgbClr val="244C89"/>
+                </a:solidFill>
+                <a:sym typeface="+mn-ea"/>
+              </a:rPr>
+              <a:t>按 </a:t>
+            </a:r>
+            <a:r>
+              <a:rPr lang="en-US" altLang="zh-CN" sz="1400">
+                <a:solidFill>
+                  <a:srgbClr val="244C89"/>
+                </a:solidFill>
+                <a:sym typeface="+mn-ea"/>
+              </a:rPr>
+              <a:t>arrival_time </a:t>
+            </a:r>
+            <a:r>
+              <a:rPr lang="zh-CN" altLang="en-US" sz="1400">
+                <a:solidFill>
+                  <a:srgbClr val="244C89"/>
+                </a:solidFill>
+                <a:sym typeface="+mn-ea"/>
+              </a:rPr>
+              <a:t>排序，过滤 </a:t>
+            </a:r>
+            <a:r>
+              <a:rPr lang="en-US" altLang="zh-CN" sz="1400">
+                <a:solidFill>
+                  <a:srgbClr val="244C89"/>
+                </a:solidFill>
+                <a:sym typeface="+mn-ea"/>
+              </a:rPr>
+              <a:t>prompt_tokens + max_tokens ≤ 2048，total_rows=512</a:t>
+            </a:r>
+            <a:endParaRPr lang="en-US" altLang="zh-CN" sz="1400">
+              <a:solidFill>
+                <a:srgbClr val="244C89"/>
+              </a:solidFill>
+              <a:sym typeface="+mn-ea"/>
+            </a:endParaRPr>
+          </a:p>
+        </p:txBody>
+      </p:sp>
     </p:spTree>
   </p:cSld>
   <p:clrMapOvr>
